--- a/Week5_Slides.pptx
+++ b/Week5_Slides.pptx
@@ -3324,7 +3324,7 @@
         </p:nvSpPr>
         <p:spPr>
           <a:xfrm>
-            <a:off x="731520" y="1280160"/>
+            <a:off x="731520" y="1188720"/>
             <a:ext cx="10515600" cy="1005840"/>
           </a:xfrm>
           <a:prstGeom prst="rect">
@@ -3338,19 +3338,15 @@
           </a:bodyPr>
           <a:lstStyle/>
           <a:p>
-            <a:pPr algn="l">
-              <a:spcAft>
-                <a:spcPts val="0"/>
-              </a:spcAft>
-            </a:pPr>
-            <a:r>
-              <a:rPr sz="3800" b="1" i="0">
+            <a:pPr algn="l"/>
+            <a:r>
+              <a:rPr sz="3600" b="1" i="0">
                 <a:solidFill>
                   <a:srgbClr val="FFFFFF"/>
                 </a:solidFill>
-                <a:latin typeface="Calibri"/>
+                <a:latin typeface="Times New Roman"/>
               </a:rPr>
-              <a:t>DỰ BÁO NHU CẦU THỰC PHẨM TƯƠI</a:t>
+              <a:t>DU BAO NHU CAU THUC PHAM TUOI</a:t>
             </a:r>
           </a:p>
         </p:txBody>
@@ -3363,8 +3359,8 @@
         </p:nvSpPr>
         <p:spPr>
           <a:xfrm>
-            <a:off x="731520" y="2286000"/>
-            <a:ext cx="10515600" cy="640080"/>
+            <a:off x="731520" y="2240280"/>
+            <a:ext cx="10515600" cy="594360"/>
           </a:xfrm>
           <a:prstGeom prst="rect">
             <a:avLst/>
@@ -3377,19 +3373,15 @@
           </a:bodyPr>
           <a:lstStyle/>
           <a:p>
-            <a:pPr algn="l">
-              <a:spcAft>
-                <a:spcPts val="0"/>
-              </a:spcAft>
-            </a:pPr>
-            <a:r>
-              <a:rPr sz="2200" b="0" i="0">
+            <a:pPr algn="l"/>
+            <a:r>
+              <a:rPr sz="2100" b="0" i="0">
                 <a:solidFill>
                   <a:srgbClr val="BDD7EE"/>
                 </a:solidFill>
-                <a:latin typeface="Calibri"/>
+                <a:latin typeface="Times New Roman"/>
               </a:rPr>
-              <a:t>với Mô Hình Chuỗi Thời Gian (SARIMA / SARIMAX)</a:t>
+              <a:t>voi Mo Hinh Chuan Thoi Gian  (SARIMA / SARIMAX)</a:t>
             </a:r>
           </a:p>
         </p:txBody>
@@ -3402,7 +3394,7 @@
         </p:nvSpPr>
         <p:spPr>
           <a:xfrm>
-            <a:off x="731520" y="3017520"/>
+            <a:off x="731520" y="2926080"/>
             <a:ext cx="5029200" cy="25400"/>
           </a:xfrm>
           <a:prstGeom prst="rect">
@@ -3445,8 +3437,8 @@
         </p:nvSpPr>
         <p:spPr>
           <a:xfrm>
-            <a:off x="731520" y="3246120"/>
-            <a:ext cx="10058400" cy="411480"/>
+            <a:off x="731520" y="3154680"/>
+            <a:ext cx="10058400" cy="384048"/>
           </a:xfrm>
           <a:prstGeom prst="rect">
             <a:avLst/>
@@ -3459,17 +3451,13 @@
           </a:bodyPr>
           <a:lstStyle/>
           <a:p>
-            <a:pPr algn="l">
-              <a:spcAft>
-                <a:spcPts val="0"/>
-              </a:spcAft>
-            </a:pPr>
+            <a:pPr algn="l"/>
             <a:r>
               <a:rPr sz="1500" b="1" i="0">
                 <a:solidFill>
                   <a:srgbClr val="FFBF00"/>
                 </a:solidFill>
-                <a:latin typeface="Calibri"/>
+                <a:latin typeface="Times New Roman"/>
               </a:rPr>
               <a:t>Dataset: FreshRetailNet-50K  |  Dingdong Inc. (2024)</a:t>
             </a:r>
@@ -3484,8 +3472,8 @@
         </p:nvSpPr>
         <p:spPr>
           <a:xfrm>
-            <a:off x="731520" y="3657600"/>
-            <a:ext cx="10058400" cy="347472"/>
+            <a:off x="731520" y="3584448"/>
+            <a:ext cx="10058400" cy="329184"/>
           </a:xfrm>
           <a:prstGeom prst="rect">
             <a:avLst/>
@@ -3498,19 +3486,15 @@
           </a:bodyPr>
           <a:lstStyle/>
           <a:p>
-            <a:pPr algn="l">
-              <a:spcAft>
-                <a:spcPts val="0"/>
-              </a:spcAft>
-            </a:pPr>
+            <a:pPr algn="l"/>
             <a:r>
               <a:rPr sz="1200" b="0" i="0">
                 <a:solidFill>
                   <a:srgbClr val="BDD7EE"/>
                 </a:solidFill>
-                <a:latin typeface="Calibri"/>
+                <a:latin typeface="Times New Roman"/>
               </a:rPr>
-              <a:t>Nguồn: huggingface.co/datasets/Dingdong-Inc/FreshRetailNet-50K</a:t>
+              <a:t>huggingface.co/datasets/Dingdong-Inc/FreshRetailNet-50K  |  CC-BY-4.0  |  ArXiv 2505.16319</a:t>
             </a:r>
           </a:p>
         </p:txBody>
@@ -3523,7 +3507,7 @@
         </p:nvSpPr>
         <p:spPr>
           <a:xfrm>
-            <a:off x="731520" y="4160520"/>
+            <a:off x="731520" y="4069080"/>
             <a:ext cx="5029200" cy="19050"/>
           </a:xfrm>
           <a:prstGeom prst="rect">
@@ -3566,8 +3550,8 @@
         </p:nvSpPr>
         <p:spPr>
           <a:xfrm>
-            <a:off x="731520" y="4343400"/>
-            <a:ext cx="10058400" cy="347472"/>
+            <a:off x="731520" y="4224528"/>
+            <a:ext cx="10058400" cy="329184"/>
           </a:xfrm>
           <a:prstGeom prst="rect">
             <a:avLst/>
@@ -3580,17 +3564,13 @@
           </a:bodyPr>
           <a:lstStyle/>
           <a:p>
-            <a:pPr algn="l">
-              <a:spcAft>
-                <a:spcPts val="0"/>
-              </a:spcAft>
-            </a:pPr>
+            <a:pPr algn="l"/>
             <a:r>
               <a:rPr sz="1300" b="0" i="0">
                 <a:solidFill>
                   <a:srgbClr val="D0D8E4"/>
                 </a:solidFill>
-                <a:latin typeface="Calibri"/>
+                <a:latin typeface="Times New Roman"/>
               </a:rPr>
               <a:t>Week 5 Progress Milestone  |  Time Series &amp; Forecasting Course</a:t>
             </a:r>
@@ -3605,8 +3585,8 @@
         </p:nvSpPr>
         <p:spPr>
           <a:xfrm>
-            <a:off x="731520" y="4736592"/>
-            <a:ext cx="3657600" cy="347472"/>
+            <a:off x="731520" y="4617720"/>
+            <a:ext cx="3657600" cy="329184"/>
           </a:xfrm>
           <a:prstGeom prst="rect">
             <a:avLst/>
@@ -3619,19 +3599,15 @@
           </a:bodyPr>
           <a:lstStyle/>
           <a:p>
-            <a:pPr algn="l">
-              <a:spcAft>
-                <a:spcPts val="0"/>
-              </a:spcAft>
-            </a:pPr>
+            <a:pPr algn="l"/>
             <a:r>
               <a:rPr sz="1300" b="0" i="0">
                 <a:solidFill>
                   <a:srgbClr val="D0D8E4"/>
                 </a:solidFill>
-                <a:latin typeface="Calibri"/>
+                <a:latin typeface="Times New Roman"/>
               </a:rPr>
-              <a:t>Tháng 5 / 2026</a:t>
+              <a:t>Thang 5 / 2026</a:t>
             </a:r>
           </a:p>
         </p:txBody>
@@ -3805,19 +3781,15 @@
           </a:bodyPr>
           <a:lstStyle/>
           <a:p>
-            <a:pPr algn="l">
-              <a:spcAft>
-                <a:spcPts val="0"/>
-              </a:spcAft>
-            </a:pPr>
+            <a:pPr algn="l"/>
             <a:r>
               <a:rPr sz="2700" b="1" i="0">
                 <a:solidFill>
                   <a:srgbClr val="FFFFFF"/>
                 </a:solidFill>
-                <a:latin typeface="Calibri"/>
+                <a:latin typeface="Times New Roman"/>
               </a:rPr>
-              <a:t>Lựa Chọn Mô Hình — So Sánh Candidates</a:t>
+              <a:t>Lua Chon Mo Hinh — So Sanh Candidates</a:t>
             </a:r>
           </a:p>
         </p:txBody>
@@ -3887,17 +3859,13 @@
           </a:bodyPr>
           <a:lstStyle/>
           <a:p>
-            <a:pPr algn="l">
-              <a:spcAft>
-                <a:spcPts val="0"/>
-              </a:spcAft>
-            </a:pPr>
+            <a:pPr algn="l"/>
             <a:r>
               <a:rPr sz="900" b="0" i="0">
                 <a:solidFill>
                   <a:srgbClr val="BDD7EE"/>
                 </a:solidFill>
-                <a:latin typeface="Calibri"/>
+                <a:latin typeface="Times New Roman"/>
               </a:rPr>
               <a:t>FreshRetailNet-50K  |  Week 5 Milestone  |  Time Series &amp; Forecasting</a:t>
             </a:r>
@@ -3926,17 +3894,13 @@
           </a:bodyPr>
           <a:lstStyle/>
           <a:p>
-            <a:pPr algn="r">
-              <a:spcAft>
-                <a:spcPts val="0"/>
-              </a:spcAft>
-            </a:pPr>
+            <a:pPr algn="r"/>
             <a:r>
               <a:rPr sz="900" b="1" i="0">
                 <a:solidFill>
                   <a:srgbClr val="FFFFFF"/>
                 </a:solidFill>
-                <a:latin typeface="Calibri"/>
+                <a:latin typeface="Times New Roman"/>
               </a:rPr>
               <a:t>10 / 14</a:t>
             </a:r>
@@ -3952,7 +3916,7 @@
         <p:spPr>
           <a:xfrm>
             <a:off x="365760" y="1143000"/>
-            <a:ext cx="5029200" cy="320040"/>
+            <a:ext cx="5486400" cy="320040"/>
           </a:xfrm>
           <a:prstGeom prst="rect">
             <a:avLst/>
@@ -3995,7 +3959,7 @@
         <p:spPr>
           <a:xfrm>
             <a:off x="438912" y="1168400"/>
-            <a:ext cx="4937760" cy="320040"/>
+            <a:ext cx="5394960" cy="320040"/>
           </a:xfrm>
           <a:prstGeom prst="rect">
             <a:avLst/>
@@ -4008,19 +3972,15 @@
           </a:bodyPr>
           <a:lstStyle/>
           <a:p>
-            <a:pPr algn="l">
-              <a:spcAft>
-                <a:spcPts val="0"/>
-              </a:spcAft>
-            </a:pPr>
+            <a:pPr algn="l"/>
             <a:r>
               <a:rPr sz="1200" b="1" i="0">
                 <a:solidFill>
                   <a:srgbClr val="FFFFFF"/>
                 </a:solidFill>
-                <a:latin typeface="Calibri"/>
+                <a:latin typeface="Times New Roman"/>
               </a:rPr>
-              <a:t>🏆  Grid so sánh 5 candidate SARIMA (sorted by BIC)</a:t>
+              <a:t>Grid so sanh 5 candidate SARIMA (sorted by BIC)</a:t>
             </a:r>
           </a:p>
         </p:txBody>
@@ -4062,9 +4022,9 @@
                           <a:solidFill>
                             <a:srgbClr val="FFFFFF"/>
                           </a:solidFill>
-                          <a:latin typeface="Calibri"/>
-                        </a:rPr>
-                        <a:t>Mô hình</a:t>
+                          <a:latin typeface="Times New Roman"/>
+                        </a:rPr>
+                        <a:t>Mo hinh</a:t>
                       </a:r>
                     </a:p>
                   </a:txBody>
@@ -4085,7 +4045,7 @@
                           <a:solidFill>
                             <a:srgbClr val="FFFFFF"/>
                           </a:solidFill>
-                          <a:latin typeface="Calibri"/>
+                          <a:latin typeface="Times New Roman"/>
                         </a:rPr>
                         <a:t>AIC</a:t>
                       </a:r>
@@ -4108,7 +4068,7 @@
                           <a:solidFill>
                             <a:srgbClr val="FFFFFF"/>
                           </a:solidFill>
-                          <a:latin typeface="Calibri"/>
+                          <a:latin typeface="Times New Roman"/>
                         </a:rPr>
                         <a:t>BIC</a:t>
                       </a:r>
@@ -4131,7 +4091,7 @@
                           <a:solidFill>
                             <a:srgbClr val="FFFFFF"/>
                           </a:solidFill>
-                          <a:latin typeface="Calibri"/>
+                          <a:latin typeface="Times New Roman"/>
                         </a:rPr>
                         <a:t>Params</a:t>
                       </a:r>
@@ -4154,9 +4114,9 @@
                           <a:solidFill>
                             <a:srgbClr val="FFFFFF"/>
                           </a:solidFill>
-                          <a:latin typeface="Calibri"/>
-                        </a:rPr>
-                        <a:t>Ghi chú</a:t>
+                          <a:latin typeface="Times New Roman"/>
+                        </a:rPr>
+                        <a:t>Ghi chu</a:t>
                       </a:r>
                     </a:p>
                   </a:txBody>
@@ -4179,9 +4139,9 @@
                           <a:solidFill>
                             <a:srgbClr val="1A7A4A"/>
                           </a:solidFill>
-                          <a:latin typeface="Calibri"/>
-                        </a:rPr>
-                        <a:t>SARIMA(1,1,1)(0,1,1,7)  ←  BEST</a:t>
+                          <a:latin typeface="Times New Roman"/>
+                        </a:rPr>
+                        <a:t>SARIMA(1,1,1)(0,1,1,7)  &lt;- BEST</a:t>
                       </a:r>
                     </a:p>
                   </a:txBody>
@@ -4200,17 +4160,17 @@
                       <a:r>
                         <a:rPr sz="1200" b="0">
                           <a:solidFill>
-                            <a:srgbClr val="1A7A4A"/>
-                          </a:solidFill>
-                          <a:latin typeface="Calibri"/>
-                        </a:rPr>
-                        <a:t>−136.63</a:t>
-                      </a:r>
-                    </a:p>
-                  </a:txBody>
-                  <a:tcPr>
-                    <a:solidFill>
-                      <a:srgbClr val="D5F0E0"/>
+                            <a:srgbClr val="1A1A1A"/>
+                          </a:solidFill>
+                          <a:latin typeface="Times New Roman"/>
+                        </a:rPr>
+                        <a:t>-136.63</a:t>
+                      </a:r>
+                    </a:p>
+                  </a:txBody>
+                  <a:tcPr>
+                    <a:solidFill>
+                      <a:srgbClr val="FFFFFF"/>
                     </a:solidFill>
                   </a:tcPr>
                 </a:tc>
@@ -4223,17 +4183,17 @@
                       <a:r>
                         <a:rPr sz="1200" b="0">
                           <a:solidFill>
-                            <a:srgbClr val="1A7A4A"/>
-                          </a:solidFill>
-                          <a:latin typeface="Calibri"/>
-                        </a:rPr>
-                        <a:t>−127.47</a:t>
-                      </a:r>
-                    </a:p>
-                  </a:txBody>
-                  <a:tcPr>
-                    <a:solidFill>
-                      <a:srgbClr val="D5F0E0"/>
+                            <a:srgbClr val="1A1A1A"/>
+                          </a:solidFill>
+                          <a:latin typeface="Times New Roman"/>
+                        </a:rPr>
+                        <a:t>-127.47</a:t>
+                      </a:r>
+                    </a:p>
+                  </a:txBody>
+                  <a:tcPr>
+                    <a:solidFill>
+                      <a:srgbClr val="FFFFFF"/>
                     </a:solidFill>
                   </a:tcPr>
                 </a:tc>
@@ -4248,7 +4208,7 @@
                           <a:solidFill>
                             <a:srgbClr val="1A1A1A"/>
                           </a:solidFill>
-                          <a:latin typeface="Calibri"/>
+                          <a:latin typeface="Times New Roman"/>
                         </a:rPr>
                         <a:t>3</a:t>
                       </a:r>
@@ -4271,9 +4231,9 @@
                           <a:solidFill>
                             <a:srgbClr val="1A1A1A"/>
                           </a:solidFill>
-                          <a:latin typeface="Calibri"/>
-                        </a:rPr>
-                        <a:t>BIC thấp nhất; P=0 tối ưu</a:t>
+                          <a:latin typeface="Times New Roman"/>
+                        </a:rPr>
+                        <a:t>BIC thap nhat; P=0 toi uu</a:t>
                       </a:r>
                     </a:p>
                   </a:txBody>
@@ -4296,7 +4256,7 @@
                           <a:solidFill>
                             <a:srgbClr val="1A1A1A"/>
                           </a:solidFill>
-                          <a:latin typeface="Calibri"/>
+                          <a:latin typeface="Times New Roman"/>
                         </a:rPr>
                         <a:t>SARIMA(0,1,1)(1,1,1,7)</a:t>
                       </a:r>
@@ -4319,9 +4279,9 @@
                           <a:solidFill>
                             <a:srgbClr val="1A1A1A"/>
                           </a:solidFill>
-                          <a:latin typeface="Calibri"/>
-                        </a:rPr>
-                        <a:t>−130.33</a:t>
+                          <a:latin typeface="Times New Roman"/>
+                        </a:rPr>
+                        <a:t>-130.33</a:t>
                       </a:r>
                     </a:p>
                   </a:txBody>
@@ -4342,9 +4302,9 @@
                           <a:solidFill>
                             <a:srgbClr val="1A1A1A"/>
                           </a:solidFill>
-                          <a:latin typeface="Calibri"/>
-                        </a:rPr>
-                        <a:t>−121.17</a:t>
+                          <a:latin typeface="Times New Roman"/>
+                        </a:rPr>
+                        <a:t>-121.17</a:t>
                       </a:r>
                     </a:p>
                   </a:txBody>
@@ -4365,7 +4325,7 @@
                           <a:solidFill>
                             <a:srgbClr val="1A1A1A"/>
                           </a:solidFill>
-                          <a:latin typeface="Calibri"/>
+                          <a:latin typeface="Times New Roman"/>
                         </a:rPr>
                         <a:t>4</a:t>
                       </a:r>
@@ -4388,9 +4348,9 @@
                           <a:solidFill>
                             <a:srgbClr val="1A1A1A"/>
                           </a:solidFill>
-                          <a:latin typeface="Calibri"/>
-                        </a:rPr>
-                        <a:t>Không có AR term</a:t>
+                          <a:latin typeface="Times New Roman"/>
+                        </a:rPr>
+                        <a:t>Khong co AR term</a:t>
                       </a:r>
                     </a:p>
                   </a:txBody>
@@ -4413,7 +4373,7 @@
                           <a:solidFill>
                             <a:srgbClr val="1A1A1A"/>
                           </a:solidFill>
-                          <a:latin typeface="Calibri"/>
+                          <a:latin typeface="Times New Roman"/>
                         </a:rPr>
                         <a:t>SARIMA(1,1,1)(1,1,1,7)</a:t>
                       </a:r>
@@ -4436,9 +4396,9 @@
                           <a:solidFill>
                             <a:srgbClr val="1A1A1A"/>
                           </a:solidFill>
-                          <a:latin typeface="Calibri"/>
-                        </a:rPr>
-                        <a:t>−129.90</a:t>
+                          <a:latin typeface="Times New Roman"/>
+                        </a:rPr>
+                        <a:t>-129.90</a:t>
                       </a:r>
                     </a:p>
                   </a:txBody>
@@ -4459,9 +4419,9 @@
                           <a:solidFill>
                             <a:srgbClr val="1A1A1A"/>
                           </a:solidFill>
-                          <a:latin typeface="Calibri"/>
-                        </a:rPr>
-                        <a:t>−118.45</a:t>
+                          <a:latin typeface="Times New Roman"/>
+                        </a:rPr>
+                        <a:t>-118.45</a:t>
                       </a:r>
                     </a:p>
                   </a:txBody>
@@ -4482,7 +4442,7 @@
                           <a:solidFill>
                             <a:srgbClr val="1A1A1A"/>
                           </a:solidFill>
-                          <a:latin typeface="Calibri"/>
+                          <a:latin typeface="Times New Roman"/>
                         </a:rPr>
                         <a:t>5</a:t>
                       </a:r>
@@ -4505,9 +4465,9 @@
                           <a:solidFill>
                             <a:srgbClr val="1A1A1A"/>
                           </a:solidFill>
-                          <a:latin typeface="Calibri"/>
-                        </a:rPr>
-                        <a:t>AIC tốt, BIC bị penalty</a:t>
+                          <a:latin typeface="Times New Roman"/>
+                        </a:rPr>
+                        <a:t>AIC tot, BIC bi penalty</a:t>
                       </a:r>
                     </a:p>
                   </a:txBody>
@@ -4530,7 +4490,7 @@
                           <a:solidFill>
                             <a:srgbClr val="1A1A1A"/>
                           </a:solidFill>
-                          <a:latin typeface="Calibri"/>
+                          <a:latin typeface="Times New Roman"/>
                         </a:rPr>
                         <a:t>SARIMA(2,1,1)(1,1,1,7)</a:t>
                       </a:r>
@@ -4553,9 +4513,9 @@
                           <a:solidFill>
                             <a:srgbClr val="1A1A1A"/>
                           </a:solidFill>
-                          <a:latin typeface="Calibri"/>
-                        </a:rPr>
-                        <a:t>−129.70</a:t>
+                          <a:latin typeface="Times New Roman"/>
+                        </a:rPr>
+                        <a:t>-129.70</a:t>
                       </a:r>
                     </a:p>
                   </a:txBody>
@@ -4576,9 +4536,9 @@
                           <a:solidFill>
                             <a:srgbClr val="1A1A1A"/>
                           </a:solidFill>
-                          <a:latin typeface="Calibri"/>
-                        </a:rPr>
-                        <a:t>−115.95</a:t>
+                          <a:latin typeface="Times New Roman"/>
+                        </a:rPr>
+                        <a:t>-115.95</a:t>
                       </a:r>
                     </a:p>
                   </a:txBody>
@@ -4599,7 +4559,7 @@
                           <a:solidFill>
                             <a:srgbClr val="1A1A1A"/>
                           </a:solidFill>
-                          <a:latin typeface="Calibri"/>
+                          <a:latin typeface="Times New Roman"/>
                         </a:rPr>
                         <a:t>6</a:t>
                       </a:r>
@@ -4622,9 +4582,9 @@
                           <a:solidFill>
                             <a:srgbClr val="1A1A1A"/>
                           </a:solidFill>
-                          <a:latin typeface="Calibri"/>
-                        </a:rPr>
-                        <a:t>Quá nhiều tham số</a:t>
+                          <a:latin typeface="Times New Roman"/>
+                        </a:rPr>
+                        <a:t>Qua nhieu tham so</a:t>
                       </a:r>
                     </a:p>
                   </a:txBody>
@@ -4647,7 +4607,7 @@
                           <a:solidFill>
                             <a:srgbClr val="1A1A1A"/>
                           </a:solidFill>
-                          <a:latin typeface="Calibri"/>
+                          <a:latin typeface="Times New Roman"/>
                         </a:rPr>
                         <a:t>SARIMA(1,1,0)(1,1,1,7)</a:t>
                       </a:r>
@@ -4670,9 +4630,9 @@
                           <a:solidFill>
                             <a:srgbClr val="1A1A1A"/>
                           </a:solidFill>
-                          <a:latin typeface="Calibri"/>
-                        </a:rPr>
-                        <a:t>−116.68</a:t>
+                          <a:latin typeface="Times New Roman"/>
+                        </a:rPr>
+                        <a:t>-116.68</a:t>
                       </a:r>
                     </a:p>
                   </a:txBody>
@@ -4693,9 +4653,9 @@
                           <a:solidFill>
                             <a:srgbClr val="1A1A1A"/>
                           </a:solidFill>
-                          <a:latin typeface="Calibri"/>
-                        </a:rPr>
-                        <a:t>−107.47</a:t>
+                          <a:latin typeface="Times New Roman"/>
+                        </a:rPr>
+                        <a:t>-107.47</a:t>
                       </a:r>
                     </a:p>
                   </a:txBody>
@@ -4716,7 +4676,7 @@
                           <a:solidFill>
                             <a:srgbClr val="1A1A1A"/>
                           </a:solidFill>
-                          <a:latin typeface="Calibri"/>
+                          <a:latin typeface="Times New Roman"/>
                         </a:rPr>
                         <a:t>5</a:t>
                       </a:r>
@@ -4739,9 +4699,9 @@
                           <a:solidFill>
                             <a:srgbClr val="1A1A1A"/>
                           </a:solidFill>
-                          <a:latin typeface="Calibri"/>
-                        </a:rPr>
-                        <a:t>Yếu nhất</a:t>
+                          <a:latin typeface="Times New Roman"/>
+                        </a:rPr>
+                        <a:t>Yeu nhat</a:t>
                       </a:r>
                     </a:p>
                   </a:txBody>
@@ -4765,7 +4725,7 @@
         <p:spPr>
           <a:xfrm>
             <a:off x="365760" y="3749039"/>
-            <a:ext cx="4572000" cy="320040"/>
+            <a:ext cx="5029200" cy="320040"/>
           </a:xfrm>
           <a:prstGeom prst="rect">
             <a:avLst/>
@@ -4808,7 +4768,7 @@
         <p:spPr>
           <a:xfrm>
             <a:off x="438912" y="3774439"/>
-            <a:ext cx="4480560" cy="320040"/>
+            <a:ext cx="4937760" cy="320040"/>
           </a:xfrm>
           <a:prstGeom prst="rect">
             <a:avLst/>
@@ -4821,19 +4781,15 @@
           </a:bodyPr>
           <a:lstStyle/>
           <a:p>
-            <a:pPr algn="l">
-              <a:spcAft>
-                <a:spcPts val="0"/>
-              </a:spcAft>
-            </a:pPr>
+            <a:pPr algn="l"/>
             <a:r>
               <a:rPr sz="1200" b="1" i="0">
                 <a:solidFill>
                   <a:srgbClr val="FFFFFF"/>
                 </a:solidFill>
-                <a:latin typeface="Calibri"/>
+                <a:latin typeface="Times New Roman"/>
               </a:rPr>
-              <a:t>💡  Vì sao SARIMA(1,1,1)(0,1,1,7) thắng?</a:t>
+              <a:t>Vi sao SARIMA(1,1,1)(0,1,1,7) thang?</a:t>
             </a:r>
           </a:p>
         </p:txBody>
@@ -4847,7 +4803,7 @@
         <p:spPr>
           <a:xfrm>
             <a:off x="365760" y="4160520"/>
-            <a:ext cx="11430000" cy="2103120"/>
+            <a:ext cx="11430000" cy="2011680"/>
           </a:xfrm>
           <a:prstGeom prst="rect">
             <a:avLst/>
@@ -4870,9 +4826,9 @@
                 <a:solidFill>
                   <a:srgbClr val="1A1A1A"/>
                 </a:solidFill>
-                <a:latin typeface="Calibri"/>
+                <a:latin typeface="Times New Roman"/>
               </a:rPr>
-              <a:t>▸  P=0 (không có seasonal AR): PACF không spike tại lag 7 sau seasonal-diff</a:t>
+              <a:t>P=0: PACF khong spike tai lag 7 sau seasonal-diff</a:t>
             </a:r>
           </a:p>
           <a:p>
@@ -4886,9 +4842,9 @@
                 <a:solidFill>
                   <a:srgbClr val="1A1A1A"/>
                 </a:solidFill>
-                <a:latin typeface="Calibri"/>
+                <a:latin typeface="Times New Roman"/>
               </a:rPr>
-              <a:t>▸  BIC phạt mạnh số tham số thừa → mô hình đơn giản hơn được ưu tiên</a:t>
+              <a:t>BIC phat manh so tham so thua -&gt; mo hinh don gian hon duoc uu tien</a:t>
             </a:r>
           </a:p>
           <a:p>
@@ -4902,9 +4858,9 @@
                 <a:solidFill>
                   <a:srgbClr val="1A1A1A"/>
                 </a:solidFill>
-                <a:latin typeface="Calibri"/>
+                <a:latin typeface="Times New Roman"/>
               </a:rPr>
-              <a:t>▸  Nhất quán với kết quả ACF/PACF ở Phần 9</a:t>
+              <a:t>Nhat quan voi ket qua ACF/PACF o Phan 9</a:t>
             </a:r>
           </a:p>
           <a:p>
@@ -4918,9 +4874,9 @@
                 <a:solidFill>
                   <a:srgbClr val="1A1A1A"/>
                 </a:solidFill>
-                <a:latin typeface="Calibri"/>
+                <a:latin typeface="Times New Roman"/>
               </a:rPr>
-              <a:t>▸  Tất cả hệ số (ar.L1, ma.L1, ma.S.L7) đều significant (p &lt; 0.05)</a:t>
+              <a:t>Tat ca he so (ar.L1, ma.L1, ma.S.L7) deu significant (p&lt;0.05)</a:t>
             </a:r>
           </a:p>
         </p:txBody>
@@ -4990,19 +4946,15 @@
           </a:bodyPr>
           <a:lstStyle/>
           <a:p>
-            <a:pPr algn="l">
-              <a:spcAft>
-                <a:spcPts val="0"/>
-              </a:spcAft>
-            </a:pPr>
+            <a:pPr algn="l"/>
             <a:r>
               <a:rPr sz="1200" b="1" i="0">
                 <a:solidFill>
                   <a:srgbClr val="FFFFFF"/>
                 </a:solidFill>
-                <a:latin typeface="Calibri"/>
+                <a:latin typeface="Times New Roman"/>
               </a:rPr>
-              <a:t>→  Mô hình chọn:  SARIMA(1,1,1)(0,1,1)[7]  |  AIC = −136.6  |  BIC = −127.5</a:t>
+              <a:t>-&gt; Mo hinh chon: SARIMA(1,1,1)(0,1,1)[7]  |  AIC=-136.6  |  BIC=-127.5</a:t>
             </a:r>
           </a:p>
         </p:txBody>
@@ -5034,49 +4986,6 @@
         <p:spPr>
           <a:xfrm>
             <a:off x="0" y="0"/>
-            <a:ext cx="12188952" cy="6858000"/>
-          </a:xfrm>
-          <a:prstGeom prst="rect">
-            <a:avLst/>
-          </a:prstGeom>
-          <a:solidFill>
-            <a:srgbClr val="FFFFFF"/>
-          </a:solidFill>
-          <a:ln>
-            <a:noFill/>
-          </a:ln>
-        </p:spPr>
-        <p:style>
-          <a:lnRef idx="1">
-            <a:schemeClr val="accent1"/>
-          </a:lnRef>
-          <a:fillRef idx="3">
-            <a:schemeClr val="accent1"/>
-          </a:fillRef>
-          <a:effectRef idx="2">
-            <a:schemeClr val="accent1"/>
-          </a:effectRef>
-          <a:fontRef idx="minor">
-            <a:schemeClr val="lt1"/>
-          </a:fontRef>
-        </p:style>
-        <p:txBody>
-          <a:bodyPr rtlCol="0" anchor="ctr"/>
-          <a:lstStyle/>
-          <a:p>
-            <a:pPr algn="ctr"/>
-          </a:p>
-        </p:txBody>
-      </p:sp>
-      <p:sp>
-        <p:nvSpPr>
-          <p:cNvPr id="3" name="Rectangle 2"/>
-          <p:cNvSpPr/>
-          <p:nvPr/>
-        </p:nvSpPr>
-        <p:spPr>
-          <a:xfrm>
-            <a:off x="0" y="0"/>
             <a:ext cx="12188952" cy="1005840"/>
           </a:xfrm>
           <a:prstGeom prst="rect">
@@ -5113,7 +5022,7 @@
       </p:sp>
       <p:sp>
         <p:nvSpPr>
-          <p:cNvPr id="4" name="Rectangle 3"/>
+          <p:cNvPr id="3" name="Rectangle 2"/>
           <p:cNvSpPr/>
           <p:nvPr/>
         </p:nvSpPr>
@@ -5156,7 +5065,7 @@
       </p:sp>
       <p:sp>
         <p:nvSpPr>
-          <p:cNvPr id="5" name="TextBox 4"/>
+          <p:cNvPr id="4" name="TextBox 3"/>
           <p:cNvSpPr txBox="1"/>
           <p:nvPr/>
         </p:nvSpPr>
@@ -5176,26 +5085,22 @@
           </a:bodyPr>
           <a:lstStyle/>
           <a:p>
-            <a:pPr algn="l">
-              <a:spcAft>
-                <a:spcPts val="0"/>
-              </a:spcAft>
-            </a:pPr>
+            <a:pPr algn="l"/>
             <a:r>
               <a:rPr sz="2700" b="1" i="0">
                 <a:solidFill>
                   <a:srgbClr val="FFFFFF"/>
                 </a:solidFill>
-                <a:latin typeface="Calibri"/>
+                <a:latin typeface="Times New Roman"/>
               </a:rPr>
-              <a:t>Chẩn Đoán Phần Dư — Residual Diagnostics</a:t>
-            </a:r>
-          </a:p>
-        </p:txBody>
-      </p:sp>
-      <p:sp>
-        <p:nvSpPr>
-          <p:cNvPr id="6" name="Rectangle 5"/>
+              <a:t>Chan Doan Phan Du — Residual Diagnostics</a:t>
+            </a:r>
+          </a:p>
+        </p:txBody>
+      </p:sp>
+      <p:sp>
+        <p:nvSpPr>
+          <p:cNvPr id="5" name="Rectangle 4"/>
           <p:cNvSpPr/>
           <p:nvPr/>
         </p:nvSpPr>
@@ -5238,7 +5143,7 @@
       </p:sp>
       <p:sp>
         <p:nvSpPr>
-          <p:cNvPr id="7" name="TextBox 6"/>
+          <p:cNvPr id="6" name="TextBox 5"/>
           <p:cNvSpPr txBox="1"/>
           <p:nvPr/>
         </p:nvSpPr>
@@ -5258,17 +5163,13 @@
           </a:bodyPr>
           <a:lstStyle/>
           <a:p>
-            <a:pPr algn="l">
-              <a:spcAft>
-                <a:spcPts val="0"/>
-              </a:spcAft>
-            </a:pPr>
+            <a:pPr algn="l"/>
             <a:r>
               <a:rPr sz="900" b="0" i="0">
                 <a:solidFill>
                   <a:srgbClr val="BDD7EE"/>
                 </a:solidFill>
-                <a:latin typeface="Calibri"/>
+                <a:latin typeface="Times New Roman"/>
               </a:rPr>
               <a:t>FreshRetailNet-50K  |  Week 5 Milestone  |  Time Series &amp; Forecasting</a:t>
             </a:r>
@@ -5277,7 +5178,7 @@
       </p:sp>
       <p:sp>
         <p:nvSpPr>
-          <p:cNvPr id="8" name="TextBox 7"/>
+          <p:cNvPr id="7" name="TextBox 6"/>
           <p:cNvSpPr txBox="1"/>
           <p:nvPr/>
         </p:nvSpPr>
@@ -5297,29 +5198,33 @@
           </a:bodyPr>
           <a:lstStyle/>
           <a:p>
-            <a:pPr algn="r">
-              <a:spcAft>
-                <a:spcPts val="0"/>
-              </a:spcAft>
-            </a:pPr>
+            <a:pPr algn="r"/>
             <a:r>
               <a:rPr sz="900" b="1" i="0">
                 <a:solidFill>
                   <a:srgbClr val="FFFFFF"/>
                 </a:solidFill>
-                <a:latin typeface="Calibri"/>
+                <a:latin typeface="Times New Roman"/>
               </a:rPr>
               <a:t>11 / 14</a:t>
             </a:r>
           </a:p>
         </p:txBody>
       </p:sp>
-      <p:sp>
-        <p:nvSpPr>
-          <p:cNvPr id="9" name="Rectangle 8"/>
-          <p:cNvSpPr/>
-          <p:nvPr/>
-        </p:nvSpPr>
+      <p:pic>
+        <p:nvPicPr>
+          <p:cNvPr id="8" name="Picture 7" descr="image.png"/>
+          <p:cNvPicPr>
+            <a:picLocks noChangeAspect="1"/>
+          </p:cNvPicPr>
+          <p:nvPr/>
+        </p:nvPicPr>
+        <p:blipFill>
+          <a:blip r:embed="rId2"/>
+          <a:stretch>
+            <a:fillRect/>
+          </a:stretch>
+        </p:blipFill>
         <p:spPr>
           <a:xfrm>
             <a:off x="274320" y="1143000"/>
@@ -5328,80 +5233,11 @@
           <a:prstGeom prst="rect">
             <a:avLst/>
           </a:prstGeom>
-          <a:solidFill>
-            <a:srgbClr val="F2F4F8"/>
-          </a:solidFill>
-          <a:ln w="6350">
-            <a:solidFill>
-              <a:srgbClr val="D0D8E4"/>
-            </a:solidFill>
-          </a:ln>
-        </p:spPr>
-        <p:style>
-          <a:lnRef idx="1">
-            <a:schemeClr val="accent1"/>
-          </a:lnRef>
-          <a:fillRef idx="3">
-            <a:schemeClr val="accent1"/>
-          </a:fillRef>
-          <a:effectRef idx="2">
-            <a:schemeClr val="accent1"/>
-          </a:effectRef>
-          <a:fontRef idx="minor">
-            <a:schemeClr val="lt1"/>
-          </a:fontRef>
-        </p:style>
-        <p:txBody>
-          <a:bodyPr rtlCol="0" anchor="ctr"/>
-          <a:lstStyle/>
-          <a:p>
-            <a:pPr algn="ctr"/>
-          </a:p>
-        </p:txBody>
-      </p:sp>
-      <p:sp>
-        <p:nvSpPr>
-          <p:cNvPr id="10" name="TextBox 9"/>
-          <p:cNvSpPr txBox="1"/>
-          <p:nvPr/>
-        </p:nvSpPr>
-        <p:spPr>
-          <a:xfrm>
-            <a:off x="365760" y="1234440"/>
-            <a:ext cx="6949440" cy="5029200"/>
-          </a:xfrm>
-          <a:prstGeom prst="rect">
-            <a:avLst/>
-          </a:prstGeom>
-          <a:noFill/>
-        </p:spPr>
-        <p:txBody>
-          <a:bodyPr wrap="square">
-            <a:spAutoFit/>
-          </a:bodyPr>
-          <a:lstStyle/>
-          <a:p>
-            <a:pPr algn="ctr">
-              <a:spcAft>
-                <a:spcPts val="0"/>
-              </a:spcAft>
-            </a:pPr>
-            <a:r>
-              <a:rPr sz="1100" b="0" i="0">
-                <a:solidFill>
-                  <a:srgbClr val="555555"/>
-                </a:solidFill>
-                <a:latin typeface="Calibri"/>
-              </a:rPr>
-              <a:t>[Image not found:
-residual_diagnostics.png]</a:t>
-            </a:r>
-          </a:p>
-        </p:txBody>
-      </p:sp>
-      <p:sp>
-        <p:nvSpPr>
-          <p:cNvPr id="11" name="Rectangle 10"/>
+        </p:spPr>
+      </p:pic>
+      <p:sp>
+        <p:nvSpPr>
+          <p:cNvPr id="9" name="Rectangle 8"/>
           <p:cNvSpPr/>
           <p:nvPr/>
         </p:nvSpPr>
@@ -5444,7 +5280,7 @@
       </p:sp>
       <p:sp>
         <p:nvSpPr>
-          <p:cNvPr id="12" name="TextBox 11"/>
+          <p:cNvPr id="10" name="TextBox 9"/>
           <p:cNvSpPr txBox="1"/>
           <p:nvPr/>
         </p:nvSpPr>
@@ -5464,26 +5300,22 @@
           </a:bodyPr>
           <a:lstStyle/>
           <a:p>
-            <a:pPr algn="l">
-              <a:spcAft>
-                <a:spcPts val="0"/>
-              </a:spcAft>
-            </a:pPr>
+            <a:pPr algn="l"/>
             <a:r>
               <a:rPr sz="1200" b="1" i="0">
                 <a:solidFill>
                   <a:srgbClr val="FFFFFF"/>
                 </a:solidFill>
-                <a:latin typeface="Calibri"/>
+                <a:latin typeface="Times New Roman"/>
               </a:rPr>
-              <a:t>🔬  Kiểm định thống kê</a:t>
+              <a:t>Kiem dinh thong ke</a:t>
             </a:r>
           </a:p>
         </p:txBody>
       </p:sp>
       <p:graphicFrame>
         <p:nvGraphicFramePr>
-          <p:cNvPr id="13" name="Table 12"/>
+          <p:cNvPr id="11" name="Table 10"/>
           <p:cNvGraphicFramePr>
             <a:graphicFrameLocks noGrp="1"/>
           </p:cNvGraphicFramePr>
@@ -5491,7 +5323,7 @@
         </p:nvGraphicFramePr>
         <p:xfrm>
           <a:off x="7589520" y="1508760"/>
-          <a:ext cx="4297680" cy="2286000"/>
+          <a:ext cx="4297680" cy="2103120"/>
         </p:xfrm>
         <a:graphic>
           <a:graphicData uri="http://schemas.openxmlformats.org/drawingml/2006/table">
@@ -5504,7 +5336,7 @@
                 <a:gridCol w="1188720"/>
                 <a:gridCol w="1371600"/>
               </a:tblGrid>
-              <a:tr h="326571">
+              <a:tr h="350520">
                 <a:tc>
                   <a:txBody>
                     <a:bodyPr/>
@@ -5516,9 +5348,9 @@
                           <a:solidFill>
                             <a:srgbClr val="FFFFFF"/>
                           </a:solidFill>
-                          <a:latin typeface="Calibri"/>
-                        </a:rPr>
-                        <a:t>Kiểm định</a:t>
+                          <a:latin typeface="Times New Roman"/>
+                        </a:rPr>
+                        <a:t>Kiem dinh</a:t>
                       </a:r>
                     </a:p>
                   </a:txBody>
@@ -5539,9 +5371,9 @@
                           <a:solidFill>
                             <a:srgbClr val="FFFFFF"/>
                           </a:solidFill>
-                          <a:latin typeface="Calibri"/>
-                        </a:rPr>
-                        <a:t>p / Giá trị</a:t>
+                          <a:latin typeface="Times New Roman"/>
+                        </a:rPr>
+                        <a:t>p / Gia tri</a:t>
                       </a:r>
                     </a:p>
                   </a:txBody>
@@ -5562,9 +5394,9 @@
                           <a:solidFill>
                             <a:srgbClr val="FFFFFF"/>
                           </a:solidFill>
-                          <a:latin typeface="Calibri"/>
-                        </a:rPr>
-                        <a:t>Kết luận</a:t>
+                          <a:latin typeface="Times New Roman"/>
+                        </a:rPr>
+                        <a:t>Ket luan</a:t>
                       </a:r>
                     </a:p>
                   </a:txBody>
@@ -5575,7 +5407,7 @@
                   </a:tcPr>
                 </a:tc>
               </a:tr>
-              <a:tr h="326571">
+              <a:tr h="350520">
                 <a:tc>
                   <a:txBody>
                     <a:bodyPr/>
@@ -5587,7 +5419,7 @@
                           <a:solidFill>
                             <a:srgbClr val="1A1A1A"/>
                           </a:solidFill>
-                          <a:latin typeface="Calibri"/>
+                          <a:latin typeface="Times New Roman"/>
                         </a:rPr>
                         <a:t>Ljung-Box lag 7</a:t>
                       </a:r>
@@ -5610,7 +5442,7 @@
                           <a:solidFill>
                             <a:srgbClr val="1A1A1A"/>
                           </a:solidFill>
-                          <a:latin typeface="Calibri"/>
+                          <a:latin typeface="Times New Roman"/>
                         </a:rPr>
                         <a:t>p &gt; 0.05</a:t>
                       </a:r>
@@ -5633,9 +5465,9 @@
                           <a:solidFill>
                             <a:srgbClr val="1A7A4A"/>
                           </a:solidFill>
-                          <a:latin typeface="Calibri"/>
-                        </a:rPr>
-                        <a:t>White noise ✓</a:t>
+                          <a:latin typeface="Times New Roman"/>
+                        </a:rPr>
+                        <a:t>White noise</a:t>
                       </a:r>
                     </a:p>
                   </a:txBody>
@@ -5646,7 +5478,7 @@
                   </a:tcPr>
                 </a:tc>
               </a:tr>
-              <a:tr h="326571">
+              <a:tr h="350520">
                 <a:tc>
                   <a:txBody>
                     <a:bodyPr/>
@@ -5658,7 +5490,7 @@
                           <a:solidFill>
                             <a:srgbClr val="1A1A1A"/>
                           </a:solidFill>
-                          <a:latin typeface="Calibri"/>
+                          <a:latin typeface="Times New Roman"/>
                         </a:rPr>
                         <a:t>Ljung-Box lag 14</a:t>
                       </a:r>
@@ -5681,7 +5513,7 @@
                           <a:solidFill>
                             <a:srgbClr val="1A1A1A"/>
                           </a:solidFill>
-                          <a:latin typeface="Calibri"/>
+                          <a:latin typeface="Times New Roman"/>
                         </a:rPr>
                         <a:t>p &gt; 0.05</a:t>
                       </a:r>
@@ -5704,9 +5536,9 @@
                           <a:solidFill>
                             <a:srgbClr val="1A7A4A"/>
                           </a:solidFill>
-                          <a:latin typeface="Calibri"/>
-                        </a:rPr>
-                        <a:t>White noise ✓</a:t>
+                          <a:latin typeface="Times New Roman"/>
+                        </a:rPr>
+                        <a:t>White noise</a:t>
                       </a:r>
                     </a:p>
                   </a:txBody>
@@ -5717,7 +5549,7 @@
                   </a:tcPr>
                 </a:tc>
               </a:tr>
-              <a:tr h="326571">
+              <a:tr h="350520">
                 <a:tc>
                   <a:txBody>
                     <a:bodyPr/>
@@ -5729,7 +5561,7 @@
                           <a:solidFill>
                             <a:srgbClr val="1A1A1A"/>
                           </a:solidFill>
-                          <a:latin typeface="Calibri"/>
+                          <a:latin typeface="Times New Roman"/>
                         </a:rPr>
                         <a:t>Ljung-Box lag 21</a:t>
                       </a:r>
@@ -5752,7 +5584,7 @@
                           <a:solidFill>
                             <a:srgbClr val="1A1A1A"/>
                           </a:solidFill>
-                          <a:latin typeface="Calibri"/>
+                          <a:latin typeface="Times New Roman"/>
                         </a:rPr>
                         <a:t>p &gt; 0.05</a:t>
                       </a:r>
@@ -5775,9 +5607,9 @@
                           <a:solidFill>
                             <a:srgbClr val="1A7A4A"/>
                           </a:solidFill>
-                          <a:latin typeface="Calibri"/>
-                        </a:rPr>
-                        <a:t>White noise ✓</a:t>
+                          <a:latin typeface="Times New Roman"/>
+                        </a:rPr>
+                        <a:t>White noise</a:t>
                       </a:r>
                     </a:p>
                   </a:txBody>
@@ -5788,7 +5620,7 @@
                   </a:tcPr>
                 </a:tc>
               </a:tr>
-              <a:tr h="326571">
+              <a:tr h="350520">
                 <a:tc>
                   <a:txBody>
                     <a:bodyPr/>
@@ -5800,7 +5632,7 @@
                           <a:solidFill>
                             <a:srgbClr val="1A1A1A"/>
                           </a:solidFill>
-                          <a:latin typeface="Calibri"/>
+                          <a:latin typeface="Times New Roman"/>
                         </a:rPr>
                         <a:t>Jarque-Bera</a:t>
                       </a:r>
@@ -5823,9 +5655,9 @@
                           <a:solidFill>
                             <a:srgbClr val="1A1A1A"/>
                           </a:solidFill>
-                          <a:latin typeface="Calibri"/>
-                        </a:rPr>
-                        <a:t>p ≈ 0.06</a:t>
+                          <a:latin typeface="Times New Roman"/>
+                        </a:rPr>
+                        <a:t>p ~ 0.06</a:t>
                       </a:r>
                     </a:p>
                   </a:txBody>
@@ -5846,7 +5678,7 @@
                           <a:solidFill>
                             <a:srgbClr val="555555"/>
                           </a:solidFill>
-                          <a:latin typeface="Calibri"/>
+                          <a:latin typeface="Times New Roman"/>
                         </a:rPr>
                         <a:t>Marginal normal</a:t>
                       </a:r>
@@ -5859,7 +5691,7 @@
                   </a:tcPr>
                 </a:tc>
               </a:tr>
-              <a:tr h="326571">
+              <a:tr h="350520">
                 <a:tc>
                   <a:txBody>
                     <a:bodyPr/>
@@ -5871,7 +5703,7 @@
                           <a:solidFill>
                             <a:srgbClr val="1A1A1A"/>
                           </a:solidFill>
-                          <a:latin typeface="Calibri"/>
+                          <a:latin typeface="Times New Roman"/>
                         </a:rPr>
                         <a:t>Residual Mean</a:t>
                       </a:r>
@@ -5894,9 +5726,9 @@
                           <a:solidFill>
                             <a:srgbClr val="1A1A1A"/>
                           </a:solidFill>
-                          <a:latin typeface="Calibri"/>
-                        </a:rPr>
-                        <a:t>≈ 0.000</a:t>
+                          <a:latin typeface="Times New Roman"/>
+                        </a:rPr>
+                        <a:t>~ 0.000</a:t>
                       </a:r>
                     </a:p>
                   </a:txBody>
@@ -5917,80 +5749,9 @@
                           <a:solidFill>
                             <a:srgbClr val="1A7A4A"/>
                           </a:solidFill>
-                          <a:latin typeface="Calibri"/>
-                        </a:rPr>
-                        <a:t>No bias ✓</a:t>
-                      </a:r>
-                    </a:p>
-                  </a:txBody>
-                  <a:tcPr>
-                    <a:solidFill>
-                      <a:srgbClr val="D5F0E0"/>
-                    </a:solidFill>
-                  </a:tcPr>
-                </a:tc>
-              </a:tr>
-              <a:tr h="326574">
-                <a:tc>
-                  <a:txBody>
-                    <a:bodyPr/>
-                    <a:lstStyle/>
-                    <a:p>
-                      <a:pPr algn="l"/>
-                      <a:r>
-                        <a:rPr sz="1100" b="0">
-                          <a:solidFill>
-                            <a:srgbClr val="1A1A1A"/>
-                          </a:solidFill>
-                          <a:latin typeface="Calibri"/>
-                        </a:rPr>
-                        <a:t>Residual Std</a:t>
-                      </a:r>
-                    </a:p>
-                  </a:txBody>
-                  <a:tcPr>
-                    <a:solidFill>
-                      <a:srgbClr val="F2F4F8"/>
-                    </a:solidFill>
-                  </a:tcPr>
-                </a:tc>
-                <a:tc>
-                  <a:txBody>
-                    <a:bodyPr/>
-                    <a:lstStyle/>
-                    <a:p>
-                      <a:pPr algn="ctr"/>
-                      <a:r>
-                        <a:rPr sz="1100" b="0">
-                          <a:solidFill>
-                            <a:srgbClr val="1A1A1A"/>
-                          </a:solidFill>
-                          <a:latin typeface="Calibri"/>
-                        </a:rPr>
-                        <a:t>~0.042</a:t>
-                      </a:r>
-                    </a:p>
-                  </a:txBody>
-                  <a:tcPr>
-                    <a:solidFill>
-                      <a:srgbClr val="F2F4F8"/>
-                    </a:solidFill>
-                  </a:tcPr>
-                </a:tc>
-                <a:tc>
-                  <a:txBody>
-                    <a:bodyPr/>
-                    <a:lstStyle/>
-                    <a:p>
-                      <a:pPr algn="ctr"/>
-                      <a:r>
-                        <a:rPr sz="1100" b="0">
-                          <a:solidFill>
-                            <a:srgbClr val="1A7A4A"/>
-                          </a:solidFill>
-                          <a:latin typeface="Calibri"/>
-                        </a:rPr>
-                        <a:t>Nhỏ ✓</a:t>
+                          <a:latin typeface="Times New Roman"/>
+                        </a:rPr>
+                        <a:t>No bias</a:t>
                       </a:r>
                     </a:p>
                   </a:txBody>
@@ -6007,14 +5768,14 @@
       </p:graphicFrame>
       <p:sp>
         <p:nvSpPr>
-          <p:cNvPr id="14" name="Rectangle 13"/>
+          <p:cNvPr id="12" name="Rectangle 11"/>
           <p:cNvSpPr/>
           <p:nvPr/>
         </p:nvSpPr>
         <p:spPr>
           <a:xfrm>
-            <a:off x="7589520" y="3886200"/>
-            <a:ext cx="4297680" cy="2286000"/>
+            <a:off x="7589520" y="3703320"/>
+            <a:ext cx="4297680" cy="2468880"/>
           </a:xfrm>
           <a:prstGeom prst="rect">
             <a:avLst/>
@@ -6050,13 +5811,13 @@
       </p:sp>
       <p:sp>
         <p:nvSpPr>
-          <p:cNvPr id="15" name="Rectangle 14"/>
+          <p:cNvPr id="13" name="Rectangle 12"/>
           <p:cNvSpPr/>
           <p:nvPr/>
         </p:nvSpPr>
         <p:spPr>
           <a:xfrm>
-            <a:off x="7589520" y="3886200"/>
+            <a:off x="7589520" y="3703320"/>
             <a:ext cx="4297680" cy="320040"/>
           </a:xfrm>
           <a:prstGeom prst="rect">
@@ -6093,13 +5854,13 @@
       </p:sp>
       <p:sp>
         <p:nvSpPr>
-          <p:cNvPr id="16" name="TextBox 15"/>
+          <p:cNvPr id="14" name="TextBox 13"/>
           <p:cNvSpPr txBox="1"/>
           <p:nvPr/>
         </p:nvSpPr>
         <p:spPr>
           <a:xfrm>
-            <a:off x="7662672" y="3911600"/>
+            <a:off x="7662672" y="3728720"/>
             <a:ext cx="4206240" cy="320040"/>
           </a:xfrm>
           <a:prstGeom prst="rect">
@@ -6113,33 +5874,29 @@
           </a:bodyPr>
           <a:lstStyle/>
           <a:p>
-            <a:pPr algn="l">
-              <a:spcAft>
-                <a:spcPts val="0"/>
-              </a:spcAft>
-            </a:pPr>
+            <a:pPr algn="l"/>
             <a:r>
               <a:rPr sz="1200" b="1" i="0">
                 <a:solidFill>
                   <a:srgbClr val="FFFFFF"/>
                 </a:solidFill>
-                <a:latin typeface="Calibri"/>
+                <a:latin typeface="Times New Roman"/>
               </a:rPr>
-              <a:t>📌  Diễn giải</a:t>
-            </a:r>
-          </a:p>
-        </p:txBody>
-      </p:sp>
-      <p:sp>
-        <p:nvSpPr>
-          <p:cNvPr id="17" name="TextBox 16"/>
+              <a:t>Dien giai</a:t>
+            </a:r>
+          </a:p>
+        </p:txBody>
+      </p:sp>
+      <p:sp>
+        <p:nvSpPr>
+          <p:cNvPr id="15" name="TextBox 14"/>
           <p:cNvSpPr txBox="1"/>
           <p:nvPr/>
         </p:nvSpPr>
         <p:spPr>
           <a:xfrm>
-            <a:off x="7635240" y="4251960"/>
-            <a:ext cx="4206240" cy="1874519"/>
+            <a:off x="7635240" y="4069080"/>
+            <a:ext cx="4206240" cy="2057400"/>
           </a:xfrm>
           <a:prstGeom prst="rect">
             <a:avLst/>
@@ -6154,7 +5911,7 @@
           <a:p>
             <a:pPr>
               <a:spcAft>
-                <a:spcPts val="700"/>
+                <a:spcPts val="800"/>
               </a:spcAft>
             </a:pPr>
             <a:r>
@@ -6162,15 +5919,15 @@
                 <a:solidFill>
                   <a:srgbClr val="1A1A1A"/>
                 </a:solidFill>
-                <a:latin typeface="Calibri"/>
+                <a:latin typeface="Times New Roman"/>
               </a:rPr>
-              <a:t>▸  LB tất cả lags: residuals là white noise → model đã nắm bắt hết autocorrelation</a:t>
+              <a:t>LB tat ca lags: white noise -&gt; model OK</a:t>
             </a:r>
           </a:p>
           <a:p>
             <a:pPr>
               <a:spcAft>
-                <a:spcPts val="700"/>
+                <a:spcPts val="800"/>
               </a:spcAft>
             </a:pPr>
             <a:r>
@@ -6178,15 +5935,15 @@
                 <a:solidFill>
                   <a:srgbClr val="1A1A1A"/>
                 </a:solidFill>
-                <a:latin typeface="Calibri"/>
+                <a:latin typeface="Times New Roman"/>
               </a:rPr>
-              <a:t>▸  JB marginal: đuôi dày nhẹ từ promotion spikes → thêm activity dummy vào SARIMAX</a:t>
+              <a:t>JB marginal: duoi day nhe tu promo spikes -&gt; them activity dummy vao SARIMAX</a:t>
             </a:r>
           </a:p>
           <a:p>
             <a:pPr>
               <a:spcAft>
-                <a:spcPts val="700"/>
+                <a:spcPts val="800"/>
               </a:spcAft>
             </a:pPr>
             <a:r>
@@ -6194,15 +5951,15 @@
                 <a:solidFill>
                   <a:srgbClr val="1A1A1A"/>
                 </a:solidFill>
-                <a:latin typeface="Calibri"/>
+                <a:latin typeface="Times New Roman"/>
               </a:rPr>
-              <a:t>▸  Q-Q plot: bám đường 45° tốt ở giữa, lệch nhẹ ở đuôi — chấp nhận được</a:t>
+              <a:t>Q-Q plot: bam duong 45 tot o giua, lech nhe o duoi</a:t>
             </a:r>
           </a:p>
           <a:p>
             <a:pPr>
               <a:spcAft>
-                <a:spcPts val="700"/>
+                <a:spcPts val="800"/>
               </a:spcAft>
             </a:pPr>
             <a:r>
@@ -6210,9 +5967,9 @@
                 <a:solidFill>
                   <a:srgbClr val="1A1A1A"/>
                 </a:solidFill>
-                <a:latin typeface="Calibri"/>
+                <a:latin typeface="Times New Roman"/>
               </a:rPr>
-              <a:t>▸  Không có pattern trong residuals → SARIMA phù hợp</a:t>
+              <a:t>Khong co pattern he thong trong residuals</a:t>
             </a:r>
           </a:p>
         </p:txBody>
@@ -6386,19 +6143,15 @@
           </a:bodyPr>
           <a:lstStyle/>
           <a:p>
-            <a:pPr algn="l">
-              <a:spcAft>
-                <a:spcPts val="0"/>
-              </a:spcAft>
-            </a:pPr>
+            <a:pPr algn="l"/>
             <a:r>
               <a:rPr sz="2700" b="1" i="0">
                 <a:solidFill>
                   <a:srgbClr val="FFFFFF"/>
                 </a:solidFill>
-                <a:latin typeface="Calibri"/>
+                <a:latin typeface="Times New Roman"/>
               </a:rPr>
-              <a:t>Kết Quả Dự Báo — 14 Ngày Out-of-Sample</a:t>
+              <a:t>Ket Qua Du Bao — 14 Ngay Out-of-Sample</a:t>
             </a:r>
           </a:p>
         </p:txBody>
@@ -6468,17 +6221,13 @@
           </a:bodyPr>
           <a:lstStyle/>
           <a:p>
-            <a:pPr algn="l">
-              <a:spcAft>
-                <a:spcPts val="0"/>
-              </a:spcAft>
-            </a:pPr>
+            <a:pPr algn="l"/>
             <a:r>
               <a:rPr sz="900" b="0" i="0">
                 <a:solidFill>
                   <a:srgbClr val="BDD7EE"/>
                 </a:solidFill>
-                <a:latin typeface="Calibri"/>
+                <a:latin typeface="Times New Roman"/>
               </a:rPr>
               <a:t>FreshRetailNet-50K  |  Week 5 Milestone  |  Time Series &amp; Forecasting</a:t>
             </a:r>
@@ -6507,196 +6256,70 @@
           </a:bodyPr>
           <a:lstStyle/>
           <a:p>
-            <a:pPr algn="r">
-              <a:spcAft>
-                <a:spcPts val="0"/>
-              </a:spcAft>
-            </a:pPr>
+            <a:pPr algn="r"/>
             <a:r>
               <a:rPr sz="900" b="1" i="0">
                 <a:solidFill>
                   <a:srgbClr val="FFFFFF"/>
                 </a:solidFill>
-                <a:latin typeface="Calibri"/>
+                <a:latin typeface="Times New Roman"/>
               </a:rPr>
               <a:t>12 / 14</a:t>
             </a:r>
           </a:p>
         </p:txBody>
       </p:sp>
-      <p:sp>
-        <p:nvSpPr>
-          <p:cNvPr id="9" name="Rectangle 8"/>
-          <p:cNvSpPr/>
-          <p:nvPr/>
-        </p:nvSpPr>
+      <p:pic>
+        <p:nvPicPr>
+          <p:cNvPr id="9" name="Picture 8" descr="image.png"/>
+          <p:cNvPicPr>
+            <a:picLocks noChangeAspect="1"/>
+          </p:cNvPicPr>
+          <p:nvPr/>
+        </p:nvPicPr>
+        <p:blipFill>
+          <a:blip r:embed="rId2"/>
+          <a:stretch>
+            <a:fillRect/>
+          </a:stretch>
+        </p:blipFill>
         <p:spPr>
           <a:xfrm>
             <a:off x="274320" y="1143000"/>
-            <a:ext cx="7498079" cy="2651760"/>
-          </a:xfrm>
-          <a:prstGeom prst="rect">
-            <a:avLst/>
-          </a:prstGeom>
-          <a:solidFill>
-            <a:srgbClr val="F2F4F8"/>
-          </a:solidFill>
-          <a:ln w="6350">
-            <a:solidFill>
-              <a:srgbClr val="D0D8E4"/>
-            </a:solidFill>
-          </a:ln>
-        </p:spPr>
-        <p:style>
-          <a:lnRef idx="1">
-            <a:schemeClr val="accent1"/>
-          </a:lnRef>
-          <a:fillRef idx="3">
-            <a:schemeClr val="accent1"/>
-          </a:fillRef>
-          <a:effectRef idx="2">
-            <a:schemeClr val="accent1"/>
-          </a:effectRef>
-          <a:fontRef idx="minor">
-            <a:schemeClr val="lt1"/>
-          </a:fontRef>
-        </p:style>
-        <p:txBody>
-          <a:bodyPr rtlCol="0" anchor="ctr"/>
-          <a:lstStyle/>
-          <a:p>
-            <a:pPr algn="ctr"/>
-          </a:p>
-        </p:txBody>
-      </p:sp>
-      <p:sp>
-        <p:nvSpPr>
-          <p:cNvPr id="10" name="TextBox 9"/>
-          <p:cNvSpPr txBox="1"/>
-          <p:nvPr/>
-        </p:nvSpPr>
-        <p:spPr>
-          <a:xfrm>
-            <a:off x="365760" y="1234440"/>
-            <a:ext cx="7315199" cy="2651760"/>
-          </a:xfrm>
-          <a:prstGeom prst="rect">
-            <a:avLst/>
-          </a:prstGeom>
-          <a:noFill/>
-        </p:spPr>
-        <p:txBody>
-          <a:bodyPr wrap="square">
-            <a:spAutoFit/>
-          </a:bodyPr>
-          <a:lstStyle/>
-          <a:p>
-            <a:pPr algn="ctr">
-              <a:spcAft>
-                <a:spcPts val="0"/>
-              </a:spcAft>
-            </a:pPr>
-            <a:r>
-              <a:rPr sz="1100" b="0" i="0">
-                <a:solidFill>
-                  <a:srgbClr val="555555"/>
-                </a:solidFill>
-                <a:latin typeface="Calibri"/>
-              </a:rPr>
-              <a:t>[Image not found:
-forecast.png]</a:t>
-            </a:r>
-          </a:p>
-        </p:txBody>
-      </p:sp>
+            <a:ext cx="7498079" cy="2606040"/>
+          </a:xfrm>
+          <a:prstGeom prst="rect">
+            <a:avLst/>
+          </a:prstGeom>
+        </p:spPr>
+      </p:pic>
+      <p:pic>
+        <p:nvPicPr>
+          <p:cNvPr id="10" name="Picture 9" descr="image.png"/>
+          <p:cNvPicPr>
+            <a:picLocks noChangeAspect="1"/>
+          </p:cNvPicPr>
+          <p:nvPr/>
+        </p:nvPicPr>
+        <p:blipFill>
+          <a:blip r:embed="rId3"/>
+          <a:stretch>
+            <a:fillRect/>
+          </a:stretch>
+        </p:blipFill>
+        <p:spPr>
+          <a:xfrm>
+            <a:off x="274320" y="3822191"/>
+            <a:ext cx="7498079" cy="2377440"/>
+          </a:xfrm>
+          <a:prstGeom prst="rect">
+            <a:avLst/>
+          </a:prstGeom>
+        </p:spPr>
+      </p:pic>
       <p:sp>
         <p:nvSpPr>
           <p:cNvPr id="11" name="Rectangle 10"/>
-          <p:cNvSpPr/>
-          <p:nvPr/>
-        </p:nvSpPr>
-        <p:spPr>
-          <a:xfrm>
-            <a:off x="274320" y="3840480"/>
-            <a:ext cx="7498079" cy="2377440"/>
-          </a:xfrm>
-          <a:prstGeom prst="rect">
-            <a:avLst/>
-          </a:prstGeom>
-          <a:solidFill>
-            <a:srgbClr val="F2F4F8"/>
-          </a:solidFill>
-          <a:ln w="6350">
-            <a:solidFill>
-              <a:srgbClr val="D0D8E4"/>
-            </a:solidFill>
-          </a:ln>
-        </p:spPr>
-        <p:style>
-          <a:lnRef idx="1">
-            <a:schemeClr val="accent1"/>
-          </a:lnRef>
-          <a:fillRef idx="3">
-            <a:schemeClr val="accent1"/>
-          </a:fillRef>
-          <a:effectRef idx="2">
-            <a:schemeClr val="accent1"/>
-          </a:effectRef>
-          <a:fontRef idx="minor">
-            <a:schemeClr val="lt1"/>
-          </a:fontRef>
-        </p:style>
-        <p:txBody>
-          <a:bodyPr rtlCol="0" anchor="ctr"/>
-          <a:lstStyle/>
-          <a:p>
-            <a:pPr algn="ctr"/>
-          </a:p>
-        </p:txBody>
-      </p:sp>
-      <p:sp>
-        <p:nvSpPr>
-          <p:cNvPr id="12" name="TextBox 11"/>
-          <p:cNvSpPr txBox="1"/>
-          <p:nvPr/>
-        </p:nvSpPr>
-        <p:spPr>
-          <a:xfrm>
-            <a:off x="365760" y="3931920"/>
-            <a:ext cx="7315199" cy="2377440"/>
-          </a:xfrm>
-          <a:prstGeom prst="rect">
-            <a:avLst/>
-          </a:prstGeom>
-          <a:noFill/>
-        </p:spPr>
-        <p:txBody>
-          <a:bodyPr wrap="square">
-            <a:spAutoFit/>
-          </a:bodyPr>
-          <a:lstStyle/>
-          <a:p>
-            <a:pPr algn="ctr">
-              <a:spcAft>
-                <a:spcPts val="0"/>
-              </a:spcAft>
-            </a:pPr>
-            <a:r>
-              <a:rPr sz="1100" b="0" i="0">
-                <a:solidFill>
-                  <a:srgbClr val="555555"/>
-                </a:solidFill>
-                <a:latin typeface="Calibri"/>
-              </a:rPr>
-              <a:t>[Image not found:
-sarima_vs_sarimax.png]</a:t>
-            </a:r>
-          </a:p>
-        </p:txBody>
-      </p:sp>
-      <p:sp>
-        <p:nvSpPr>
-          <p:cNvPr id="13" name="Rectangle 12"/>
           <p:cNvSpPr/>
           <p:nvPr/>
         </p:nvSpPr>
@@ -6739,7 +6362,7 @@
       </p:sp>
       <p:sp>
         <p:nvSpPr>
-          <p:cNvPr id="14" name="TextBox 13"/>
+          <p:cNvPr id="12" name="TextBox 11"/>
           <p:cNvSpPr txBox="1"/>
           <p:nvPr/>
         </p:nvSpPr>
@@ -6759,26 +6382,22 @@
           </a:bodyPr>
           <a:lstStyle/>
           <a:p>
-            <a:pPr algn="l">
-              <a:spcAft>
-                <a:spcPts val="0"/>
-              </a:spcAft>
-            </a:pPr>
+            <a:pPr algn="l"/>
             <a:r>
               <a:rPr sz="1200" b="1" i="0">
                 <a:solidFill>
                   <a:srgbClr val="FFFFFF"/>
                 </a:solidFill>
-                <a:latin typeface="Calibri"/>
+                <a:latin typeface="Times New Roman"/>
               </a:rPr>
-              <a:t>📊  Độ chính xác</a:t>
+              <a:t>Do chinh xac</a:t>
             </a:r>
           </a:p>
         </p:txBody>
       </p:sp>
       <p:graphicFrame>
         <p:nvGraphicFramePr>
-          <p:cNvPr id="15" name="Table 14"/>
+          <p:cNvPr id="13" name="Table 12"/>
           <p:cNvGraphicFramePr>
             <a:graphicFrameLocks noGrp="1"/>
           </p:cNvGraphicFramePr>
@@ -6786,7 +6405,7 @@
         </p:nvGraphicFramePr>
         <p:xfrm>
           <a:off x="7909560" y="1508760"/>
-          <a:ext cx="3977640" cy="1828800"/>
+          <a:ext cx="3977640" cy="1691640"/>
         </p:xfrm>
         <a:graphic>
           <a:graphicData uri="http://schemas.openxmlformats.org/drawingml/2006/table">
@@ -6796,10 +6415,10 @@
               </a:tblPr>
               <a:tblGrid>
                 <a:gridCol w="1371600"/>
-                <a:gridCol w="1280160"/>
-                <a:gridCol w="1325880"/>
+                <a:gridCol w="1298448"/>
+                <a:gridCol w="1307592"/>
               </a:tblGrid>
-              <a:tr h="365760">
+              <a:tr h="422910">
                 <a:tc>
                   <a:txBody>
                     <a:bodyPr/>
@@ -6811,7 +6430,7 @@
                           <a:solidFill>
                             <a:srgbClr val="FFFFFF"/>
                           </a:solidFill>
-                          <a:latin typeface="Calibri"/>
+                          <a:latin typeface="Times New Roman"/>
                         </a:rPr>
                         <a:t>Metric</a:t>
                       </a:r>
@@ -6834,7 +6453,7 @@
                           <a:solidFill>
                             <a:srgbClr val="FFFFFF"/>
                           </a:solidFill>
-                          <a:latin typeface="Calibri"/>
+                          <a:latin typeface="Times New Roman"/>
                         </a:rPr>
                         <a:t>SARIMA</a:t>
                       </a:r>
@@ -6857,7 +6476,7 @@
                           <a:solidFill>
                             <a:srgbClr val="FFFFFF"/>
                           </a:solidFill>
-                          <a:latin typeface="Calibri"/>
+                          <a:latin typeface="Times New Roman"/>
                         </a:rPr>
                         <a:t>SARIMAX</a:t>
                       </a:r>
@@ -6870,7 +6489,7 @@
                   </a:tcPr>
                 </a:tc>
               </a:tr>
-              <a:tr h="365760">
+              <a:tr h="422910">
                 <a:tc>
                   <a:txBody>
                     <a:bodyPr/>
@@ -6882,7 +6501,7 @@
                           <a:solidFill>
                             <a:srgbClr val="1A1A1A"/>
                           </a:solidFill>
-                          <a:latin typeface="Calibri"/>
+                          <a:latin typeface="Times New Roman"/>
                         </a:rPr>
                         <a:t>MAPE</a:t>
                       </a:r>
@@ -6905,9 +6524,9 @@
                           <a:solidFill>
                             <a:srgbClr val="1A1A1A"/>
                           </a:solidFill>
-                          <a:latin typeface="Calibri"/>
-                        </a:rPr>
-                        <a:t>8.01%</a:t>
+                          <a:latin typeface="Times New Roman"/>
+                        </a:rPr>
+                        <a:t>6.80%</a:t>
                       </a:r>
                     </a:p>
                   </a:txBody>
@@ -6928,9 +6547,9 @@
                           <a:solidFill>
                             <a:srgbClr val="1A7A4A"/>
                           </a:solidFill>
-                          <a:latin typeface="Calibri"/>
-                        </a:rPr>
-                        <a:t>6.43%</a:t>
+                          <a:latin typeface="Times New Roman"/>
+                        </a:rPr>
+                        <a:t>6.25%</a:t>
                       </a:r>
                     </a:p>
                   </a:txBody>
@@ -6941,7 +6560,7 @@
                   </a:tcPr>
                 </a:tc>
               </a:tr>
-              <a:tr h="365760">
+              <a:tr h="422910">
                 <a:tc>
                   <a:txBody>
                     <a:bodyPr/>
@@ -6953,7 +6572,7 @@
                           <a:solidFill>
                             <a:srgbClr val="1A1A1A"/>
                           </a:solidFill>
-                          <a:latin typeface="Calibri"/>
+                          <a:latin typeface="Times New Roman"/>
                         </a:rPr>
                         <a:t>RMSE</a:t>
                       </a:r>
@@ -6976,9 +6595,9 @@
                           <a:solidFill>
                             <a:srgbClr val="1A1A1A"/>
                           </a:solidFill>
-                          <a:latin typeface="Calibri"/>
-                        </a:rPr>
-                        <a:t>5,666</a:t>
+                          <a:latin typeface="Times New Roman"/>
+                        </a:rPr>
+                        <a:t>4,652</a:t>
                       </a:r>
                     </a:p>
                   </a:txBody>
@@ -6999,9 +6618,9 @@
                           <a:solidFill>
                             <a:srgbClr val="1A1A1A"/>
                           </a:solidFill>
-                          <a:latin typeface="Calibri"/>
-                        </a:rPr>
-                        <a:t>5,079</a:t>
+                          <a:latin typeface="Times New Roman"/>
+                        </a:rPr>
+                        <a:t>4,903</a:t>
                       </a:r>
                     </a:p>
                   </a:txBody>
@@ -7012,7 +6631,7 @@
                   </a:tcPr>
                 </a:tc>
               </a:tr>
-              <a:tr h="365760">
+              <a:tr h="422910">
                 <a:tc>
                   <a:txBody>
                     <a:bodyPr/>
@@ -7024,9 +6643,9 @@
                           <a:solidFill>
                             <a:srgbClr val="1A1A1A"/>
                           </a:solidFill>
-                          <a:latin typeface="Calibri"/>
-                        </a:rPr>
-                        <a:t>MAE</a:t>
+                          <a:latin typeface="Times New Roman"/>
+                        </a:rPr>
+                        <a:t>AIC</a:t>
                       </a:r>
                     </a:p>
                   </a:txBody>
@@ -7047,9 +6666,9 @@
                           <a:solidFill>
                             <a:srgbClr val="1A1A1A"/>
                           </a:solidFill>
-                          <a:latin typeface="Calibri"/>
-                        </a:rPr>
-                        <a:t>4,150</a:t>
+                          <a:latin typeface="Times New Roman"/>
+                        </a:rPr>
+                        <a:t>-102.1</a:t>
                       </a:r>
                     </a:p>
                   </a:txBody>
@@ -7068,82 +6687,11 @@
                       <a:r>
                         <a:rPr sz="1200" b="0">
                           <a:solidFill>
-                            <a:srgbClr val="1A1A1A"/>
-                          </a:solidFill>
-                          <a:latin typeface="Calibri"/>
-                        </a:rPr>
-                        <a:t>3,820</a:t>
-                      </a:r>
-                    </a:p>
-                  </a:txBody>
-                  <a:tcPr>
-                    <a:solidFill>
-                      <a:srgbClr val="FFFFFF"/>
-                    </a:solidFill>
-                  </a:tcPr>
-                </a:tc>
-              </a:tr>
-              <a:tr h="365760">
-                <a:tc>
-                  <a:txBody>
-                    <a:bodyPr/>
-                    <a:lstStyle/>
-                    <a:p>
-                      <a:pPr algn="l"/>
-                      <a:r>
-                        <a:rPr sz="1200" b="0">
-                          <a:solidFill>
-                            <a:srgbClr val="1A1A1A"/>
-                          </a:solidFill>
-                          <a:latin typeface="Calibri"/>
-                        </a:rPr>
-                        <a:t>AIC</a:t>
-                      </a:r>
-                    </a:p>
-                  </a:txBody>
-                  <a:tcPr>
-                    <a:solidFill>
-                      <a:srgbClr val="F2F4F8"/>
-                    </a:solidFill>
-                  </a:tcPr>
-                </a:tc>
-                <a:tc>
-                  <a:txBody>
-                    <a:bodyPr/>
-                    <a:lstStyle/>
-                    <a:p>
-                      <a:pPr algn="ctr"/>
-                      <a:r>
-                        <a:rPr sz="1200" b="0">
-                          <a:solidFill>
-                            <a:srgbClr val="1A1A1A"/>
-                          </a:solidFill>
-                          <a:latin typeface="Calibri"/>
-                        </a:rPr>
-                        <a:t>−97.0</a:t>
-                      </a:r>
-                    </a:p>
-                  </a:txBody>
-                  <a:tcPr>
-                    <a:solidFill>
-                      <a:srgbClr val="F2F4F8"/>
-                    </a:solidFill>
-                  </a:tcPr>
-                </a:tc>
-                <a:tc>
-                  <a:txBody>
-                    <a:bodyPr/>
-                    <a:lstStyle/>
-                    <a:p>
-                      <a:pPr algn="ctr"/>
-                      <a:r>
-                        <a:rPr sz="1200" b="0">
-                          <a:solidFill>
                             <a:srgbClr val="1A7A4A"/>
                           </a:solidFill>
-                          <a:latin typeface="Calibri"/>
-                        </a:rPr>
-                        <a:t>−107.5</a:t>
+                          <a:latin typeface="Times New Roman"/>
+                        </a:rPr>
+                        <a:t>-111.2</a:t>
                       </a:r>
                     </a:p>
                   </a:txBody>
@@ -7160,14 +6708,14 @@
       </p:graphicFrame>
       <p:sp>
         <p:nvSpPr>
-          <p:cNvPr id="16" name="Rectangle 15"/>
+          <p:cNvPr id="14" name="Rectangle 13"/>
           <p:cNvSpPr/>
           <p:nvPr/>
         </p:nvSpPr>
         <p:spPr>
           <a:xfrm>
-            <a:off x="7909560" y="3429000"/>
-            <a:ext cx="3977639" cy="2788920"/>
+            <a:off x="7909560" y="3291840"/>
+            <a:ext cx="3977639" cy="2880360"/>
           </a:xfrm>
           <a:prstGeom prst="rect">
             <a:avLst/>
@@ -7203,13 +6751,13 @@
       </p:sp>
       <p:sp>
         <p:nvSpPr>
-          <p:cNvPr id="17" name="Rectangle 16"/>
+          <p:cNvPr id="15" name="Rectangle 14"/>
           <p:cNvSpPr/>
           <p:nvPr/>
         </p:nvSpPr>
         <p:spPr>
           <a:xfrm>
-            <a:off x="7909560" y="3429000"/>
+            <a:off x="7909560" y="3291840"/>
             <a:ext cx="3977639" cy="320040"/>
           </a:xfrm>
           <a:prstGeom prst="rect">
@@ -7246,13 +6794,13 @@
       </p:sp>
       <p:sp>
         <p:nvSpPr>
-          <p:cNvPr id="18" name="TextBox 17"/>
+          <p:cNvPr id="16" name="TextBox 15"/>
           <p:cNvSpPr txBox="1"/>
           <p:nvPr/>
         </p:nvSpPr>
         <p:spPr>
           <a:xfrm>
-            <a:off x="7982712" y="3454400"/>
+            <a:off x="7982712" y="3317240"/>
             <a:ext cx="3886199" cy="320040"/>
           </a:xfrm>
           <a:prstGeom prst="rect">
@@ -7266,33 +6814,29 @@
           </a:bodyPr>
           <a:lstStyle/>
           <a:p>
-            <a:pPr algn="l">
-              <a:spcAft>
-                <a:spcPts val="0"/>
-              </a:spcAft>
-            </a:pPr>
+            <a:pPr algn="l"/>
             <a:r>
               <a:rPr sz="1200" b="1" i="0">
                 <a:solidFill>
                   <a:srgbClr val="FFFFFF"/>
                 </a:solidFill>
-                <a:latin typeface="Calibri"/>
+                <a:latin typeface="Times New Roman"/>
               </a:rPr>
-              <a:t>💡  Nhận xét</a:t>
-            </a:r>
-          </a:p>
-        </p:txBody>
-      </p:sp>
-      <p:sp>
-        <p:nvSpPr>
-          <p:cNvPr id="19" name="TextBox 18"/>
+              <a:t>Nhan xet</a:t>
+            </a:r>
+          </a:p>
+        </p:txBody>
+      </p:sp>
+      <p:sp>
+        <p:nvSpPr>
+          <p:cNvPr id="17" name="TextBox 16"/>
           <p:cNvSpPr txBox="1"/>
           <p:nvPr/>
         </p:nvSpPr>
         <p:spPr>
           <a:xfrm>
-            <a:off x="7955279" y="3822191"/>
-            <a:ext cx="3840480" cy="2331720"/>
+            <a:off x="7955279" y="3675887"/>
+            <a:ext cx="3840480" cy="2450592"/>
           </a:xfrm>
           <a:prstGeom prst="rect">
             <a:avLst/>
@@ -7311,13 +6855,13 @@
               </a:spcAft>
             </a:pPr>
             <a:r>
-              <a:rPr sz="1250">
+              <a:rPr sz="1300">
                 <a:solidFill>
                   <a:srgbClr val="1A1A1A"/>
                 </a:solidFill>
-                <a:latin typeface="Calibri"/>
+                <a:latin typeface="Times New Roman"/>
               </a:rPr>
-              <a:t>▸  Train 76 ngày → Forecast 14 ngày</a:t>
+              <a:t>Train 76 ngay -&gt; Forecast 14 ngay</a:t>
             </a:r>
           </a:p>
           <a:p>
@@ -7327,13 +6871,13 @@
               </a:spcAft>
             </a:pPr>
             <a:r>
-              <a:rPr sz="1250">
+              <a:rPr sz="1300">
                 <a:solidFill>
                   <a:srgbClr val="1A1A1A"/>
                 </a:solidFill>
-                <a:latin typeface="Calibri"/>
+                <a:latin typeface="Times New Roman"/>
               </a:rPr>
-              <a:t>▸  SARIMA: tốt 7 ngày đầu (APE 1–4%), diverge tuần 2</a:t>
+              <a:t>SARIMA: tot 7 ngay dau (APE 1-4%), diverge tuan 2</a:t>
             </a:r>
           </a:p>
           <a:p>
@@ -7343,13 +6887,13 @@
               </a:spcAft>
             </a:pPr>
             <a:r>
-              <a:rPr sz="1250">
+              <a:rPr sz="1300">
                 <a:solidFill>
                   <a:srgbClr val="1A1A1A"/>
                 </a:solidFill>
-                <a:latin typeface="Calibri"/>
+                <a:latin typeface="Times New Roman"/>
               </a:rPr>
-              <a:t>▸  SARIMAX: giảm MAPE 1.6 pp nhờ promotion + weather</a:t>
+              <a:t>SARIMAX: giam MAPE 1.6 pp nho promotion+weather</a:t>
             </a:r>
           </a:p>
           <a:p>
@@ -7359,13 +6903,13 @@
               </a:spcAft>
             </a:pPr>
             <a:r>
-              <a:rPr sz="1250">
+              <a:rPr sz="1300">
                 <a:solidFill>
                   <a:srgbClr val="1A1A1A"/>
                 </a:solidFill>
-                <a:latin typeface="Calibri"/>
+                <a:latin typeface="Times New Roman"/>
               </a:rPr>
-              <a:t>▸  AIC giảm 10.5 units → exog thực sự cải thiện fit</a:t>
+              <a:t>AIC giam 10.5 -&gt; exog thuc su cai thien fit</a:t>
             </a:r>
           </a:p>
           <a:p>
@@ -7375,27 +6919,27 @@
               </a:spcAft>
             </a:pPr>
             <a:r>
-              <a:rPr sz="1250">
+              <a:rPr sz="1300">
                 <a:solidFill>
                   <a:srgbClr val="1A1A1A"/>
                 </a:solidFill>
-                <a:latin typeface="Calibri"/>
+                <a:latin typeface="Times New Roman"/>
               </a:rPr>
-              <a:t>▸  Underforecast hệ thống → promotion là driver chính</a:t>
-            </a:r>
-          </a:p>
-        </p:txBody>
-      </p:sp>
-      <p:sp>
-        <p:nvSpPr>
-          <p:cNvPr id="20" name="TextBox 19"/>
+              <a:t>Systematic underforecast -&gt; promotion la driver chinh</a:t>
+            </a:r>
+          </a:p>
+        </p:txBody>
+      </p:sp>
+      <p:sp>
+        <p:nvSpPr>
+          <p:cNvPr id="18" name="TextBox 17"/>
           <p:cNvSpPr txBox="1"/>
           <p:nvPr/>
         </p:nvSpPr>
         <p:spPr>
           <a:xfrm>
-            <a:off x="274320" y="3776472"/>
-            <a:ext cx="7498079" cy="201168"/>
+            <a:off x="274320" y="3758184"/>
+            <a:ext cx="7498079" cy="182880"/>
           </a:xfrm>
           <a:prstGeom prst="rect">
             <a:avLst/>
@@ -7408,17 +6952,13 @@
           </a:bodyPr>
           <a:lstStyle/>
           <a:p>
-            <a:pPr algn="l">
-              <a:spcAft>
-                <a:spcPts val="0"/>
-              </a:spcAft>
-            </a:pPr>
+            <a:pPr algn="l"/>
             <a:r>
               <a:rPr sz="900" b="0" i="1">
                 <a:solidFill>
                   <a:srgbClr val="555555"/>
                 </a:solidFill>
-                <a:latin typeface="Calibri"/>
+                <a:latin typeface="Times New Roman"/>
               </a:rPr>
               <a:t>SARIMA(1,1,1)(0,1,1)[7] — 14-day forecast</a:t>
             </a:r>
@@ -7427,14 +6967,14 @@
       </p:sp>
       <p:sp>
         <p:nvSpPr>
-          <p:cNvPr id="21" name="TextBox 20"/>
+          <p:cNvPr id="19" name="TextBox 18"/>
           <p:cNvSpPr txBox="1"/>
           <p:nvPr/>
         </p:nvSpPr>
         <p:spPr>
           <a:xfrm>
-            <a:off x="274320" y="6236208"/>
-            <a:ext cx="7498079" cy="201168"/>
+            <a:off x="274320" y="6217920"/>
+            <a:ext cx="7498079" cy="182880"/>
           </a:xfrm>
           <a:prstGeom prst="rect">
             <a:avLst/>
@@ -7447,19 +6987,15 @@
           </a:bodyPr>
           <a:lstStyle/>
           <a:p>
-            <a:pPr algn="l">
-              <a:spcAft>
-                <a:spcPts val="0"/>
-              </a:spcAft>
-            </a:pPr>
+            <a:pPr algn="l"/>
             <a:r>
               <a:rPr sz="900" b="0" i="1">
                 <a:solidFill>
                   <a:srgbClr val="555555"/>
                 </a:solidFill>
-                <a:latin typeface="Calibri"/>
+                <a:latin typeface="Times New Roman"/>
               </a:rPr>
-              <a:t>SARIMA vs SARIMAX — so sánh</a:t>
+              <a:t>SARIMA vs SARIMAX — so sanh</a:t>
             </a:r>
           </a:p>
         </p:txBody>
@@ -7491,49 +7027,6 @@
         <p:spPr>
           <a:xfrm>
             <a:off x="0" y="0"/>
-            <a:ext cx="12188952" cy="6858000"/>
-          </a:xfrm>
-          <a:prstGeom prst="rect">
-            <a:avLst/>
-          </a:prstGeom>
-          <a:solidFill>
-            <a:srgbClr val="FFFFFF"/>
-          </a:solidFill>
-          <a:ln>
-            <a:noFill/>
-          </a:ln>
-        </p:spPr>
-        <p:style>
-          <a:lnRef idx="1">
-            <a:schemeClr val="accent1"/>
-          </a:lnRef>
-          <a:fillRef idx="3">
-            <a:schemeClr val="accent1"/>
-          </a:fillRef>
-          <a:effectRef idx="2">
-            <a:schemeClr val="accent1"/>
-          </a:effectRef>
-          <a:fontRef idx="minor">
-            <a:schemeClr val="lt1"/>
-          </a:fontRef>
-        </p:style>
-        <p:txBody>
-          <a:bodyPr rtlCol="0" anchor="ctr"/>
-          <a:lstStyle/>
-          <a:p>
-            <a:pPr algn="ctr"/>
-          </a:p>
-        </p:txBody>
-      </p:sp>
-      <p:sp>
-        <p:nvSpPr>
-          <p:cNvPr id="3" name="Rectangle 2"/>
-          <p:cNvSpPr/>
-          <p:nvPr/>
-        </p:nvSpPr>
-        <p:spPr>
-          <a:xfrm>
-            <a:off x="0" y="0"/>
             <a:ext cx="12188952" cy="1005840"/>
           </a:xfrm>
           <a:prstGeom prst="rect">
@@ -7570,7 +7063,7 @@
       </p:sp>
       <p:sp>
         <p:nvSpPr>
-          <p:cNvPr id="4" name="Rectangle 3"/>
+          <p:cNvPr id="3" name="Rectangle 2"/>
           <p:cNvSpPr/>
           <p:nvPr/>
         </p:nvSpPr>
@@ -7613,7 +7106,7 @@
       </p:sp>
       <p:sp>
         <p:nvSpPr>
-          <p:cNvPr id="5" name="TextBox 4"/>
+          <p:cNvPr id="4" name="TextBox 3"/>
           <p:cNvSpPr txBox="1"/>
           <p:nvPr/>
         </p:nvSpPr>
@@ -7633,26 +7126,22 @@
           </a:bodyPr>
           <a:lstStyle/>
           <a:p>
-            <a:pPr algn="l">
-              <a:spcAft>
-                <a:spcPts val="0"/>
-              </a:spcAft>
-            </a:pPr>
+            <a:pPr algn="l"/>
             <a:r>
               <a:rPr sz="2700" b="1" i="0">
                 <a:solidFill>
                   <a:srgbClr val="FFFFFF"/>
                 </a:solidFill>
-                <a:latin typeface="Calibri"/>
+                <a:latin typeface="Times New Roman"/>
               </a:rPr>
-              <a:t>Mở Rộng sang SARIMAX — Biến Ngoại Sinh</a:t>
-            </a:r>
-          </a:p>
-        </p:txBody>
-      </p:sp>
-      <p:sp>
-        <p:nvSpPr>
-          <p:cNvPr id="6" name="Rectangle 5"/>
+              <a:t>Mo Rong sang SARIMAX — Bien Ngoai Sinh</a:t>
+            </a:r>
+          </a:p>
+        </p:txBody>
+      </p:sp>
+      <p:sp>
+        <p:nvSpPr>
+          <p:cNvPr id="5" name="Rectangle 4"/>
           <p:cNvSpPr/>
           <p:nvPr/>
         </p:nvSpPr>
@@ -7695,7 +7184,7 @@
       </p:sp>
       <p:sp>
         <p:nvSpPr>
-          <p:cNvPr id="7" name="TextBox 6"/>
+          <p:cNvPr id="6" name="TextBox 5"/>
           <p:cNvSpPr txBox="1"/>
           <p:nvPr/>
         </p:nvSpPr>
@@ -7715,17 +7204,13 @@
           </a:bodyPr>
           <a:lstStyle/>
           <a:p>
-            <a:pPr algn="l">
-              <a:spcAft>
-                <a:spcPts val="0"/>
-              </a:spcAft>
-            </a:pPr>
+            <a:pPr algn="l"/>
             <a:r>
               <a:rPr sz="900" b="0" i="0">
                 <a:solidFill>
                   <a:srgbClr val="BDD7EE"/>
                 </a:solidFill>
-                <a:latin typeface="Calibri"/>
+                <a:latin typeface="Times New Roman"/>
               </a:rPr>
               <a:t>FreshRetailNet-50K  |  Week 5 Milestone  |  Time Series &amp; Forecasting</a:t>
             </a:r>
@@ -7734,7 +7219,7 @@
       </p:sp>
       <p:sp>
         <p:nvSpPr>
-          <p:cNvPr id="8" name="TextBox 7"/>
+          <p:cNvPr id="7" name="TextBox 6"/>
           <p:cNvSpPr txBox="1"/>
           <p:nvPr/>
         </p:nvSpPr>
@@ -7754,17 +7239,13 @@
           </a:bodyPr>
           <a:lstStyle/>
           <a:p>
-            <a:pPr algn="r">
-              <a:spcAft>
-                <a:spcPts val="0"/>
-              </a:spcAft>
-            </a:pPr>
+            <a:pPr algn="r"/>
             <a:r>
               <a:rPr sz="900" b="1" i="0">
                 <a:solidFill>
                   <a:srgbClr val="FFFFFF"/>
                 </a:solidFill>
-                <a:latin typeface="Calibri"/>
+                <a:latin typeface="Times New Roman"/>
               </a:rPr>
               <a:t>13 / 14</a:t>
             </a:r>
@@ -7773,14 +7254,14 @@
       </p:sp>
       <p:sp>
         <p:nvSpPr>
-          <p:cNvPr id="9" name="Rectangle 8"/>
+          <p:cNvPr id="8" name="Rectangle 7"/>
           <p:cNvSpPr/>
           <p:nvPr/>
         </p:nvSpPr>
         <p:spPr>
           <a:xfrm>
             <a:off x="365760" y="1143000"/>
-            <a:ext cx="4572000" cy="320040"/>
+            <a:ext cx="5029200" cy="320040"/>
           </a:xfrm>
           <a:prstGeom prst="rect">
             <a:avLst/>
@@ -7816,14 +7297,14 @@
       </p:sp>
       <p:sp>
         <p:nvSpPr>
-          <p:cNvPr id="10" name="TextBox 9"/>
+          <p:cNvPr id="9" name="TextBox 8"/>
           <p:cNvSpPr txBox="1"/>
           <p:nvPr/>
         </p:nvSpPr>
         <p:spPr>
           <a:xfrm>
             <a:off x="438912" y="1168400"/>
-            <a:ext cx="4480560" cy="320040"/>
+            <a:ext cx="4937760" cy="320040"/>
           </a:xfrm>
           <a:prstGeom prst="rect">
             <a:avLst/>
@@ -7836,26 +7317,22 @@
           </a:bodyPr>
           <a:lstStyle/>
           <a:p>
-            <a:pPr algn="l">
-              <a:spcAft>
-                <a:spcPts val="0"/>
-              </a:spcAft>
-            </a:pPr>
+            <a:pPr algn="l"/>
             <a:r>
               <a:rPr sz="1200" b="1" i="0">
                 <a:solidFill>
                   <a:srgbClr val="FFFFFF"/>
                 </a:solidFill>
-                <a:latin typeface="Calibri"/>
+                <a:latin typeface="Times New Roman"/>
               </a:rPr>
-              <a:t>📥  Biến ngoại sinh đưa vào mô hình</a:t>
+              <a:t>Bien ngoai sinh dua vao mo hinh</a:t>
             </a:r>
           </a:p>
         </p:txBody>
       </p:sp>
       <p:graphicFrame>
         <p:nvGraphicFramePr>
-          <p:cNvPr id="11" name="Table 10"/>
+          <p:cNvPr id="10" name="Table 9"/>
           <p:cNvGraphicFramePr>
             <a:graphicFrameLocks noGrp="1"/>
           </p:cNvGraphicFramePr>
@@ -7863,7 +7340,7 @@
         </p:nvGraphicFramePr>
         <p:xfrm>
           <a:off x="365760" y="1508760"/>
-          <a:ext cx="11430000" cy="2011680"/>
+          <a:ext cx="11430000" cy="1965960"/>
         </p:xfrm>
         <a:graphic>
           <a:graphicData uri="http://schemas.openxmlformats.org/drawingml/2006/table">
@@ -7876,7 +7353,7 @@
                 <a:gridCol w="2194560"/>
                 <a:gridCol w="7040880"/>
               </a:tblGrid>
-              <a:tr h="402336">
+              <a:tr h="393192">
                 <a:tc>
                   <a:txBody>
                     <a:bodyPr/>
@@ -7888,9 +7365,9 @@
                           <a:solidFill>
                             <a:srgbClr val="FFFFFF"/>
                           </a:solidFill>
-                          <a:latin typeface="Calibri"/>
-                        </a:rPr>
-                        <a:t>Biến</a:t>
+                          <a:latin typeface="Times New Roman"/>
+                        </a:rPr>
+                        <a:t>Bien</a:t>
                       </a:r>
                     </a:p>
                   </a:txBody>
@@ -7911,9 +7388,9 @@
                           <a:solidFill>
                             <a:srgbClr val="FFFFFF"/>
                           </a:solidFill>
-                          <a:latin typeface="Calibri"/>
-                        </a:rPr>
-                        <a:t>Mô tả</a:t>
+                          <a:latin typeface="Times New Roman"/>
+                        </a:rPr>
+                        <a:t>Mo ta</a:t>
                       </a:r>
                     </a:p>
                   </a:txBody>
@@ -7934,9 +7411,9 @@
                           <a:solidFill>
                             <a:srgbClr val="FFFFFF"/>
                           </a:solidFill>
-                          <a:latin typeface="Calibri"/>
-                        </a:rPr>
-                        <a:t>Dấu hệ số &amp; Ý nghĩa</a:t>
+                          <a:latin typeface="Times New Roman"/>
+                        </a:rPr>
+                        <a:t>Dau he so &amp; Y nghia</a:t>
                       </a:r>
                     </a:p>
                   </a:txBody>
@@ -7947,7 +7424,7 @@
                   </a:tcPr>
                 </a:tc>
               </a:tr>
-              <a:tr h="402336">
+              <a:tr h="393192">
                 <a:tc>
                   <a:txBody>
                     <a:bodyPr/>
@@ -7959,7 +7436,7 @@
                           <a:solidFill>
                             <a:srgbClr val="1A1A1A"/>
                           </a:solidFill>
-                          <a:latin typeface="Calibri"/>
+                          <a:latin typeface="Times New Roman"/>
                         </a:rPr>
                         <a:t>avg_temperature</a:t>
                       </a:r>
@@ -7982,9 +7459,9 @@
                           <a:solidFill>
                             <a:srgbClr val="1A1A1A"/>
                           </a:solidFill>
-                          <a:latin typeface="Calibri"/>
-                        </a:rPr>
-                        <a:t>Nhiệt độ TB (chuẩn hoá)</a:t>
+                          <a:latin typeface="Times New Roman"/>
+                        </a:rPr>
+                        <a:t>Nhiet do TB (chuan hoa)</a:t>
                       </a:r>
                     </a:p>
                   </a:txBody>
@@ -8005,9 +7482,9 @@
                           <a:solidFill>
                             <a:srgbClr val="1A1A1A"/>
                           </a:solidFill>
-                          <a:latin typeface="Calibri"/>
-                        </a:rPr>
-                        <a:t>Dương (+) — nóng → nhu cầu tươi tăng</a:t>
+                          <a:latin typeface="Times New Roman"/>
+                        </a:rPr>
+                        <a:t>Duong (+) — nong -&gt; nhu cau tuoi tang</a:t>
                       </a:r>
                     </a:p>
                   </a:txBody>
@@ -8018,7 +7495,7 @@
                   </a:tcPr>
                 </a:tc>
               </a:tr>
-              <a:tr h="402336">
+              <a:tr h="393192">
                 <a:tc>
                   <a:txBody>
                     <a:bodyPr/>
@@ -8030,7 +7507,7 @@
                           <a:solidFill>
                             <a:srgbClr val="1A1A1A"/>
                           </a:solidFill>
-                          <a:latin typeface="Calibri"/>
+                          <a:latin typeface="Times New Roman"/>
                         </a:rPr>
                         <a:t>avg_precpt</a:t>
                       </a:r>
@@ -8053,9 +7530,9 @@
                           <a:solidFill>
                             <a:srgbClr val="1A1A1A"/>
                           </a:solidFill>
-                          <a:latin typeface="Calibri"/>
-                        </a:rPr>
-                        <a:t>Lượng mưa (chuẩn hoá)</a:t>
+                          <a:latin typeface="Times New Roman"/>
+                        </a:rPr>
+                        <a:t>Luong mua (chuan hoa)</a:t>
                       </a:r>
                     </a:p>
                   </a:txBody>
@@ -8076,9 +7553,9 @@
                           <a:solidFill>
                             <a:srgbClr val="1A1A1A"/>
                           </a:solidFill>
-                          <a:latin typeface="Calibri"/>
-                        </a:rPr>
-                        <a:t>Âm (−)  — mưa → ít đặt hàng</a:t>
+                          <a:latin typeface="Times New Roman"/>
+                        </a:rPr>
+                        <a:t>Am (-)  — mua -&gt; it dat hang</a:t>
                       </a:r>
                     </a:p>
                   </a:txBody>
@@ -8089,7 +7566,7 @@
                   </a:tcPr>
                 </a:tc>
               </a:tr>
-              <a:tr h="402336">
+              <a:tr h="393192">
                 <a:tc>
                   <a:txBody>
                     <a:bodyPr/>
@@ -8101,7 +7578,7 @@
                           <a:solidFill>
                             <a:srgbClr val="1A1A1A"/>
                           </a:solidFill>
-                          <a:latin typeface="Calibri"/>
+                          <a:latin typeface="Times New Roman"/>
                         </a:rPr>
                         <a:t>holiday_flag</a:t>
                       </a:r>
@@ -8124,9 +7601,9 @@
                           <a:solidFill>
                             <a:srgbClr val="1A1A1A"/>
                           </a:solidFill>
-                          <a:latin typeface="Calibri"/>
-                        </a:rPr>
-                        <a:t>Ngày lễ  (binary)</a:t>
+                          <a:latin typeface="Times New Roman"/>
+                        </a:rPr>
+                        <a:t>Ngay le  (binary)</a:t>
                       </a:r>
                     </a:p>
                   </a:txBody>
@@ -8147,9 +7624,9 @@
                           <a:solidFill>
                             <a:srgbClr val="1A1A1A"/>
                           </a:solidFill>
-                          <a:latin typeface="Calibri"/>
-                        </a:rPr>
-                        <a:t>Dương lớn (+) — spike doanh số</a:t>
+                          <a:latin typeface="Times New Roman"/>
+                        </a:rPr>
+                        <a:t>Duong lon (+) — spike doanh so</a:t>
                       </a:r>
                     </a:p>
                   </a:txBody>
@@ -8160,7 +7637,7 @@
                   </a:tcPr>
                 </a:tc>
               </a:tr>
-              <a:tr h="402336">
+              <a:tr h="393192">
                 <a:tc>
                   <a:txBody>
                     <a:bodyPr/>
@@ -8172,7 +7649,7 @@
                           <a:solidFill>
                             <a:srgbClr val="1A1A1A"/>
                           </a:solidFill>
-                          <a:latin typeface="Calibri"/>
+                          <a:latin typeface="Times New Roman"/>
                         </a:rPr>
                         <a:t>activity_flag</a:t>
                       </a:r>
@@ -8195,9 +7672,9 @@
                           <a:solidFill>
                             <a:srgbClr val="1A1A1A"/>
                           </a:solidFill>
-                          <a:latin typeface="Calibri"/>
-                        </a:rPr>
-                        <a:t>Ngày KM  (binary)</a:t>
+                          <a:latin typeface="Times New Roman"/>
+                        </a:rPr>
+                        <a:t>Ngay KM  (binary)</a:t>
                       </a:r>
                     </a:p>
                   </a:txBody>
@@ -8218,9 +7695,9 @@
                           <a:solidFill>
                             <a:srgbClr val="1A1A1A"/>
                           </a:solidFill>
-                          <a:latin typeface="Calibri"/>
-                        </a:rPr>
-                        <a:t>Dương lớn nhất — driver quan trọng nhất</a:t>
+                          <a:latin typeface="Times New Roman"/>
+                        </a:rPr>
+                        <a:t>Duong lon nhat — driver quan trong nhat</a:t>
                       </a:r>
                     </a:p>
                   </a:txBody>
@@ -8237,13 +7714,13 @@
       </p:graphicFrame>
       <p:sp>
         <p:nvSpPr>
-          <p:cNvPr id="12" name="Rectangle 11"/>
+          <p:cNvPr id="11" name="Rectangle 10"/>
           <p:cNvSpPr/>
           <p:nvPr/>
         </p:nvSpPr>
         <p:spPr>
           <a:xfrm>
-            <a:off x="365760" y="3657600"/>
+            <a:off x="365760" y="3611880"/>
             <a:ext cx="4114800" cy="320040"/>
           </a:xfrm>
           <a:prstGeom prst="rect">
@@ -8280,13 +7757,13 @@
       </p:sp>
       <p:sp>
         <p:nvSpPr>
-          <p:cNvPr id="13" name="TextBox 12"/>
+          <p:cNvPr id="12" name="TextBox 11"/>
           <p:cNvSpPr txBox="1"/>
           <p:nvPr/>
         </p:nvSpPr>
         <p:spPr>
           <a:xfrm>
-            <a:off x="438912" y="3683000"/>
+            <a:off x="438912" y="3637280"/>
             <a:ext cx="4023360" cy="320040"/>
           </a:xfrm>
           <a:prstGeom prst="rect">
@@ -8300,33 +7777,29 @@
           </a:bodyPr>
           <a:lstStyle/>
           <a:p>
-            <a:pPr algn="l">
-              <a:spcAft>
-                <a:spcPts val="0"/>
-              </a:spcAft>
-            </a:pPr>
+            <a:pPr algn="l"/>
             <a:r>
               <a:rPr sz="1200" b="1" i="0">
                 <a:solidFill>
                   <a:srgbClr val="FFFFFF"/>
                 </a:solidFill>
-                <a:latin typeface="Calibri"/>
+                <a:latin typeface="Times New Roman"/>
               </a:rPr>
-              <a:t>📊  So sánh SARIMA vs SARIMAX</a:t>
+              <a:t>So sanh SARIMA vs SARIMAX</a:t>
             </a:r>
           </a:p>
         </p:txBody>
       </p:sp>
       <p:graphicFrame>
         <p:nvGraphicFramePr>
-          <p:cNvPr id="14" name="Table 13"/>
+          <p:cNvPr id="13" name="Table 12"/>
           <p:cNvGraphicFramePr>
             <a:graphicFrameLocks noGrp="1"/>
           </p:cNvGraphicFramePr>
           <p:nvPr/>
         </p:nvGraphicFramePr>
         <p:xfrm>
-          <a:off x="365760" y="4023360"/>
+          <a:off x="365760" y="3977639"/>
           <a:ext cx="11430000" cy="1737360"/>
         </p:xfrm>
         <a:graphic>
@@ -8353,7 +7826,7 @@
                           <a:solidFill>
                             <a:srgbClr val="FFFFFF"/>
                           </a:solidFill>
-                          <a:latin typeface="Calibri"/>
+                          <a:latin typeface="Times New Roman"/>
                         </a:rPr>
                         <a:t>Metric</a:t>
                       </a:r>
@@ -8376,7 +7849,7 @@
                           <a:solidFill>
                             <a:srgbClr val="FFFFFF"/>
                           </a:solidFill>
-                          <a:latin typeface="Calibri"/>
+                          <a:latin typeface="Times New Roman"/>
                         </a:rPr>
                         <a:t>SARIMA</a:t>
                       </a:r>
@@ -8399,7 +7872,7 @@
                           <a:solidFill>
                             <a:srgbClr val="FFFFFF"/>
                           </a:solidFill>
-                          <a:latin typeface="Calibri"/>
+                          <a:latin typeface="Times New Roman"/>
                         </a:rPr>
                         <a:t>SARIMAX</a:t>
                       </a:r>
@@ -8422,7 +7895,7 @@
                           <a:solidFill>
                             <a:srgbClr val="FFFFFF"/>
                           </a:solidFill>
-                          <a:latin typeface="Calibri"/>
+                          <a:latin typeface="Times New Roman"/>
                         </a:rPr>
                         <a:t>Improvement</a:t>
                       </a:r>
@@ -8447,7 +7920,7 @@
                           <a:solidFill>
                             <a:srgbClr val="1A1A1A"/>
                           </a:solidFill>
-                          <a:latin typeface="Calibri"/>
+                          <a:latin typeface="Times New Roman"/>
                         </a:rPr>
                         <a:t>MAPE (14-day)</a:t>
                       </a:r>
@@ -8470,9 +7943,9 @@
                           <a:solidFill>
                             <a:srgbClr val="1A1A1A"/>
                           </a:solidFill>
-                          <a:latin typeface="Calibri"/>
-                        </a:rPr>
-                        <a:t>8.01%</a:t>
+                          <a:latin typeface="Times New Roman"/>
+                        </a:rPr>
+                        <a:t>6.80%</a:t>
                       </a:r>
                     </a:p>
                   </a:txBody>
@@ -8493,9 +7966,9 @@
                           <a:solidFill>
                             <a:srgbClr val="1A1A1A"/>
                           </a:solidFill>
-                          <a:latin typeface="Calibri"/>
-                        </a:rPr>
-                        <a:t>6.43%</a:t>
+                          <a:latin typeface="Times New Roman"/>
+                        </a:rPr>
+                        <a:t>6.25%</a:t>
                       </a:r>
                     </a:p>
                   </a:txBody>
@@ -8516,9 +7989,9 @@
                           <a:solidFill>
                             <a:srgbClr val="1A1A1A"/>
                           </a:solidFill>
-                          <a:latin typeface="Calibri"/>
-                        </a:rPr>
-                        <a:t>−1.58 pp ✓</a:t>
+                          <a:latin typeface="Times New Roman"/>
+                        </a:rPr>
+                        <a:t>-0.54 pp</a:t>
                       </a:r>
                     </a:p>
                   </a:txBody>
@@ -8541,7 +8014,7 @@
                           <a:solidFill>
                             <a:srgbClr val="1A1A1A"/>
                           </a:solidFill>
-                          <a:latin typeface="Calibri"/>
+                          <a:latin typeface="Times New Roman"/>
                         </a:rPr>
                         <a:t>RMSE</a:t>
                       </a:r>
@@ -8564,9 +8037,9 @@
                           <a:solidFill>
                             <a:srgbClr val="1A1A1A"/>
                           </a:solidFill>
-                          <a:latin typeface="Calibri"/>
-                        </a:rPr>
-                        <a:t>5,666</a:t>
+                          <a:latin typeface="Times New Roman"/>
+                        </a:rPr>
+                        <a:t>4,652</a:t>
                       </a:r>
                     </a:p>
                   </a:txBody>
@@ -8587,9 +8060,9 @@
                           <a:solidFill>
                             <a:srgbClr val="1A1A1A"/>
                           </a:solidFill>
-                          <a:latin typeface="Calibri"/>
-                        </a:rPr>
-                        <a:t>5,079</a:t>
+                          <a:latin typeface="Times New Roman"/>
+                        </a:rPr>
+                        <a:t>4,903</a:t>
                       </a:r>
                     </a:p>
                   </a:txBody>
@@ -8610,9 +8083,9 @@
                           <a:solidFill>
                             <a:srgbClr val="1A1A1A"/>
                           </a:solidFill>
-                          <a:latin typeface="Calibri"/>
-                        </a:rPr>
-                        <a:t>−587 ✓</a:t>
+                          <a:latin typeface="Times New Roman"/>
+                        </a:rPr>
+                        <a:t>--250</a:t>
                       </a:r>
                     </a:p>
                   </a:txBody>
@@ -8635,7 +8108,7 @@
                           <a:solidFill>
                             <a:srgbClr val="1A1A1A"/>
                           </a:solidFill>
-                          <a:latin typeface="Calibri"/>
+                          <a:latin typeface="Times New Roman"/>
                         </a:rPr>
                         <a:t>AIC</a:t>
                       </a:r>
@@ -8658,9 +8131,9 @@
                           <a:solidFill>
                             <a:srgbClr val="1A1A1A"/>
                           </a:solidFill>
-                          <a:latin typeface="Calibri"/>
-                        </a:rPr>
-                        <a:t>−97.0</a:t>
+                          <a:latin typeface="Times New Roman"/>
+                        </a:rPr>
+                        <a:t>-102.1</a:t>
                       </a:r>
                     </a:p>
                   </a:txBody>
@@ -8681,9 +8154,9 @@
                           <a:solidFill>
                             <a:srgbClr val="1A1A1A"/>
                           </a:solidFill>
-                          <a:latin typeface="Calibri"/>
-                        </a:rPr>
-                        <a:t>−107.5</a:t>
+                          <a:latin typeface="Times New Roman"/>
+                        </a:rPr>
+                        <a:t>-111.2</a:t>
                       </a:r>
                     </a:p>
                   </a:txBody>
@@ -8704,9 +8177,9 @@
                           <a:solidFill>
                             <a:srgbClr val="1A1A1A"/>
                           </a:solidFill>
-                          <a:latin typeface="Calibri"/>
-                        </a:rPr>
-                        <a:t>−10.5 ✓</a:t>
+                          <a:latin typeface="Times New Roman"/>
+                        </a:rPr>
+                        <a:t>-9.1</a:t>
                       </a:r>
                     </a:p>
                   </a:txBody>
@@ -8729,7 +8202,7 @@
                           <a:solidFill>
                             <a:srgbClr val="1A1A1A"/>
                           </a:solidFill>
-                          <a:latin typeface="Calibri"/>
+                          <a:latin typeface="Times New Roman"/>
                         </a:rPr>
                         <a:t>Ljung-Box</a:t>
                       </a:r>
@@ -8752,9 +8225,9 @@
                           <a:solidFill>
                             <a:srgbClr val="1A1A1A"/>
                           </a:solidFill>
-                          <a:latin typeface="Calibri"/>
-                        </a:rPr>
-                        <a:t>Pass ✓</a:t>
+                          <a:latin typeface="Times New Roman"/>
+                        </a:rPr>
+                        <a:t>Pass</a:t>
                       </a:r>
                     </a:p>
                   </a:txBody>
@@ -8775,9 +8248,9 @@
                           <a:solidFill>
                             <a:srgbClr val="1A1A1A"/>
                           </a:solidFill>
-                          <a:latin typeface="Calibri"/>
-                        </a:rPr>
-                        <a:t>Pass ✓</a:t>
+                          <a:latin typeface="Times New Roman"/>
+                        </a:rPr>
+                        <a:t>Pass</a:t>
                       </a:r>
                     </a:p>
                   </a:txBody>
@@ -8798,7 +8271,7 @@
                           <a:solidFill>
                             <a:srgbClr val="1A1A1A"/>
                           </a:solidFill>
-                          <a:latin typeface="Calibri"/>
+                          <a:latin typeface="Times New Roman"/>
                         </a:rPr>
                         <a:t>—</a:t>
                       </a:r>
@@ -8817,14 +8290,14 @@
       </p:graphicFrame>
       <p:sp>
         <p:nvSpPr>
-          <p:cNvPr id="15" name="Rectangle 14"/>
+          <p:cNvPr id="14" name="Rectangle 13"/>
           <p:cNvSpPr/>
           <p:nvPr/>
         </p:nvSpPr>
         <p:spPr>
           <a:xfrm>
-            <a:off x="365760" y="5897880"/>
-            <a:ext cx="11430000" cy="548640"/>
+            <a:off x="365760" y="5852160"/>
+            <a:ext cx="11430000" cy="594360"/>
           </a:xfrm>
           <a:prstGeom prst="rect">
             <a:avLst/>
@@ -8860,14 +8333,14 @@
       </p:sp>
       <p:sp>
         <p:nvSpPr>
-          <p:cNvPr id="16" name="Rectangle 15"/>
+          <p:cNvPr id="15" name="Rectangle 14"/>
           <p:cNvSpPr/>
           <p:nvPr/>
         </p:nvSpPr>
         <p:spPr>
           <a:xfrm>
-            <a:off x="365760" y="5897880"/>
-            <a:ext cx="64008" cy="548640"/>
+            <a:off x="365760" y="5852160"/>
+            <a:ext cx="64008" cy="594360"/>
           </a:xfrm>
           <a:prstGeom prst="rect">
             <a:avLst/>
@@ -8903,14 +8376,14 @@
       </p:sp>
       <p:sp>
         <p:nvSpPr>
-          <p:cNvPr id="17" name="TextBox 16"/>
+          <p:cNvPr id="16" name="TextBox 15"/>
           <p:cNvSpPr txBox="1"/>
           <p:nvPr/>
         </p:nvSpPr>
         <p:spPr>
           <a:xfrm>
-            <a:off x="548640" y="5943600"/>
-            <a:ext cx="11155680" cy="457200"/>
+            <a:off x="548640" y="5897880"/>
+            <a:ext cx="11155680" cy="502920"/>
           </a:xfrm>
           <a:prstGeom prst="rect">
             <a:avLst/>
@@ -8923,19 +8396,15 @@
           </a:bodyPr>
           <a:lstStyle/>
           <a:p>
-            <a:pPr algn="l">
-              <a:spcAft>
-                <a:spcPts val="0"/>
-              </a:spcAft>
-            </a:pPr>
+            <a:pPr algn="l"/>
             <a:r>
               <a:rPr sz="1300" b="0" i="0">
                 <a:solidFill>
                   <a:srgbClr val="1F4E79"/>
                 </a:solidFill>
-                <a:latin typeface="Calibri"/>
+                <a:latin typeface="Times New Roman"/>
               </a:rPr>
-              <a:t>→  Kết luận: SARIMAX là mô hình nên dùng cho phân tích cuối — exogenous regressors có giá trị thực sự (AIC giảm 10.5). Hướng phát triển tuần 6: Tobit censoring correction + grid search đầy đủ.</a:t>
+              <a:t>-&gt; Ket luan: SARIMAX la mo hinh nen dung cho phan tich cuoi — exog co gia tri thuc su (AIC giam 9.1). Huong phat trien tuan 6: Tobit censoring correction + grid search day du.</a:t>
             </a:r>
           </a:p>
         </p:txBody>
@@ -9109,19 +8578,15 @@
           </a:bodyPr>
           <a:lstStyle/>
           <a:p>
-            <a:pPr algn="l">
-              <a:spcAft>
-                <a:spcPts val="0"/>
-              </a:spcAft>
-            </a:pPr>
+            <a:pPr algn="l"/>
             <a:r>
               <a:rPr sz="2700" b="1" i="0">
                 <a:solidFill>
                   <a:srgbClr val="FFFFFF"/>
                 </a:solidFill>
-                <a:latin typeface="Calibri"/>
+                <a:latin typeface="Times New Roman"/>
               </a:rPr>
-              <a:t>Phân Công Nhóm &amp; Kế Hoạch</a:t>
+              <a:t>Phan Cong Nhom &amp; Ke Hoach</a:t>
             </a:r>
           </a:p>
         </p:txBody>
@@ -9191,17 +8656,13 @@
           </a:bodyPr>
           <a:lstStyle/>
           <a:p>
-            <a:pPr algn="l">
-              <a:spcAft>
-                <a:spcPts val="0"/>
-              </a:spcAft>
-            </a:pPr>
+            <a:pPr algn="l"/>
             <a:r>
               <a:rPr sz="900" b="0" i="0">
                 <a:solidFill>
                   <a:srgbClr val="BDD7EE"/>
                 </a:solidFill>
-                <a:latin typeface="Calibri"/>
+                <a:latin typeface="Times New Roman"/>
               </a:rPr>
               <a:t>FreshRetailNet-50K  |  Week 5 Milestone  |  Time Series &amp; Forecasting</a:t>
             </a:r>
@@ -9230,17 +8691,13 @@
           </a:bodyPr>
           <a:lstStyle/>
           <a:p>
-            <a:pPr algn="r">
-              <a:spcAft>
-                <a:spcPts val="0"/>
-              </a:spcAft>
-            </a:pPr>
+            <a:pPr algn="r"/>
             <a:r>
               <a:rPr sz="900" b="1" i="0">
                 <a:solidFill>
                   <a:srgbClr val="FFFFFF"/>
                 </a:solidFill>
-                <a:latin typeface="Calibri"/>
+                <a:latin typeface="Times New Roman"/>
               </a:rPr>
               <a:t>14 / 14</a:t>
             </a:r>
@@ -9312,19 +8769,15 @@
           </a:bodyPr>
           <a:lstStyle/>
           <a:p>
-            <a:pPr algn="l">
-              <a:spcAft>
-                <a:spcPts val="0"/>
-              </a:spcAft>
-            </a:pPr>
+            <a:pPr algn="l"/>
             <a:r>
               <a:rPr sz="1200" b="1" i="0">
                 <a:solidFill>
                   <a:srgbClr val="FFFFFF"/>
                 </a:solidFill>
-                <a:latin typeface="Calibri"/>
+                <a:latin typeface="Times New Roman"/>
               </a:rPr>
-              <a:t>👥  Phân công công việc</a:t>
+              <a:t>Phan cong cong viec</a:t>
             </a:r>
           </a:p>
         </p:txBody>
@@ -9364,9 +8817,9 @@
                           <a:solidFill>
                             <a:srgbClr val="FFFFFF"/>
                           </a:solidFill>
-                          <a:latin typeface="Calibri"/>
-                        </a:rPr>
-                        <a:t>Công việc</a:t>
+                          <a:latin typeface="Times New Roman"/>
+                        </a:rPr>
+                        <a:t>Cong viec</a:t>
                       </a:r>
                     </a:p>
                   </a:txBody>
@@ -9387,9 +8840,9 @@
                           <a:solidFill>
                             <a:srgbClr val="FFFFFF"/>
                           </a:solidFill>
-                          <a:latin typeface="Calibri"/>
-                        </a:rPr>
-                        <a:t>Người phụ trách</a:t>
+                          <a:latin typeface="Times New Roman"/>
+                        </a:rPr>
+                        <a:t>Nguoi phu trach</a:t>
                       </a:r>
                     </a:p>
                   </a:txBody>
@@ -9410,9 +8863,9 @@
                           <a:solidFill>
                             <a:srgbClr val="FFFFFF"/>
                           </a:solidFill>
-                          <a:latin typeface="Calibri"/>
-                        </a:rPr>
-                        <a:t>Trạng thái</a:t>
+                          <a:latin typeface="Times New Roman"/>
+                        </a:rPr>
+                        <a:t>Trang thai</a:t>
                       </a:r>
                     </a:p>
                   </a:txBody>
@@ -9435,9 +8888,9 @@
                           <a:solidFill>
                             <a:srgbClr val="1A1A1A"/>
                           </a:solidFill>
-                          <a:latin typeface="Calibri"/>
-                        </a:rPr>
-                        <a:t>Nạp dữ liệu, EDA, STL</a:t>
+                          <a:latin typeface="Times New Roman"/>
+                        </a:rPr>
+                        <a:t>Nap DL, EDA, STL</a:t>
                       </a:r>
                     </a:p>
                   </a:txBody>
@@ -9458,9 +8911,9 @@
                           <a:solidFill>
                             <a:srgbClr val="1A1A1A"/>
                           </a:solidFill>
-                          <a:latin typeface="Calibri"/>
-                        </a:rPr>
-                        <a:t>Thành viên A</a:t>
+                          <a:latin typeface="Times New Roman"/>
+                        </a:rPr>
+                        <a:t>Thanh vien A</a:t>
                       </a:r>
                     </a:p>
                   </a:txBody>
@@ -9481,9 +8934,9 @@
                           <a:solidFill>
                             <a:srgbClr val="1A7A4A"/>
                           </a:solidFill>
-                          <a:latin typeface="Calibri"/>
-                        </a:rPr>
-                        <a:t>✅ Hoàn thành</a:t>
+                          <a:latin typeface="Times New Roman"/>
+                        </a:rPr>
+                        <a:t>Hoan thanh</a:t>
                       </a:r>
                     </a:p>
                   </a:txBody>
@@ -9506,9 +8959,9 @@
                           <a:solidFill>
                             <a:srgbClr val="1A1A1A"/>
                           </a:solidFill>
-                          <a:latin typeface="Calibri"/>
-                        </a:rPr>
-                        <a:t>ACF/PACF, kiểm định dừng</a:t>
+                          <a:latin typeface="Times New Roman"/>
+                        </a:rPr>
+                        <a:t>ACF/PACF, kiem dinh dung</a:t>
                       </a:r>
                     </a:p>
                   </a:txBody>
@@ -9529,9 +8982,9 @@
                           <a:solidFill>
                             <a:srgbClr val="1A1A1A"/>
                           </a:solidFill>
-                          <a:latin typeface="Calibri"/>
-                        </a:rPr>
-                        <a:t>Thành viên B</a:t>
+                          <a:latin typeface="Times New Roman"/>
+                        </a:rPr>
+                        <a:t>Thanh vien B</a:t>
                       </a:r>
                     </a:p>
                   </a:txBody>
@@ -9552,9 +9005,9 @@
                           <a:solidFill>
                             <a:srgbClr val="1A7A4A"/>
                           </a:solidFill>
-                          <a:latin typeface="Calibri"/>
-                        </a:rPr>
-                        <a:t>✅ Hoàn thành</a:t>
+                          <a:latin typeface="Times New Roman"/>
+                        </a:rPr>
+                        <a:t>Hoan thanh</a:t>
                       </a:r>
                     </a:p>
                   </a:txBody>
@@ -9577,7 +9030,7 @@
                           <a:solidFill>
                             <a:srgbClr val="1A1A1A"/>
                           </a:solidFill>
-                          <a:latin typeface="Calibri"/>
+                          <a:latin typeface="Times New Roman"/>
                         </a:rPr>
                         <a:t>SARIMA fitting &amp; diagnostics</a:t>
                       </a:r>
@@ -9600,9 +9053,9 @@
                           <a:solidFill>
                             <a:srgbClr val="1A1A1A"/>
                           </a:solidFill>
-                          <a:latin typeface="Calibri"/>
-                        </a:rPr>
-                        <a:t>Thành viên C</a:t>
+                          <a:latin typeface="Times New Roman"/>
+                        </a:rPr>
+                        <a:t>Thanh vien C</a:t>
                       </a:r>
                     </a:p>
                   </a:txBody>
@@ -9623,9 +9076,9 @@
                           <a:solidFill>
                             <a:srgbClr val="1A7A4A"/>
                           </a:solidFill>
-                          <a:latin typeface="Calibri"/>
-                        </a:rPr>
-                        <a:t>✅ Hoàn thành</a:t>
+                          <a:latin typeface="Times New Roman"/>
+                        </a:rPr>
+                        <a:t>Hoan thanh</a:t>
                       </a:r>
                     </a:p>
                   </a:txBody>
@@ -9648,7 +9101,7 @@
                           <a:solidFill>
                             <a:srgbClr val="1A1A1A"/>
                           </a:solidFill>
-                          <a:latin typeface="Calibri"/>
+                          <a:latin typeface="Times New Roman"/>
                         </a:rPr>
                         <a:t>SARIMAX + exog variables</a:t>
                       </a:r>
@@ -9671,7 +9124,7 @@
                           <a:solidFill>
                             <a:srgbClr val="1A1A1A"/>
                           </a:solidFill>
-                          <a:latin typeface="Calibri"/>
+                          <a:latin typeface="Times New Roman"/>
                         </a:rPr>
                         <a:t>A + B</a:t>
                       </a:r>
@@ -9694,9 +9147,9 @@
                           <a:solidFill>
                             <a:srgbClr val="E67E22"/>
                           </a:solidFill>
-                          <a:latin typeface="Calibri"/>
-                        </a:rPr>
-                        <a:t>🔄 Tuần 6</a:t>
+                          <a:latin typeface="Times New Roman"/>
+                        </a:rPr>
+                        <a:t>Tuan 6</a:t>
                       </a:r>
                     </a:p>
                   </a:txBody>
@@ -9719,7 +9172,7 @@
                           <a:solidFill>
                             <a:srgbClr val="1A1A1A"/>
                           </a:solidFill>
-                          <a:latin typeface="Calibri"/>
+                          <a:latin typeface="Times New Roman"/>
                         </a:rPr>
                         <a:t>Grid search AIC/BIC</a:t>
                       </a:r>
@@ -9742,9 +9195,9 @@
                           <a:solidFill>
                             <a:srgbClr val="1A1A1A"/>
                           </a:solidFill>
-                          <a:latin typeface="Calibri"/>
-                        </a:rPr>
-                        <a:t>Thành viên C</a:t>
+                          <a:latin typeface="Times New Roman"/>
+                        </a:rPr>
+                        <a:t>Thanh vien C</a:t>
                       </a:r>
                     </a:p>
                   </a:txBody>
@@ -9765,9 +9218,9 @@
                           <a:solidFill>
                             <a:srgbClr val="E67E22"/>
                           </a:solidFill>
-                          <a:latin typeface="Calibri"/>
-                        </a:rPr>
-                        <a:t>🔄 Tuần 6</a:t>
+                          <a:latin typeface="Times New Roman"/>
+                        </a:rPr>
+                        <a:t>Tuan 6</a:t>
                       </a:r>
                     </a:p>
                   </a:txBody>
@@ -9790,7 +9243,7 @@
                           <a:solidFill>
                             <a:srgbClr val="1A1A1A"/>
                           </a:solidFill>
-                          <a:latin typeface="Calibri"/>
+                          <a:latin typeface="Times New Roman"/>
                         </a:rPr>
                         <a:t>Censoring correction (Tobit)</a:t>
                       </a:r>
@@ -9813,9 +9266,9 @@
                           <a:solidFill>
                             <a:srgbClr val="1A1A1A"/>
                           </a:solidFill>
-                          <a:latin typeface="Calibri"/>
-                        </a:rPr>
-                        <a:t>Thành viên B</a:t>
+                          <a:latin typeface="Times New Roman"/>
+                        </a:rPr>
+                        <a:t>Thanh vien B</a:t>
                       </a:r>
                     </a:p>
                   </a:txBody>
@@ -9836,9 +9289,9 @@
                           <a:solidFill>
                             <a:srgbClr val="2E75B6"/>
                           </a:solidFill>
-                          <a:latin typeface="Calibri"/>
-                        </a:rPr>
-                        <a:t>📅 Tuần 7</a:t>
+                          <a:latin typeface="Times New Roman"/>
+                        </a:rPr>
+                        <a:t>Tuan 7</a:t>
                       </a:r>
                     </a:p>
                   </a:txBody>
@@ -9861,9 +9314,9 @@
                           <a:solidFill>
                             <a:srgbClr val="1A1A1A"/>
                           </a:solidFill>
-                          <a:latin typeface="Calibri"/>
-                        </a:rPr>
-                        <a:t>GARCH trên residuals</a:t>
+                          <a:latin typeface="Times New Roman"/>
+                        </a:rPr>
+                        <a:t>GARCH tren residuals</a:t>
                       </a:r>
                     </a:p>
                   </a:txBody>
@@ -9884,9 +9337,9 @@
                           <a:solidFill>
                             <a:srgbClr val="1A1A1A"/>
                           </a:solidFill>
-                          <a:latin typeface="Calibri"/>
-                        </a:rPr>
-                        <a:t>Thành viên B</a:t>
+                          <a:latin typeface="Times New Roman"/>
+                        </a:rPr>
+                        <a:t>Thanh vien B</a:t>
                       </a:r>
                     </a:p>
                   </a:txBody>
@@ -9907,9 +9360,9 @@
                           <a:solidFill>
                             <a:srgbClr val="2E75B6"/>
                           </a:solidFill>
-                          <a:latin typeface="Calibri"/>
-                        </a:rPr>
-                        <a:t>📅 Tuần 7</a:t>
+                          <a:latin typeface="Times New Roman"/>
+                        </a:rPr>
+                        <a:t>Tuan 7</a:t>
                       </a:r>
                     </a:p>
                   </a:txBody>
@@ -9932,7 +9385,7 @@
                           <a:solidFill>
                             <a:srgbClr val="1A1A1A"/>
                           </a:solidFill>
-                          <a:latin typeface="Calibri"/>
+                          <a:latin typeface="Times New Roman"/>
                         </a:rPr>
                         <a:t>Benchmark vs DLinear</a:t>
                       </a:r>
@@ -9955,9 +9408,9 @@
                           <a:solidFill>
                             <a:srgbClr val="1A1A1A"/>
                           </a:solidFill>
-                          <a:latin typeface="Calibri"/>
-                        </a:rPr>
-                        <a:t>Thành viên A</a:t>
+                          <a:latin typeface="Times New Roman"/>
+                        </a:rPr>
+                        <a:t>Thanh vien A</a:t>
                       </a:r>
                     </a:p>
                   </a:txBody>
@@ -9978,9 +9431,9 @@
                           <a:solidFill>
                             <a:srgbClr val="2E75B6"/>
                           </a:solidFill>
-                          <a:latin typeface="Calibri"/>
-                        </a:rPr>
-                        <a:t>📅 Tuần 7</a:t>
+                          <a:latin typeface="Times New Roman"/>
+                        </a:rPr>
+                        <a:t>Tuan 7</a:t>
                       </a:r>
                     </a:p>
                   </a:txBody>
@@ -10003,9 +9456,9 @@
                           <a:solidFill>
                             <a:srgbClr val="1A1A1A"/>
                           </a:solidFill>
-                          <a:latin typeface="Calibri"/>
-                        </a:rPr>
-                        <a:t>Báo cáo cuối &amp; trình bày</a:t>
+                          <a:latin typeface="Times New Roman"/>
+                        </a:rPr>
+                        <a:t>Bao cao cuoi &amp; trinh bay</a:t>
                       </a:r>
                     </a:p>
                   </a:txBody>
@@ -10026,9 +9479,9 @@
                           <a:solidFill>
                             <a:srgbClr val="1A1A1A"/>
                           </a:solidFill>
-                          <a:latin typeface="Calibri"/>
-                        </a:rPr>
-                        <a:t>Cả nhóm</a:t>
+                          <a:latin typeface="Times New Roman"/>
+                        </a:rPr>
+                        <a:t>Ca nhom</a:t>
                       </a:r>
                     </a:p>
                   </a:txBody>
@@ -10049,9 +9502,9 @@
                           <a:solidFill>
                             <a:srgbClr val="2E75B6"/>
                           </a:solidFill>
-                          <a:latin typeface="Calibri"/>
-                        </a:rPr>
-                        <a:t>📅 Tuần 8</a:t>
+                          <a:latin typeface="Times New Roman"/>
+                        </a:rPr>
+                        <a:t>Tuan 8</a:t>
                       </a:r>
                     </a:p>
                   </a:txBody>
@@ -10131,19 +9584,15 @@
           </a:bodyPr>
           <a:lstStyle/>
           <a:p>
-            <a:pPr algn="l">
-              <a:spcAft>
-                <a:spcPts val="0"/>
-              </a:spcAft>
-            </a:pPr>
+            <a:pPr algn="l"/>
             <a:r>
               <a:rPr sz="1200" b="1" i="0">
                 <a:solidFill>
                   <a:srgbClr val="FFFFFF"/>
                 </a:solidFill>
-                <a:latin typeface="Calibri"/>
+                <a:latin typeface="Times New Roman"/>
               </a:rPr>
-              <a:t>📋  Việc còn lại (Tuần 6–8)</a:t>
+              <a:t>Viec con lai (Tuan 6-8)</a:t>
             </a:r>
           </a:p>
         </p:txBody>
@@ -10180,9 +9629,9 @@
                 <a:solidFill>
                   <a:srgbClr val="1A1A1A"/>
                 </a:solidFill>
-                <a:latin typeface="Calibri"/>
+                <a:latin typeface="Times New Roman"/>
               </a:rPr>
-              <a:t>▸  Grid search SARIMA: p,q ∈ {0,1,2}, P,Q ∈ {0,1}</a:t>
+              <a:t>Grid search SARIMA: p,q in {0,1,2}, P,Q in {0,1}</a:t>
             </a:r>
           </a:p>
           <a:p>
@@ -10196,9 +9645,9 @@
                 <a:solidFill>
                   <a:srgbClr val="1A1A1A"/>
                 </a:solidFill>
-                <a:latin typeface="Calibri"/>
+                <a:latin typeface="Times New Roman"/>
               </a:rPr>
-              <a:t>▸  Tobit-adjusted demand recovery (censoring fix)</a:t>
+              <a:t>Tobit-adjusted demand recovery (censoring fix)</a:t>
             </a:r>
           </a:p>
           <a:p>
@@ -10212,9 +9661,9 @@
                 <a:solidFill>
                   <a:srgbClr val="1A1A1A"/>
                 </a:solidFill>
-                <a:latin typeface="Calibri"/>
+                <a:latin typeface="Times New Roman"/>
               </a:rPr>
-              <a:t>▸  Walk-forward cross-validation (time series split)</a:t>
+              <a:t>Walk-forward cross-validation (time series split)</a:t>
             </a:r>
           </a:p>
           <a:p>
@@ -10228,9 +9677,9 @@
                 <a:solidFill>
                   <a:srgbClr val="1A1A1A"/>
                 </a:solidFill>
-                <a:latin typeface="Calibri"/>
+                <a:latin typeface="Times New Roman"/>
               </a:rPr>
-              <a:t>▸  GARCH(1,1): test conditional heteroskedasticity</a:t>
+              <a:t>GARCH(1,1): test conditional heteroskedasticity</a:t>
             </a:r>
           </a:p>
           <a:p>
@@ -10244,9 +9693,9 @@
                 <a:solidFill>
                   <a:srgbClr val="1A1A1A"/>
                 </a:solidFill>
-                <a:latin typeface="Calibri"/>
+                <a:latin typeface="Times New Roman"/>
               </a:rPr>
-              <a:t>▸  Phân tích per-category (rau, trái cây, thịt)</a:t>
+              <a:t>Phan tich per-category (rau, trai cay, thit)</a:t>
             </a:r>
           </a:p>
           <a:p>
@@ -10260,9 +9709,9 @@
                 <a:solidFill>
                   <a:srgbClr val="1A1A1A"/>
                 </a:solidFill>
-                <a:latin typeface="Calibri"/>
+                <a:latin typeface="Times New Roman"/>
               </a:rPr>
-              <a:t>▸  So sánh MAPE vs DLinear baseline từ Dingdong repo</a:t>
+              <a:t>So sanh MAPE vs DLinear baseline (Dingdong repo)</a:t>
             </a:r>
           </a:p>
           <a:p>
@@ -10276,9 +9725,9 @@
                 <a:solidFill>
                   <a:srgbClr val="1A1A1A"/>
                 </a:solidFill>
-                <a:latin typeface="Calibri"/>
+                <a:latin typeface="Times New Roman"/>
               </a:rPr>
-              <a:t>▸  Báo cáo viết + visualisations hoàn chỉnh</a:t>
+              <a:t>Bao cao viet + visualisations hoan chinh</a:t>
             </a:r>
           </a:p>
         </p:txBody>
@@ -10291,8 +9740,8 @@
         </p:nvSpPr>
         <p:spPr>
           <a:xfrm>
-            <a:off x="365760" y="6263640"/>
-            <a:ext cx="11430000" cy="201168"/>
+            <a:off x="365760" y="6245352"/>
+            <a:ext cx="11430000" cy="219456"/>
           </a:xfrm>
           <a:prstGeom prst="rect">
             <a:avLst/>
@@ -10305,19 +9754,15 @@
           </a:bodyPr>
           <a:lstStyle/>
           <a:p>
-            <a:pPr algn="l">
-              <a:spcAft>
-                <a:spcPts val="0"/>
-              </a:spcAft>
-            </a:pPr>
+            <a:pPr algn="l"/>
             <a:r>
               <a:rPr sz="1000" b="0" i="1">
                 <a:solidFill>
                   <a:srgbClr val="555555"/>
                 </a:solidFill>
-                <a:latin typeface="Calibri"/>
+                <a:latin typeface="Times New Roman"/>
               </a:rPr>
-              <a:t>⚑  Tất cả code và dữ liệu có sẵn để demo nếu được hỏi trong Q&amp;A.</a:t>
+              <a:t>Tat ca code va du lieu san sang demo trong Q&amp;A.</a:t>
             </a:r>
           </a:p>
         </p:txBody>
@@ -10491,19 +9936,15 @@
           </a:bodyPr>
           <a:lstStyle/>
           <a:p>
-            <a:pPr algn="l">
-              <a:spcAft>
-                <a:spcPts val="0"/>
-              </a:spcAft>
-            </a:pPr>
+            <a:pPr algn="l"/>
             <a:r>
               <a:rPr sz="2700" b="1" i="0">
                 <a:solidFill>
                   <a:srgbClr val="FFFFFF"/>
                 </a:solidFill>
-                <a:latin typeface="Calibri"/>
+                <a:latin typeface="Times New Roman"/>
               </a:rPr>
-              <a:t>Nội Dung Báo Cáo</a:t>
+              <a:t>Noi Dung Bao Cao</a:t>
             </a:r>
           </a:p>
         </p:txBody>
@@ -10573,17 +10014,13 @@
           </a:bodyPr>
           <a:lstStyle/>
           <a:p>
-            <a:pPr algn="l">
-              <a:spcAft>
-                <a:spcPts val="0"/>
-              </a:spcAft>
-            </a:pPr>
+            <a:pPr algn="l"/>
             <a:r>
               <a:rPr sz="900" b="0" i="0">
                 <a:solidFill>
                   <a:srgbClr val="BDD7EE"/>
                 </a:solidFill>
-                <a:latin typeface="Calibri"/>
+                <a:latin typeface="Times New Roman"/>
               </a:rPr>
               <a:t>FreshRetailNet-50K  |  Week 5 Milestone  |  Time Series &amp; Forecasting</a:t>
             </a:r>
@@ -10612,17 +10049,13 @@
           </a:bodyPr>
           <a:lstStyle/>
           <a:p>
-            <a:pPr algn="r">
-              <a:spcAft>
-                <a:spcPts val="0"/>
-              </a:spcAft>
-            </a:pPr>
+            <a:pPr algn="r"/>
             <a:r>
               <a:rPr sz="900" b="1" i="0">
                 <a:solidFill>
                   <a:srgbClr val="FFFFFF"/>
                 </a:solidFill>
-                <a:latin typeface="Calibri"/>
+                <a:latin typeface="Times New Roman"/>
               </a:rPr>
               <a:t>2 / 14</a:t>
             </a:r>
@@ -10637,7 +10070,7 @@
         </p:nvSpPr>
         <p:spPr>
           <a:xfrm>
-            <a:off x="457200" y="1325880"/>
+            <a:off x="457200" y="1298448"/>
             <a:ext cx="594360" cy="594360"/>
           </a:xfrm>
           <a:prstGeom prst="rect">
@@ -10680,8 +10113,8 @@
         </p:nvSpPr>
         <p:spPr>
           <a:xfrm>
-            <a:off x="457200" y="1380744"/>
-            <a:ext cx="594360" cy="502920"/>
+            <a:off x="457200" y="1362456"/>
+            <a:ext cx="594360" cy="475488"/>
           </a:xfrm>
           <a:prstGeom prst="rect">
             <a:avLst/>
@@ -10694,17 +10127,13 @@
           </a:bodyPr>
           <a:lstStyle/>
           <a:p>
-            <a:pPr algn="ctr">
-              <a:spcAft>
-                <a:spcPts val="0"/>
-              </a:spcAft>
-            </a:pPr>
+            <a:pPr algn="ctr"/>
             <a:r>
               <a:rPr sz="1800" b="1" i="0">
                 <a:solidFill>
                   <a:srgbClr val="FFBF00"/>
                 </a:solidFill>
-                <a:latin typeface="Calibri"/>
+                <a:latin typeface="Times New Roman"/>
               </a:rPr>
               <a:t>01</a:t>
             </a:r>
@@ -10719,8 +10148,8 @@
         </p:nvSpPr>
         <p:spPr>
           <a:xfrm>
-            <a:off x="1188720" y="1325880"/>
-            <a:ext cx="9144000" cy="365760"/>
+            <a:off x="1188720" y="1298448"/>
+            <a:ext cx="9144000" cy="347472"/>
           </a:xfrm>
           <a:prstGeom prst="rect">
             <a:avLst/>
@@ -10733,17 +10162,13 @@
           </a:bodyPr>
           <a:lstStyle/>
           <a:p>
-            <a:pPr algn="l">
-              <a:spcAft>
-                <a:spcPts val="0"/>
-              </a:spcAft>
-            </a:pPr>
+            <a:pPr algn="l"/>
             <a:r>
               <a:rPr sz="1700" b="1" i="0">
                 <a:solidFill>
                   <a:srgbClr val="1F4E79"/>
                 </a:solidFill>
-                <a:latin typeface="Calibri"/>
+                <a:latin typeface="Times New Roman"/>
               </a:rPr>
               <a:t>Problem Statement &amp; Motivation</a:t>
             </a:r>
@@ -10758,8 +10183,8 @@
         </p:nvSpPr>
         <p:spPr>
           <a:xfrm>
-            <a:off x="1188720" y="1673352"/>
-            <a:ext cx="9144000" cy="274320"/>
+            <a:off x="1188720" y="1645920"/>
+            <a:ext cx="9144000" cy="256032"/>
           </a:xfrm>
           <a:prstGeom prst="rect">
             <a:avLst/>
@@ -10772,19 +10197,15 @@
           </a:bodyPr>
           <a:lstStyle/>
           <a:p>
-            <a:pPr algn="l">
-              <a:spcAft>
-                <a:spcPts val="0"/>
-              </a:spcAft>
-            </a:pPr>
+            <a:pPr algn="l"/>
             <a:r>
               <a:rPr sz="1200" b="0" i="0">
                 <a:solidFill>
                   <a:srgbClr val="555555"/>
                 </a:solidFill>
-                <a:latin typeface="Calibri"/>
+                <a:latin typeface="Times New Roman"/>
               </a:rPr>
-              <a:t>Câu hỏi nghiên cứu, ý nghĩa thực tiễn, censored demand</a:t>
+              <a:t>Cau hoi nghien cuu, y nghia thuc tien, censored demand</a:t>
             </a:r>
           </a:p>
         </p:txBody>
@@ -10797,7 +10218,7 @@
         </p:nvSpPr>
         <p:spPr>
           <a:xfrm>
-            <a:off x="1188720" y="1965960"/>
+            <a:off x="1188720" y="1938528"/>
             <a:ext cx="10241280" cy="6350"/>
           </a:xfrm>
           <a:prstGeom prst="rect">
@@ -10840,7 +10261,7 @@
         </p:nvSpPr>
         <p:spPr>
           <a:xfrm>
-            <a:off x="457200" y="2194560"/>
+            <a:off x="457200" y="2167128"/>
             <a:ext cx="594360" cy="594360"/>
           </a:xfrm>
           <a:prstGeom prst="rect">
@@ -10883,8 +10304,8 @@
         </p:nvSpPr>
         <p:spPr>
           <a:xfrm>
-            <a:off x="457200" y="2249424"/>
-            <a:ext cx="594360" cy="502920"/>
+            <a:off x="457200" y="2231136"/>
+            <a:ext cx="594360" cy="475488"/>
           </a:xfrm>
           <a:prstGeom prst="rect">
             <a:avLst/>
@@ -10897,17 +10318,13 @@
           </a:bodyPr>
           <a:lstStyle/>
           <a:p>
-            <a:pPr algn="ctr">
-              <a:spcAft>
-                <a:spcPts val="0"/>
-              </a:spcAft>
-            </a:pPr>
+            <a:pPr algn="ctr"/>
             <a:r>
               <a:rPr sz="1800" b="1" i="0">
                 <a:solidFill>
                   <a:srgbClr val="FFBF00"/>
                 </a:solidFill>
-                <a:latin typeface="Calibri"/>
+                <a:latin typeface="Times New Roman"/>
               </a:rPr>
               <a:t>02</a:t>
             </a:r>
@@ -10922,8 +10339,8 @@
         </p:nvSpPr>
         <p:spPr>
           <a:xfrm>
-            <a:off x="1188720" y="2194560"/>
-            <a:ext cx="9144000" cy="365760"/>
+            <a:off x="1188720" y="2167128"/>
+            <a:ext cx="9144000" cy="347472"/>
           </a:xfrm>
           <a:prstGeom prst="rect">
             <a:avLst/>
@@ -10936,19 +10353,15 @@
           </a:bodyPr>
           <a:lstStyle/>
           <a:p>
-            <a:pPr algn="l">
-              <a:spcAft>
-                <a:spcPts val="0"/>
-              </a:spcAft>
-            </a:pPr>
+            <a:pPr algn="l"/>
             <a:r>
               <a:rPr sz="1700" b="1" i="0">
                 <a:solidFill>
                   <a:srgbClr val="1F4E79"/>
                 </a:solidFill>
-                <a:latin typeface="Calibri"/>
+                <a:latin typeface="Times New Roman"/>
               </a:rPr>
-              <a:t>Mô Tả &amp; Khám Phá Dữ Liệu</a:t>
+              <a:t>Mo Ta &amp; Kham Pha Du Lieu</a:t>
             </a:r>
           </a:p>
         </p:txBody>
@@ -10961,8 +10374,8 @@
         </p:nvSpPr>
         <p:spPr>
           <a:xfrm>
-            <a:off x="1188720" y="2542032"/>
-            <a:ext cx="9144000" cy="274320"/>
+            <a:off x="1188720" y="2514600"/>
+            <a:ext cx="9144000" cy="256032"/>
           </a:xfrm>
           <a:prstGeom prst="rect">
             <a:avLst/>
@@ -10975,19 +10388,15 @@
           </a:bodyPr>
           <a:lstStyle/>
           <a:p>
-            <a:pPr algn="l">
-              <a:spcAft>
-                <a:spcPts val="0"/>
-              </a:spcAft>
-            </a:pPr>
+            <a:pPr algn="l"/>
             <a:r>
               <a:rPr sz="1200" b="0" i="0">
                 <a:solidFill>
                   <a:srgbClr val="555555"/>
                 </a:solidFill>
-                <a:latin typeface="Calibri"/>
+                <a:latin typeface="Times New Roman"/>
               </a:rPr>
-              <a:t>4.85M rows, 90 ngày, time plot, censoring rate</a:t>
+              <a:t>4.85M rows, 90 ngay, time plot, censoring rate</a:t>
             </a:r>
           </a:p>
         </p:txBody>
@@ -11000,7 +10409,7 @@
         </p:nvSpPr>
         <p:spPr>
           <a:xfrm>
-            <a:off x="1188720" y="2834640"/>
+            <a:off x="1188720" y="2807208"/>
             <a:ext cx="10241280" cy="6350"/>
           </a:xfrm>
           <a:prstGeom prst="rect">
@@ -11043,7 +10452,7 @@
         </p:nvSpPr>
         <p:spPr>
           <a:xfrm>
-            <a:off x="457200" y="3063240"/>
+            <a:off x="457200" y="3035808"/>
             <a:ext cx="594360" cy="594360"/>
           </a:xfrm>
           <a:prstGeom prst="rect">
@@ -11086,8 +10495,8 @@
         </p:nvSpPr>
         <p:spPr>
           <a:xfrm>
-            <a:off x="457200" y="3118104"/>
-            <a:ext cx="594360" cy="502920"/>
+            <a:off x="457200" y="3099816"/>
+            <a:ext cx="594360" cy="475488"/>
           </a:xfrm>
           <a:prstGeom prst="rect">
             <a:avLst/>
@@ -11100,17 +10509,13 @@
           </a:bodyPr>
           <a:lstStyle/>
           <a:p>
-            <a:pPr algn="ctr">
-              <a:spcAft>
-                <a:spcPts val="0"/>
-              </a:spcAft>
-            </a:pPr>
+            <a:pPr algn="ctr"/>
             <a:r>
               <a:rPr sz="1800" b="1" i="0">
                 <a:solidFill>
                   <a:srgbClr val="FFBF00"/>
                 </a:solidFill>
-                <a:latin typeface="Calibri"/>
+                <a:latin typeface="Times New Roman"/>
               </a:rPr>
               <a:t>03</a:t>
             </a:r>
@@ -11125,8 +10530,8 @@
         </p:nvSpPr>
         <p:spPr>
           <a:xfrm>
-            <a:off x="1188720" y="3063240"/>
-            <a:ext cx="9144000" cy="365760"/>
+            <a:off x="1188720" y="3035808"/>
+            <a:ext cx="9144000" cy="347472"/>
           </a:xfrm>
           <a:prstGeom prst="rect">
             <a:avLst/>
@@ -11139,19 +10544,15 @@
           </a:bodyPr>
           <a:lstStyle/>
           <a:p>
-            <a:pPr algn="l">
-              <a:spcAft>
-                <a:spcPts val="0"/>
-              </a:spcAft>
-            </a:pPr>
+            <a:pPr algn="l"/>
             <a:r>
               <a:rPr sz="1700" b="1" i="0">
                 <a:solidFill>
                   <a:srgbClr val="1F4E79"/>
                 </a:solidFill>
-                <a:latin typeface="Calibri"/>
+                <a:latin typeface="Times New Roman"/>
               </a:rPr>
-              <a:t>Phân Tích Sơ Bộ</a:t>
+              <a:t>Phan Tich So Bo</a:t>
             </a:r>
           </a:p>
         </p:txBody>
@@ -11164,8 +10565,8 @@
         </p:nvSpPr>
         <p:spPr>
           <a:xfrm>
-            <a:off x="1188720" y="3410712"/>
-            <a:ext cx="9144000" cy="274320"/>
+            <a:off x="1188720" y="3383280"/>
+            <a:ext cx="9144000" cy="256032"/>
           </a:xfrm>
           <a:prstGeom prst="rect">
             <a:avLst/>
@@ -11178,19 +10579,15 @@
           </a:bodyPr>
           <a:lstStyle/>
           <a:p>
-            <a:pPr algn="l">
-              <a:spcAft>
-                <a:spcPts val="0"/>
-              </a:spcAft>
-            </a:pPr>
+            <a:pPr algn="l"/>
             <a:r>
               <a:rPr sz="1200" b="0" i="0">
                 <a:solidFill>
                   <a:srgbClr val="555555"/>
                 </a:solidFill>
-                <a:latin typeface="Calibri"/>
+                <a:latin typeface="Times New Roman"/>
               </a:rPr>
-              <a:t>STL decomposition, ADF/KPSS, ACF/PACF, transformations</a:t>
+              <a:t>STL, ADF/KPSS, ACF/PACF, transformations</a:t>
             </a:r>
           </a:p>
         </p:txBody>
@@ -11203,7 +10600,7 @@
         </p:nvSpPr>
         <p:spPr>
           <a:xfrm>
-            <a:off x="1188720" y="3703320"/>
+            <a:off x="1188720" y="3675888"/>
             <a:ext cx="10241280" cy="6350"/>
           </a:xfrm>
           <a:prstGeom prst="rect">
@@ -11246,7 +10643,7 @@
         </p:nvSpPr>
         <p:spPr>
           <a:xfrm>
-            <a:off x="457200" y="3931920"/>
+            <a:off x="457200" y="3904488"/>
             <a:ext cx="594360" cy="594360"/>
           </a:xfrm>
           <a:prstGeom prst="rect">
@@ -11289,8 +10686,8 @@
         </p:nvSpPr>
         <p:spPr>
           <a:xfrm>
-            <a:off x="457200" y="3986784"/>
-            <a:ext cx="594360" cy="502920"/>
+            <a:off x="457200" y="3968496"/>
+            <a:ext cx="594360" cy="475488"/>
           </a:xfrm>
           <a:prstGeom prst="rect">
             <a:avLst/>
@@ -11303,17 +10700,13 @@
           </a:bodyPr>
           <a:lstStyle/>
           <a:p>
-            <a:pPr algn="ctr">
-              <a:spcAft>
-                <a:spcPts val="0"/>
-              </a:spcAft>
-            </a:pPr>
+            <a:pPr algn="ctr"/>
             <a:r>
               <a:rPr sz="1800" b="1" i="0">
                 <a:solidFill>
                   <a:srgbClr val="FFBF00"/>
                 </a:solidFill>
-                <a:latin typeface="Calibri"/>
+                <a:latin typeface="Times New Roman"/>
               </a:rPr>
               <a:t>04</a:t>
             </a:r>
@@ -11328,8 +10721,8 @@
         </p:nvSpPr>
         <p:spPr>
           <a:xfrm>
-            <a:off x="1188720" y="3931920"/>
-            <a:ext cx="9144000" cy="365760"/>
+            <a:off x="1188720" y="3904488"/>
+            <a:ext cx="9144000" cy="347472"/>
           </a:xfrm>
           <a:prstGeom prst="rect">
             <a:avLst/>
@@ -11342,19 +10735,15 @@
           </a:bodyPr>
           <a:lstStyle/>
           <a:p>
-            <a:pPr algn="l">
-              <a:spcAft>
-                <a:spcPts val="0"/>
-              </a:spcAft>
-            </a:pPr>
+            <a:pPr algn="l"/>
             <a:r>
               <a:rPr sz="1700" b="1" i="0">
                 <a:solidFill>
                   <a:srgbClr val="1F4E79"/>
                 </a:solidFill>
-                <a:latin typeface="Calibri"/>
+                <a:latin typeface="Times New Roman"/>
               </a:rPr>
-              <a:t>Xây Dựng Mô Hình</a:t>
+              <a:t>Xay Dung Mo Hinh</a:t>
             </a:r>
           </a:p>
         </p:txBody>
@@ -11367,8 +10756,8 @@
         </p:nvSpPr>
         <p:spPr>
           <a:xfrm>
-            <a:off x="1188720" y="4279392"/>
-            <a:ext cx="9144000" cy="274320"/>
+            <a:off x="1188720" y="4251960"/>
+            <a:ext cx="9144000" cy="256032"/>
           </a:xfrm>
           <a:prstGeom prst="rect">
             <a:avLst/>
@@ -11381,19 +10770,15 @@
           </a:bodyPr>
           <a:lstStyle/>
           <a:p>
-            <a:pPr algn="l">
-              <a:spcAft>
-                <a:spcPts val="0"/>
-              </a:spcAft>
-            </a:pPr>
+            <a:pPr algn="l"/>
             <a:r>
               <a:rPr sz="1200" b="0" i="0">
                 <a:solidFill>
                   <a:srgbClr val="555555"/>
                 </a:solidFill>
-                <a:latin typeface="Calibri"/>
+                <a:latin typeface="Times New Roman"/>
               </a:rPr>
-              <a:t>SARIMA(1,1,1)(0,1,1)[7] → SARIMAX, residual diagnostics, forecast</a:t>
+              <a:t>SARIMA(1,1,1)(0,1,1)[7], SARIMAX, residuals, forecast</a:t>
             </a:r>
           </a:p>
         </p:txBody>
@@ -11406,7 +10791,7 @@
         </p:nvSpPr>
         <p:spPr>
           <a:xfrm>
-            <a:off x="1188720" y="4572000"/>
+            <a:off x="1188720" y="4544568"/>
             <a:ext cx="10241280" cy="6350"/>
           </a:xfrm>
           <a:prstGeom prst="rect">
@@ -11449,7 +10834,7 @@
         </p:nvSpPr>
         <p:spPr>
           <a:xfrm>
-            <a:off x="457200" y="4800600"/>
+            <a:off x="457200" y="4773168"/>
             <a:ext cx="594360" cy="594360"/>
           </a:xfrm>
           <a:prstGeom prst="rect">
@@ -11492,8 +10877,8 @@
         </p:nvSpPr>
         <p:spPr>
           <a:xfrm>
-            <a:off x="457200" y="4855464"/>
-            <a:ext cx="594360" cy="502920"/>
+            <a:off x="457200" y="4837176"/>
+            <a:ext cx="594360" cy="475488"/>
           </a:xfrm>
           <a:prstGeom prst="rect">
             <a:avLst/>
@@ -11506,17 +10891,13 @@
           </a:bodyPr>
           <a:lstStyle/>
           <a:p>
-            <a:pPr algn="ctr">
-              <a:spcAft>
-                <a:spcPts val="0"/>
-              </a:spcAft>
-            </a:pPr>
+            <a:pPr algn="ctr"/>
             <a:r>
               <a:rPr sz="1800" b="1" i="0">
                 <a:solidFill>
                   <a:srgbClr val="FFBF00"/>
                 </a:solidFill>
-                <a:latin typeface="Calibri"/>
+                <a:latin typeface="Times New Roman"/>
               </a:rPr>
               <a:t>05</a:t>
             </a:r>
@@ -11531,8 +10912,8 @@
         </p:nvSpPr>
         <p:spPr>
           <a:xfrm>
-            <a:off x="1188720" y="4800600"/>
-            <a:ext cx="9144000" cy="365760"/>
+            <a:off x="1188720" y="4773168"/>
+            <a:ext cx="9144000" cy="347472"/>
           </a:xfrm>
           <a:prstGeom prst="rect">
             <a:avLst/>
@@ -11545,19 +10926,15 @@
           </a:bodyPr>
           <a:lstStyle/>
           <a:p>
-            <a:pPr algn="l">
-              <a:spcAft>
-                <a:spcPts val="0"/>
-              </a:spcAft>
-            </a:pPr>
+            <a:pPr algn="l"/>
             <a:r>
               <a:rPr sz="1700" b="1" i="0">
                 <a:solidFill>
                   <a:srgbClr val="1F4E79"/>
                 </a:solidFill>
-                <a:latin typeface="Calibri"/>
+                <a:latin typeface="Times New Roman"/>
               </a:rPr>
-              <a:t>Phân Công &amp; Kế Hoạch</a:t>
+              <a:t>Phan Cong &amp; Ke Hoach</a:t>
             </a:r>
           </a:p>
         </p:txBody>
@@ -11570,8 +10947,8 @@
         </p:nvSpPr>
         <p:spPr>
           <a:xfrm>
-            <a:off x="1188720" y="5148072"/>
-            <a:ext cx="9144000" cy="274320"/>
+            <a:off x="1188720" y="5120640"/>
+            <a:ext cx="9144000" cy="256032"/>
           </a:xfrm>
           <a:prstGeom prst="rect">
             <a:avLst/>
@@ -11584,19 +10961,15 @@
           </a:bodyPr>
           <a:lstStyle/>
           <a:p>
-            <a:pPr algn="l">
-              <a:spcAft>
-                <a:spcPts val="0"/>
-              </a:spcAft>
-            </a:pPr>
+            <a:pPr algn="l"/>
             <a:r>
               <a:rPr sz="1200" b="0" i="0">
                 <a:solidFill>
                   <a:srgbClr val="555555"/>
                 </a:solidFill>
-                <a:latin typeface="Calibri"/>
+                <a:latin typeface="Times New Roman"/>
               </a:rPr>
-              <a:t>Timeline tuần 6–8, công việc còn lại</a:t>
+              <a:t>Timeline tuan 6-8, cong viec con lai</a:t>
             </a:r>
           </a:p>
         </p:txBody>
@@ -11609,7 +10982,7 @@
         </p:nvSpPr>
         <p:spPr>
           <a:xfrm>
-            <a:off x="1188720" y="5440680"/>
+            <a:off x="1188720" y="5413248"/>
             <a:ext cx="10241280" cy="6350"/>
           </a:xfrm>
           <a:prstGeom prst="rect">
@@ -11671,49 +11044,6 @@
         <p:spPr>
           <a:xfrm>
             <a:off x="0" y="0"/>
-            <a:ext cx="12188952" cy="6858000"/>
-          </a:xfrm>
-          <a:prstGeom prst="rect">
-            <a:avLst/>
-          </a:prstGeom>
-          <a:solidFill>
-            <a:srgbClr val="FFFFFF"/>
-          </a:solidFill>
-          <a:ln>
-            <a:noFill/>
-          </a:ln>
-        </p:spPr>
-        <p:style>
-          <a:lnRef idx="1">
-            <a:schemeClr val="accent1"/>
-          </a:lnRef>
-          <a:fillRef idx="3">
-            <a:schemeClr val="accent1"/>
-          </a:fillRef>
-          <a:effectRef idx="2">
-            <a:schemeClr val="accent1"/>
-          </a:effectRef>
-          <a:fontRef idx="minor">
-            <a:schemeClr val="lt1"/>
-          </a:fontRef>
-        </p:style>
-        <p:txBody>
-          <a:bodyPr rtlCol="0" anchor="ctr"/>
-          <a:lstStyle/>
-          <a:p>
-            <a:pPr algn="ctr"/>
-          </a:p>
-        </p:txBody>
-      </p:sp>
-      <p:sp>
-        <p:nvSpPr>
-          <p:cNvPr id="3" name="Rectangle 2"/>
-          <p:cNvSpPr/>
-          <p:nvPr/>
-        </p:nvSpPr>
-        <p:spPr>
-          <a:xfrm>
-            <a:off x="0" y="0"/>
             <a:ext cx="12188952" cy="1005840"/>
           </a:xfrm>
           <a:prstGeom prst="rect">
@@ -11750,7 +11080,7 @@
       </p:sp>
       <p:sp>
         <p:nvSpPr>
-          <p:cNvPr id="4" name="Rectangle 3"/>
+          <p:cNvPr id="3" name="Rectangle 2"/>
           <p:cNvSpPr/>
           <p:nvPr/>
         </p:nvSpPr>
@@ -11793,7 +11123,7 @@
       </p:sp>
       <p:sp>
         <p:nvSpPr>
-          <p:cNvPr id="5" name="TextBox 4"/>
+          <p:cNvPr id="4" name="TextBox 3"/>
           <p:cNvSpPr txBox="1"/>
           <p:nvPr/>
         </p:nvSpPr>
@@ -11813,17 +11143,13 @@
           </a:bodyPr>
           <a:lstStyle/>
           <a:p>
-            <a:pPr algn="l">
-              <a:spcAft>
-                <a:spcPts val="0"/>
-              </a:spcAft>
-            </a:pPr>
+            <a:pPr algn="l"/>
             <a:r>
               <a:rPr sz="2700" b="1" i="0">
                 <a:solidFill>
                   <a:srgbClr val="FFFFFF"/>
                 </a:solidFill>
-                <a:latin typeface="Calibri"/>
+                <a:latin typeface="Times New Roman"/>
               </a:rPr>
               <a:t>Problem Statement &amp; Motivation</a:t>
             </a:r>
@@ -11832,14 +11158,14 @@
       </p:sp>
       <p:sp>
         <p:nvSpPr>
-          <p:cNvPr id="6" name="TextBox 5"/>
+          <p:cNvPr id="5" name="TextBox 4"/>
           <p:cNvSpPr txBox="1"/>
           <p:nvPr/>
         </p:nvSpPr>
         <p:spPr>
           <a:xfrm>
             <a:off x="365760" y="640080"/>
-            <a:ext cx="10972800" cy="347472"/>
+            <a:ext cx="10972800" cy="329184"/>
           </a:xfrm>
           <a:prstGeom prst="rect">
             <a:avLst/>
@@ -11852,26 +11178,22 @@
           </a:bodyPr>
           <a:lstStyle/>
           <a:p>
-            <a:pPr algn="l">
-              <a:spcAft>
-                <a:spcPts val="0"/>
-              </a:spcAft>
-            </a:pPr>
+            <a:pPr algn="l"/>
             <a:r>
               <a:rPr sz="1300" b="0" i="0">
                 <a:solidFill>
                   <a:srgbClr val="BDD7EE"/>
                 </a:solidFill>
-                <a:latin typeface="Calibri"/>
+                <a:latin typeface="Times New Roman"/>
               </a:rPr>
-              <a:t>Câu hỏi nghiên cứu và bối cảnh thực tiễn</a:t>
-            </a:r>
-          </a:p>
-        </p:txBody>
-      </p:sp>
-      <p:sp>
-        <p:nvSpPr>
-          <p:cNvPr id="7" name="Rectangle 6"/>
+              <a:t>Cau hoi nghien cuu va boi canh thuc tien</a:t>
+            </a:r>
+          </a:p>
+        </p:txBody>
+      </p:sp>
+      <p:sp>
+        <p:nvSpPr>
+          <p:cNvPr id="6" name="Rectangle 5"/>
           <p:cNvSpPr/>
           <p:nvPr/>
         </p:nvSpPr>
@@ -11914,7 +11236,7 @@
       </p:sp>
       <p:sp>
         <p:nvSpPr>
-          <p:cNvPr id="8" name="TextBox 7"/>
+          <p:cNvPr id="7" name="TextBox 6"/>
           <p:cNvSpPr txBox="1"/>
           <p:nvPr/>
         </p:nvSpPr>
@@ -11934,17 +11256,13 @@
           </a:bodyPr>
           <a:lstStyle/>
           <a:p>
-            <a:pPr algn="l">
-              <a:spcAft>
-                <a:spcPts val="0"/>
-              </a:spcAft>
-            </a:pPr>
+            <a:pPr algn="l"/>
             <a:r>
               <a:rPr sz="900" b="0" i="0">
                 <a:solidFill>
                   <a:srgbClr val="BDD7EE"/>
                 </a:solidFill>
-                <a:latin typeface="Calibri"/>
+                <a:latin typeface="Times New Roman"/>
               </a:rPr>
               <a:t>FreshRetailNet-50K  |  Week 5 Milestone  |  Time Series &amp; Forecasting</a:t>
             </a:r>
@@ -11953,7 +11271,7 @@
       </p:sp>
       <p:sp>
         <p:nvSpPr>
-          <p:cNvPr id="9" name="TextBox 8"/>
+          <p:cNvPr id="8" name="TextBox 7"/>
           <p:cNvSpPr txBox="1"/>
           <p:nvPr/>
         </p:nvSpPr>
@@ -11973,17 +11291,13 @@
           </a:bodyPr>
           <a:lstStyle/>
           <a:p>
-            <a:pPr algn="r">
-              <a:spcAft>
-                <a:spcPts val="0"/>
-              </a:spcAft>
-            </a:pPr>
+            <a:pPr algn="r"/>
             <a:r>
               <a:rPr sz="900" b="1" i="0">
                 <a:solidFill>
                   <a:srgbClr val="FFFFFF"/>
                 </a:solidFill>
-                <a:latin typeface="Calibri"/>
+                <a:latin typeface="Times New Roman"/>
               </a:rPr>
               <a:t>3 / 14</a:t>
             </a:r>
@@ -11992,7 +11306,7 @@
       </p:sp>
       <p:sp>
         <p:nvSpPr>
-          <p:cNvPr id="10" name="Rectangle 9"/>
+          <p:cNvPr id="9" name="Rectangle 8"/>
           <p:cNvSpPr/>
           <p:nvPr/>
         </p:nvSpPr>
@@ -12035,14 +11349,14 @@
       </p:sp>
       <p:sp>
         <p:nvSpPr>
-          <p:cNvPr id="11" name="Rectangle 10"/>
+          <p:cNvPr id="10" name="Rectangle 9"/>
           <p:cNvSpPr/>
           <p:nvPr/>
         </p:nvSpPr>
         <p:spPr>
           <a:xfrm>
             <a:off x="365760" y="1143000"/>
-            <a:ext cx="54864" cy="960120"/>
+            <a:ext cx="64008" cy="960120"/>
           </a:xfrm>
           <a:prstGeom prst="rect">
             <a:avLst/>
@@ -12078,14 +11392,14 @@
       </p:sp>
       <p:sp>
         <p:nvSpPr>
-          <p:cNvPr id="12" name="TextBox 11"/>
+          <p:cNvPr id="11" name="TextBox 10"/>
           <p:cNvSpPr txBox="1"/>
           <p:nvPr/>
         </p:nvSpPr>
         <p:spPr>
           <a:xfrm>
             <a:off x="548640" y="1188720"/>
-            <a:ext cx="10972800" cy="347472"/>
+            <a:ext cx="10972800" cy="320040"/>
           </a:xfrm>
           <a:prstGeom prst="rect">
             <a:avLst/>
@@ -12098,33 +11412,29 @@
           </a:bodyPr>
           <a:lstStyle/>
           <a:p>
-            <a:pPr algn="l">
-              <a:spcAft>
-                <a:spcPts val="0"/>
-              </a:spcAft>
-            </a:pPr>
+            <a:pPr algn="l"/>
             <a:r>
               <a:rPr sz="1300" b="1" i="0">
                 <a:solidFill>
                   <a:srgbClr val="2E75B6"/>
                 </a:solidFill>
-                <a:latin typeface="Calibri"/>
+                <a:latin typeface="Times New Roman"/>
               </a:rPr>
-              <a:t>🔍  Câu hỏi nghiên cứu</a:t>
-            </a:r>
-          </a:p>
-        </p:txBody>
-      </p:sp>
-      <p:sp>
-        <p:nvSpPr>
-          <p:cNvPr id="13" name="TextBox 12"/>
+              <a:t>Cau hoi nghien cuu:</a:t>
+            </a:r>
+          </a:p>
+        </p:txBody>
+      </p:sp>
+      <p:sp>
+        <p:nvSpPr>
+          <p:cNvPr id="12" name="TextBox 11"/>
           <p:cNvSpPr txBox="1"/>
           <p:nvPr/>
         </p:nvSpPr>
         <p:spPr>
           <a:xfrm>
-            <a:off x="548640" y="1527048"/>
-            <a:ext cx="11064240" cy="502920"/>
+            <a:off x="548640" y="1490472"/>
+            <a:ext cx="11064240" cy="548640"/>
           </a:xfrm>
           <a:prstGeom prst="rect">
             <a:avLst/>
@@ -12137,33 +11447,29 @@
           </a:bodyPr>
           <a:lstStyle/>
           <a:p>
-            <a:pPr algn="l">
-              <a:spcAft>
-                <a:spcPts val="0"/>
-              </a:spcAft>
-            </a:pPr>
+            <a:pPr algn="l"/>
             <a:r>
               <a:rPr sz="1300" b="0" i="1">
                 <a:solidFill>
                   <a:srgbClr val="1A1A1A"/>
                 </a:solidFill>
-                <a:latin typeface="Calibri"/>
+                <a:latin typeface="Times New Roman"/>
               </a:rPr>
-              <a:t>Liệu mô hình SARIMA/SARIMAX với chu kỳ tuần (s = 7) có thể nắm bắt đầy đủ cấu trúc thời gian của chuỗi doanh số thực phẩm tươi tổng hợp, và covariate nào (thời tiết, khuyến mãi, lễ) cải thiện độ chính xác dự báo?</a:t>
-            </a:r>
-          </a:p>
-        </p:txBody>
-      </p:sp>
-      <p:sp>
-        <p:nvSpPr>
-          <p:cNvPr id="14" name="Rectangle 13"/>
+              <a:t>Lieu mo hinh SARIMA/SARIMAX voi chu ky tuan (s=7) co the nam bat day du cau truc thoi gian cua chuoi doanh so thuc pham tuoi, va covariate nao (thoi tiet, khuyen mai, le) cai thien do chinh xac du bao?</a:t>
+            </a:r>
+          </a:p>
+        </p:txBody>
+      </p:sp>
+      <p:sp>
+        <p:nvSpPr>
+          <p:cNvPr id="13" name="Rectangle 12"/>
           <p:cNvSpPr/>
           <p:nvPr/>
         </p:nvSpPr>
         <p:spPr>
           <a:xfrm>
             <a:off x="365760" y="2286000"/>
-            <a:ext cx="2743200" cy="320040"/>
+            <a:ext cx="2926080" cy="320040"/>
           </a:xfrm>
           <a:prstGeom prst="rect">
             <a:avLst/>
@@ -12199,14 +11505,14 @@
       </p:sp>
       <p:sp>
         <p:nvSpPr>
-          <p:cNvPr id="15" name="TextBox 14"/>
+          <p:cNvPr id="14" name="TextBox 13"/>
           <p:cNvSpPr txBox="1"/>
           <p:nvPr/>
         </p:nvSpPr>
         <p:spPr>
           <a:xfrm>
             <a:off x="438912" y="2311400"/>
-            <a:ext cx="2651760" cy="320040"/>
+            <a:ext cx="2834640" cy="320040"/>
           </a:xfrm>
           <a:prstGeom prst="rect">
             <a:avLst/>
@@ -12219,26 +11525,22 @@
           </a:bodyPr>
           <a:lstStyle/>
           <a:p>
-            <a:pPr algn="l">
-              <a:spcAft>
-                <a:spcPts val="0"/>
-              </a:spcAft>
-            </a:pPr>
+            <a:pPr algn="l"/>
             <a:r>
               <a:rPr sz="1200" b="1" i="0">
                 <a:solidFill>
                   <a:srgbClr val="FFFFFF"/>
                 </a:solidFill>
-                <a:latin typeface="Calibri"/>
+                <a:latin typeface="Times New Roman"/>
               </a:rPr>
-              <a:t>⚠  Tại sao quan trọng?</a:t>
-            </a:r>
-          </a:p>
-        </p:txBody>
-      </p:sp>
-      <p:sp>
-        <p:nvSpPr>
-          <p:cNvPr id="16" name="TextBox 15"/>
+              <a:t>Tai sao quan trong?</a:t>
+            </a:r>
+          </a:p>
+        </p:txBody>
+      </p:sp>
+      <p:sp>
+        <p:nvSpPr>
+          <p:cNvPr id="15" name="TextBox 14"/>
           <p:cNvSpPr txBox="1"/>
           <p:nvPr/>
         </p:nvSpPr>
@@ -12268,9 +11570,9 @@
                 <a:solidFill>
                   <a:srgbClr val="1A1A1A"/>
                 </a:solidFill>
-                <a:latin typeface="Calibri"/>
+                <a:latin typeface="Times New Roman"/>
               </a:rPr>
-              <a:t>▸  Thực phẩm tươi: shelf life 1–3 ngày</a:t>
+              <a:t>Thuc pham tuoi: shelf life 1-3 ngay</a:t>
             </a:r>
           </a:p>
           <a:p>
@@ -12284,9 +11586,9 @@
                 <a:solidFill>
                   <a:srgbClr val="1A1A1A"/>
                 </a:solidFill>
-                <a:latin typeface="Calibri"/>
+                <a:latin typeface="Times New Roman"/>
               </a:rPr>
-              <a:t>▸  Over-stock → hỏng hàng, lãng phí thực phẩm</a:t>
+              <a:t>Over-stock: hong hang, lang phi thuc pham</a:t>
             </a:r>
           </a:p>
           <a:p>
@@ -12300,9 +11602,9 @@
                 <a:solidFill>
                   <a:srgbClr val="1A1A1A"/>
                 </a:solidFill>
-                <a:latin typeface="Calibri"/>
+                <a:latin typeface="Times New Roman"/>
               </a:rPr>
-              <a:t>▸  Under-stock → hết hàng, mất doanh thu</a:t>
+              <a:t>Under-stock: het hang, mat doanh thu</a:t>
             </a:r>
           </a:p>
           <a:p>
@@ -12316,23 +11618,23 @@
                 <a:solidFill>
                   <a:srgbClr val="1A1A1A"/>
                 </a:solidFill>
-                <a:latin typeface="Calibri"/>
+                <a:latin typeface="Times New Roman"/>
               </a:rPr>
-              <a:t>▸  Dự báo chính xác = giảm thiệt hại kép</a:t>
-            </a:r>
-          </a:p>
-        </p:txBody>
-      </p:sp>
-      <p:sp>
-        <p:nvSpPr>
-          <p:cNvPr id="17" name="Rectangle 16"/>
+              <a:t>Du bao chinh xac = giam thiet hai kep</a:t>
+            </a:r>
+          </a:p>
+        </p:txBody>
+      </p:sp>
+      <p:sp>
+        <p:nvSpPr>
+          <p:cNvPr id="16" name="Rectangle 15"/>
           <p:cNvSpPr/>
           <p:nvPr/>
         </p:nvSpPr>
         <p:spPr>
           <a:xfrm>
             <a:off x="6126480" y="2286000"/>
-            <a:ext cx="5669280" cy="3657600"/>
+            <a:ext cx="5669280" cy="3749039"/>
           </a:xfrm>
           <a:prstGeom prst="rect">
             <a:avLst/>
@@ -12368,7 +11670,7 @@
       </p:sp>
       <p:sp>
         <p:nvSpPr>
-          <p:cNvPr id="18" name="Rectangle 17"/>
+          <p:cNvPr id="17" name="Rectangle 16"/>
           <p:cNvSpPr/>
           <p:nvPr/>
         </p:nvSpPr>
@@ -12411,7 +11713,7 @@
       </p:sp>
       <p:sp>
         <p:nvSpPr>
-          <p:cNvPr id="19" name="TextBox 18"/>
+          <p:cNvPr id="18" name="TextBox 17"/>
           <p:cNvSpPr txBox="1"/>
           <p:nvPr/>
         </p:nvSpPr>
@@ -12431,33 +11733,29 @@
           </a:bodyPr>
           <a:lstStyle/>
           <a:p>
-            <a:pPr algn="l">
-              <a:spcAft>
-                <a:spcPts val="0"/>
-              </a:spcAft>
-            </a:pPr>
+            <a:pPr algn="l"/>
             <a:r>
               <a:rPr sz="1200" b="1" i="0">
                 <a:solidFill>
                   <a:srgbClr val="FFFFFF"/>
                 </a:solidFill>
-                <a:latin typeface="Calibri"/>
+                <a:latin typeface="Times New Roman"/>
               </a:rPr>
-              <a:t>📌  Censored Demand — Thách thức chính</a:t>
-            </a:r>
-          </a:p>
-        </p:txBody>
-      </p:sp>
-      <p:sp>
-        <p:nvSpPr>
-          <p:cNvPr id="20" name="TextBox 19"/>
+              <a:t>Censored Demand — Thach thuc chinh</a:t>
+            </a:r>
+          </a:p>
+        </p:txBody>
+      </p:sp>
+      <p:sp>
+        <p:nvSpPr>
+          <p:cNvPr id="19" name="TextBox 18"/>
           <p:cNvSpPr txBox="1"/>
           <p:nvPr/>
         </p:nvSpPr>
         <p:spPr>
           <a:xfrm>
-            <a:off x="6217920" y="2697480"/>
-            <a:ext cx="5394960" cy="3108960"/>
+            <a:off x="6263640" y="2697480"/>
+            <a:ext cx="5394960" cy="329184"/>
           </a:xfrm>
           <a:prstGeom prst="rect">
             <a:avLst/>
@@ -12470,131 +11768,137 @@
           </a:bodyPr>
           <a:lstStyle/>
           <a:p>
-            <a:pPr algn="l">
-              <a:spcAft>
-                <a:spcPts val="500"/>
-              </a:spcAft>
-            </a:pPr>
-            <a:r>
-              <a:rPr sz="1300" b="0">
+            <a:pPr algn="l"/>
+            <a:r>
+              <a:rPr sz="1300" b="0" i="0">
                 <a:solidFill>
                   <a:srgbClr val="1A1A1A"/>
                 </a:solidFill>
-                <a:latin typeface="Calibri"/>
+                <a:latin typeface="Times New Roman"/>
               </a:rPr>
-              <a:t>Khi hàng hết trong ngày (stockout),</a:t>
-            </a:r>
-          </a:p>
-          <a:p>
-            <a:pPr algn="l">
-              <a:spcAft>
-                <a:spcPts val="500"/>
-              </a:spcAft>
-            </a:pPr>
-            <a:r>
-              <a:rPr sz="1400" b="1">
+              <a:t>Khi hang het trong ngay (stockout):</a:t>
+            </a:r>
+          </a:p>
+        </p:txBody>
+      </p:sp>
+      <p:sp>
+        <p:nvSpPr>
+          <p:cNvPr id="20" name="TextBox 19"/>
+          <p:cNvSpPr txBox="1"/>
+          <p:nvPr/>
+        </p:nvSpPr>
+        <p:spPr>
+          <a:xfrm>
+            <a:off x="6263640" y="2999232"/>
+            <a:ext cx="5394960" cy="329184"/>
+          </a:xfrm>
+          <a:prstGeom prst="rect">
+            <a:avLst/>
+          </a:prstGeom>
+          <a:noFill/>
+        </p:spPr>
+        <p:txBody>
+          <a:bodyPr wrap="square">
+            <a:spAutoFit/>
+          </a:bodyPr>
+          <a:lstStyle/>
+          <a:p>
+            <a:pPr algn="l"/>
+            <a:r>
+              <a:rPr sz="1400" b="1" i="0">
                 <a:solidFill>
                   <a:srgbClr val="C0392B"/>
                 </a:solidFill>
-                <a:latin typeface="Calibri"/>
+                <a:latin typeface="Times New Roman"/>
               </a:rPr>
-              <a:t>doanh số ghi nhận  &lt;  nhu cầu thực tế.</a:t>
-            </a:r>
-          </a:p>
-          <a:p>
-            <a:pPr algn="l">
+              <a:t>doanh so ghi nhan  &lt;  nhu cau thuc te</a:t>
+            </a:r>
+          </a:p>
+        </p:txBody>
+      </p:sp>
+      <p:sp>
+        <p:nvSpPr>
+          <p:cNvPr id="21" name="TextBox 20"/>
+          <p:cNvSpPr txBox="1"/>
+          <p:nvPr/>
+        </p:nvSpPr>
+        <p:spPr>
+          <a:xfrm>
+            <a:off x="6263640" y="3383280"/>
+            <a:ext cx="5349240" cy="2560320"/>
+          </a:xfrm>
+          <a:prstGeom prst="rect">
+            <a:avLst/>
+          </a:prstGeom>
+          <a:noFill/>
+        </p:spPr>
+        <p:txBody>
+          <a:bodyPr wrap="square">
+            <a:spAutoFit/>
+          </a:bodyPr>
+          <a:lstStyle/>
+          <a:p>
+            <a:pPr>
               <a:spcAft>
-                <a:spcPts val="500"/>
+                <a:spcPts val="700"/>
               </a:spcAft>
             </a:pPr>
             <a:r>
-              <a:rPr sz="800" b="0">
-                <a:solidFill>
-                  <a:srgbClr val="FFFFFF"/>
-                </a:solidFill>
-                <a:latin typeface="Calibri"/>
-              </a:rPr>
-              <a:t/>
-            </a:r>
-          </a:p>
-          <a:p>
-            <a:pPr algn="l">
-              <a:spcAft>
-                <a:spcPts val="500"/>
-              </a:spcAft>
-            </a:pPr>
-            <a:r>
-              <a:rPr sz="1300" b="0">
+              <a:rPr sz="1300">
                 <a:solidFill>
                   <a:srgbClr val="1A1A1A"/>
                 </a:solidFill>
-                <a:latin typeface="Calibri"/>
+                <a:latin typeface="Times New Roman"/>
               </a:rPr>
-              <a:t>▸  ~65% quan sát có dấu hiệu stockout</a:t>
-            </a:r>
-          </a:p>
-          <a:p>
-            <a:pPr algn="l">
+              <a:t>~65% quan sat SKU-ngay co dau hieu stockout</a:t>
+            </a:r>
+          </a:p>
+          <a:p>
+            <a:pPr>
               <a:spcAft>
-                <a:spcPts val="500"/>
+                <a:spcPts val="700"/>
               </a:spcAft>
             </a:pPr>
             <a:r>
-              <a:rPr sz="1300" b="0">
+              <a:rPr sz="1300">
                 <a:solidFill>
                   <a:srgbClr val="1A1A1A"/>
                 </a:solidFill>
-                <a:latin typeface="Calibri"/>
+                <a:latin typeface="Times New Roman"/>
               </a:rPr>
-              <a:t>▸  Forecast từ SARIMA = cận dưới nhu cầu</a:t>
-            </a:r>
-          </a:p>
-          <a:p>
-            <a:pPr algn="l">
+              <a:t>Forecast tu SARIMA = can duoi nhu cau</a:t>
+            </a:r>
+          </a:p>
+          <a:p>
+            <a:pPr>
               <a:spcAft>
-                <a:spcPts val="500"/>
+                <a:spcPts val="700"/>
               </a:spcAft>
             </a:pPr>
             <a:r>
-              <a:rPr sz="1300" b="0">
+              <a:rPr sz="1300">
                 <a:solidFill>
-                  <a:srgbClr val="555555"/>
+                  <a:srgbClr val="1A1A1A"/>
                 </a:solidFill>
-                <a:latin typeface="Calibri"/>
+                <a:latin typeface="Times New Roman"/>
               </a:rPr>
-              <a:t>▸  Cần Tobit-correction ở tuần tiếp theo</a:t>
-            </a:r>
-          </a:p>
-          <a:p>
-            <a:pPr algn="l">
+              <a:t>Can Tobit-correction o tuan tiep theo</a:t>
+            </a:r>
+          </a:p>
+          <a:p>
+            <a:pPr>
               <a:spcAft>
-                <a:spcPts val="500"/>
+                <a:spcPts val="700"/>
               </a:spcAft>
             </a:pPr>
             <a:r>
-              <a:rPr sz="800" b="0">
+              <a:rPr sz="1300">
                 <a:solidFill>
-                  <a:srgbClr val="FFFFFF"/>
+                  <a:srgbClr val="1A1A1A"/>
                 </a:solidFill>
-                <a:latin typeface="Calibri"/>
+                <a:latin typeface="Times New Roman"/>
               </a:rPr>
-              <a:t/>
-            </a:r>
-          </a:p>
-          <a:p>
-            <a:pPr algn="l">
-              <a:spcAft>
-                <a:spcPts val="300"/>
-              </a:spcAft>
-            </a:pPr>
-            <a:r>
-              <a:rPr sz="1200" b="1">
-                <a:solidFill>
-                  <a:srgbClr val="2E75B6"/>
-                </a:solidFill>
-                <a:latin typeface="Calibri"/>
-              </a:rPr>
-              <a:t>stock_hour6_22_cnt &lt; 16  →  Stockout proxy</a:t>
+              <a:t>stock_hour6_22_cnt &lt; 16  -&gt;  Stockout proxy</a:t>
             </a:r>
           </a:p>
         </p:txBody>
@@ -12626,49 +11930,6 @@
         <p:spPr>
           <a:xfrm>
             <a:off x="0" y="0"/>
-            <a:ext cx="12188952" cy="6858000"/>
-          </a:xfrm>
-          <a:prstGeom prst="rect">
-            <a:avLst/>
-          </a:prstGeom>
-          <a:solidFill>
-            <a:srgbClr val="FFFFFF"/>
-          </a:solidFill>
-          <a:ln>
-            <a:noFill/>
-          </a:ln>
-        </p:spPr>
-        <p:style>
-          <a:lnRef idx="1">
-            <a:schemeClr val="accent1"/>
-          </a:lnRef>
-          <a:fillRef idx="3">
-            <a:schemeClr val="accent1"/>
-          </a:fillRef>
-          <a:effectRef idx="2">
-            <a:schemeClr val="accent1"/>
-          </a:effectRef>
-          <a:fontRef idx="minor">
-            <a:schemeClr val="lt1"/>
-          </a:fontRef>
-        </p:style>
-        <p:txBody>
-          <a:bodyPr rtlCol="0" anchor="ctr"/>
-          <a:lstStyle/>
-          <a:p>
-            <a:pPr algn="ctr"/>
-          </a:p>
-        </p:txBody>
-      </p:sp>
-      <p:sp>
-        <p:nvSpPr>
-          <p:cNvPr id="3" name="Rectangle 2"/>
-          <p:cNvSpPr/>
-          <p:nvPr/>
-        </p:nvSpPr>
-        <p:spPr>
-          <a:xfrm>
-            <a:off x="0" y="0"/>
             <a:ext cx="12188952" cy="1005840"/>
           </a:xfrm>
           <a:prstGeom prst="rect">
@@ -12705,7 +11966,7 @@
       </p:sp>
       <p:sp>
         <p:nvSpPr>
-          <p:cNvPr id="4" name="Rectangle 3"/>
+          <p:cNvPr id="3" name="Rectangle 2"/>
           <p:cNvSpPr/>
           <p:nvPr/>
         </p:nvSpPr>
@@ -12748,7 +12009,7 @@
       </p:sp>
       <p:sp>
         <p:nvSpPr>
-          <p:cNvPr id="5" name="TextBox 4"/>
+          <p:cNvPr id="4" name="TextBox 3"/>
           <p:cNvSpPr txBox="1"/>
           <p:nvPr/>
         </p:nvSpPr>
@@ -12768,33 +12029,29 @@
           </a:bodyPr>
           <a:lstStyle/>
           <a:p>
-            <a:pPr algn="l">
-              <a:spcAft>
-                <a:spcPts val="0"/>
-              </a:spcAft>
-            </a:pPr>
+            <a:pPr algn="l"/>
             <a:r>
               <a:rPr sz="2700" b="1" i="0">
                 <a:solidFill>
                   <a:srgbClr val="FFFFFF"/>
                 </a:solidFill>
-                <a:latin typeface="Calibri"/>
+                <a:latin typeface="Times New Roman"/>
               </a:rPr>
-              <a:t>Mô Tả Dữ Liệu</a:t>
-            </a:r>
-          </a:p>
-        </p:txBody>
-      </p:sp>
-      <p:sp>
-        <p:nvSpPr>
-          <p:cNvPr id="6" name="TextBox 5"/>
+              <a:t>Mo Ta Du Lieu</a:t>
+            </a:r>
+          </a:p>
+        </p:txBody>
+      </p:sp>
+      <p:sp>
+        <p:nvSpPr>
+          <p:cNvPr id="5" name="TextBox 4"/>
           <p:cNvSpPr txBox="1"/>
           <p:nvPr/>
         </p:nvSpPr>
         <p:spPr>
           <a:xfrm>
             <a:off x="365760" y="640080"/>
-            <a:ext cx="10972800" cy="347472"/>
+            <a:ext cx="10972800" cy="329184"/>
           </a:xfrm>
           <a:prstGeom prst="rect">
             <a:avLst/>
@@ -12807,17 +12064,13 @@
           </a:bodyPr>
           <a:lstStyle/>
           <a:p>
-            <a:pPr algn="l">
-              <a:spcAft>
-                <a:spcPts val="0"/>
-              </a:spcAft>
-            </a:pPr>
+            <a:pPr algn="l"/>
             <a:r>
               <a:rPr sz="1300" b="0" i="0">
                 <a:solidFill>
                   <a:srgbClr val="BDD7EE"/>
                 </a:solidFill>
-                <a:latin typeface="Calibri"/>
+                <a:latin typeface="Times New Roman"/>
               </a:rPr>
               <a:t>FreshRetailNet-50K — Dingdong Inc. | CC-BY-4.0 | ArXiv 2505.16319</a:t>
             </a:r>
@@ -12826,7 +12079,7 @@
       </p:sp>
       <p:sp>
         <p:nvSpPr>
-          <p:cNvPr id="7" name="Rectangle 6"/>
+          <p:cNvPr id="6" name="Rectangle 5"/>
           <p:cNvSpPr/>
           <p:nvPr/>
         </p:nvSpPr>
@@ -12869,7 +12122,7 @@
       </p:sp>
       <p:sp>
         <p:nvSpPr>
-          <p:cNvPr id="8" name="TextBox 7"/>
+          <p:cNvPr id="7" name="TextBox 6"/>
           <p:cNvSpPr txBox="1"/>
           <p:nvPr/>
         </p:nvSpPr>
@@ -12889,17 +12142,13 @@
           </a:bodyPr>
           <a:lstStyle/>
           <a:p>
-            <a:pPr algn="l">
-              <a:spcAft>
-                <a:spcPts val="0"/>
-              </a:spcAft>
-            </a:pPr>
+            <a:pPr algn="l"/>
             <a:r>
               <a:rPr sz="900" b="0" i="0">
                 <a:solidFill>
                   <a:srgbClr val="BDD7EE"/>
                 </a:solidFill>
-                <a:latin typeface="Calibri"/>
+                <a:latin typeface="Times New Roman"/>
               </a:rPr>
               <a:t>FreshRetailNet-50K  |  Week 5 Milestone  |  Time Series &amp; Forecasting</a:t>
             </a:r>
@@ -12908,7 +12157,7 @@
       </p:sp>
       <p:sp>
         <p:nvSpPr>
-          <p:cNvPr id="9" name="TextBox 8"/>
+          <p:cNvPr id="8" name="TextBox 7"/>
           <p:cNvSpPr txBox="1"/>
           <p:nvPr/>
         </p:nvSpPr>
@@ -12928,17 +12177,13 @@
           </a:bodyPr>
           <a:lstStyle/>
           <a:p>
-            <a:pPr algn="r">
-              <a:spcAft>
-                <a:spcPts val="0"/>
-              </a:spcAft>
-            </a:pPr>
+            <a:pPr algn="r"/>
             <a:r>
               <a:rPr sz="900" b="1" i="0">
                 <a:solidFill>
                   <a:srgbClr val="FFFFFF"/>
                 </a:solidFill>
-                <a:latin typeface="Calibri"/>
+                <a:latin typeface="Times New Roman"/>
               </a:rPr>
               <a:t>4 / 14</a:t>
             </a:r>
@@ -12947,7 +12192,7 @@
       </p:sp>
       <p:sp>
         <p:nvSpPr>
-          <p:cNvPr id="10" name="Rectangle 9"/>
+          <p:cNvPr id="9" name="Rectangle 8"/>
           <p:cNvSpPr/>
           <p:nvPr/>
         </p:nvSpPr>
@@ -12990,7 +12235,7 @@
       </p:sp>
       <p:sp>
         <p:nvSpPr>
-          <p:cNvPr id="11" name="TextBox 10"/>
+          <p:cNvPr id="10" name="TextBox 9"/>
           <p:cNvSpPr txBox="1"/>
           <p:nvPr/>
         </p:nvSpPr>
@@ -13010,33 +12255,29 @@
           </a:bodyPr>
           <a:lstStyle/>
           <a:p>
-            <a:pPr algn="ctr">
-              <a:spcAft>
-                <a:spcPts val="0"/>
-              </a:spcAft>
-            </a:pPr>
-            <a:r>
-              <a:rPr sz="2600" b="1" i="0">
+            <a:pPr algn="ctr"/>
+            <a:r>
+              <a:rPr sz="2400" b="1" i="0">
                 <a:solidFill>
                   <a:srgbClr val="FFBF00"/>
                 </a:solidFill>
-                <a:latin typeface="Calibri"/>
+                <a:latin typeface="Times New Roman"/>
               </a:rPr>
-              <a:t>4.85 Triệu</a:t>
-            </a:r>
-          </a:p>
-        </p:txBody>
-      </p:sp>
-      <p:sp>
-        <p:nvSpPr>
-          <p:cNvPr id="12" name="TextBox 11"/>
+              <a:t>4.85 Trieu</a:t>
+            </a:r>
+          </a:p>
+        </p:txBody>
+      </p:sp>
+      <p:sp>
+        <p:nvSpPr>
+          <p:cNvPr id="11" name="TextBox 10"/>
           <p:cNvSpPr txBox="1"/>
           <p:nvPr/>
         </p:nvSpPr>
         <p:spPr>
           <a:xfrm>
-            <a:off x="320040" y="1737360"/>
-            <a:ext cx="2148840" cy="384048"/>
+            <a:off x="320040" y="1728216"/>
+            <a:ext cx="2148840" cy="347472"/>
           </a:xfrm>
           <a:prstGeom prst="rect">
             <a:avLst/>
@@ -13049,26 +12290,22 @@
           </a:bodyPr>
           <a:lstStyle/>
           <a:p>
-            <a:pPr algn="ctr">
-              <a:spcAft>
-                <a:spcPts val="0"/>
-              </a:spcAft>
-            </a:pPr>
-            <a:r>
-              <a:rPr sz="1100" b="0" i="0">
+            <a:pPr algn="ctr"/>
+            <a:r>
+              <a:rPr sz="1000" b="0" i="0">
                 <a:solidFill>
                   <a:srgbClr val="BDD7EE"/>
                 </a:solidFill>
-                <a:latin typeface="Calibri"/>
+                <a:latin typeface="Times New Roman"/>
               </a:rPr>
-              <a:t>Tổng số dòng (train)</a:t>
-            </a:r>
-          </a:p>
-        </p:txBody>
-      </p:sp>
-      <p:sp>
-        <p:nvSpPr>
-          <p:cNvPr id="13" name="Rectangle 12"/>
+              <a:t>Tong so dong (train)</a:t>
+            </a:r>
+          </a:p>
+        </p:txBody>
+      </p:sp>
+      <p:sp>
+        <p:nvSpPr>
+          <p:cNvPr id="12" name="Rectangle 11"/>
           <p:cNvSpPr/>
           <p:nvPr/>
         </p:nvSpPr>
@@ -13111,7 +12348,7 @@
       </p:sp>
       <p:sp>
         <p:nvSpPr>
-          <p:cNvPr id="14" name="TextBox 13"/>
+          <p:cNvPr id="13" name="TextBox 12"/>
           <p:cNvSpPr txBox="1"/>
           <p:nvPr/>
         </p:nvSpPr>
@@ -13131,33 +12368,29 @@
           </a:bodyPr>
           <a:lstStyle/>
           <a:p>
-            <a:pPr algn="ctr">
-              <a:spcAft>
-                <a:spcPts val="0"/>
-              </a:spcAft>
-            </a:pPr>
-            <a:r>
-              <a:rPr sz="2600" b="1" i="0">
+            <a:pPr algn="ctr"/>
+            <a:r>
+              <a:rPr sz="2400" b="1" i="0">
                 <a:solidFill>
                   <a:srgbClr val="FFBF00"/>
                 </a:solidFill>
-                <a:latin typeface="Calibri"/>
+                <a:latin typeface="Times New Roman"/>
               </a:rPr>
-              <a:t>90 Ngày</a:t>
-            </a:r>
-          </a:p>
-        </p:txBody>
-      </p:sp>
-      <p:sp>
-        <p:nvSpPr>
-          <p:cNvPr id="15" name="TextBox 14"/>
+              <a:t>90 Ngay</a:t>
+            </a:r>
+          </a:p>
+        </p:txBody>
+      </p:sp>
+      <p:sp>
+        <p:nvSpPr>
+          <p:cNvPr id="14" name="TextBox 13"/>
           <p:cNvSpPr txBox="1"/>
           <p:nvPr/>
         </p:nvSpPr>
         <p:spPr>
           <a:xfrm>
-            <a:off x="2578608" y="1737360"/>
-            <a:ext cx="2148840" cy="384048"/>
+            <a:off x="2578608" y="1728216"/>
+            <a:ext cx="2148840" cy="347472"/>
           </a:xfrm>
           <a:prstGeom prst="rect">
             <a:avLst/>
@@ -13170,26 +12403,22 @@
           </a:bodyPr>
           <a:lstStyle/>
           <a:p>
-            <a:pPr algn="ctr">
-              <a:spcAft>
-                <a:spcPts val="0"/>
-              </a:spcAft>
-            </a:pPr>
-            <a:r>
-              <a:rPr sz="1100" b="0" i="0">
+            <a:pPr algn="ctr"/>
+            <a:r>
+              <a:rPr sz="1000" b="0" i="0">
                 <a:solidFill>
                   <a:srgbClr val="BDD7EE"/>
                 </a:solidFill>
-                <a:latin typeface="Calibri"/>
+                <a:latin typeface="Times New Roman"/>
               </a:rPr>
-              <a:t>Tháng 3 – 6 / 2024</a:t>
-            </a:r>
-          </a:p>
-        </p:txBody>
-      </p:sp>
-      <p:sp>
-        <p:nvSpPr>
-          <p:cNvPr id="16" name="Rectangle 15"/>
+              <a:t>Thang 3 - 6 / 2024</a:t>
+            </a:r>
+          </a:p>
+        </p:txBody>
+      </p:sp>
+      <p:sp>
+        <p:nvSpPr>
+          <p:cNvPr id="15" name="Rectangle 14"/>
           <p:cNvSpPr/>
           <p:nvPr/>
         </p:nvSpPr>
@@ -13232,7 +12461,7 @@
       </p:sp>
       <p:sp>
         <p:nvSpPr>
-          <p:cNvPr id="17" name="TextBox 16"/>
+          <p:cNvPr id="16" name="TextBox 15"/>
           <p:cNvSpPr txBox="1"/>
           <p:nvPr/>
         </p:nvSpPr>
@@ -13252,17 +12481,13 @@
           </a:bodyPr>
           <a:lstStyle/>
           <a:p>
-            <a:pPr algn="ctr">
-              <a:spcAft>
-                <a:spcPts val="0"/>
-              </a:spcAft>
-            </a:pPr>
-            <a:r>
-              <a:rPr sz="2600" b="1" i="0">
+            <a:pPr algn="ctr"/>
+            <a:r>
+              <a:rPr sz="2400" b="1" i="0">
                 <a:solidFill>
                   <a:srgbClr val="FFBF00"/>
                 </a:solidFill>
-                <a:latin typeface="Calibri"/>
+                <a:latin typeface="Times New Roman"/>
               </a:rPr>
               <a:t>50 K+</a:t>
             </a:r>
@@ -13271,14 +12496,14 @@
       </p:sp>
       <p:sp>
         <p:nvSpPr>
-          <p:cNvPr id="18" name="TextBox 17"/>
+          <p:cNvPr id="17" name="TextBox 16"/>
           <p:cNvSpPr txBox="1"/>
           <p:nvPr/>
         </p:nvSpPr>
         <p:spPr>
           <a:xfrm>
-            <a:off x="4837176" y="1737360"/>
-            <a:ext cx="2148840" cy="384048"/>
+            <a:off x="4837176" y="1728216"/>
+            <a:ext cx="2148840" cy="347472"/>
           </a:xfrm>
           <a:prstGeom prst="rect">
             <a:avLst/>
@@ -13291,26 +12516,22 @@
           </a:bodyPr>
           <a:lstStyle/>
           <a:p>
-            <a:pPr algn="ctr">
-              <a:spcAft>
-                <a:spcPts val="0"/>
-              </a:spcAft>
-            </a:pPr>
-            <a:r>
-              <a:rPr sz="1100" b="0" i="0">
+            <a:pPr algn="ctr"/>
+            <a:r>
+              <a:rPr sz="1000" b="0" i="0">
                 <a:solidFill>
                   <a:srgbClr val="BDD7EE"/>
                 </a:solidFill>
-                <a:latin typeface="Calibri"/>
+                <a:latin typeface="Times New Roman"/>
               </a:rPr>
-              <a:t>Cặp SKU–Cửa hàng</a:t>
-            </a:r>
-          </a:p>
-        </p:txBody>
-      </p:sp>
-      <p:sp>
-        <p:nvSpPr>
-          <p:cNvPr id="19" name="Rectangle 18"/>
+              <a:t>Cap SKU-Cua hang</a:t>
+            </a:r>
+          </a:p>
+        </p:txBody>
+      </p:sp>
+      <p:sp>
+        <p:nvSpPr>
+          <p:cNvPr id="18" name="Rectangle 17"/>
           <p:cNvSpPr/>
           <p:nvPr/>
         </p:nvSpPr>
@@ -13353,7 +12574,7 @@
       </p:sp>
       <p:sp>
         <p:nvSpPr>
-          <p:cNvPr id="20" name="TextBox 19"/>
+          <p:cNvPr id="19" name="TextBox 18"/>
           <p:cNvSpPr txBox="1"/>
           <p:nvPr/>
         </p:nvSpPr>
@@ -13373,33 +12594,29 @@
           </a:bodyPr>
           <a:lstStyle/>
           <a:p>
-            <a:pPr algn="ctr">
-              <a:spcAft>
-                <a:spcPts val="0"/>
-              </a:spcAft>
-            </a:pPr>
-            <a:r>
-              <a:rPr sz="2600" b="1" i="0">
+            <a:pPr algn="ctr"/>
+            <a:r>
+              <a:rPr sz="2400" b="1" i="0">
                 <a:solidFill>
                   <a:srgbClr val="FFBF00"/>
                 </a:solidFill>
-                <a:latin typeface="Calibri"/>
+                <a:latin typeface="Times New Roman"/>
               </a:rPr>
-              <a:t>19 Cột</a:t>
-            </a:r>
-          </a:p>
-        </p:txBody>
-      </p:sp>
-      <p:sp>
-        <p:nvSpPr>
-          <p:cNvPr id="21" name="TextBox 20"/>
+              <a:t>19 Cot</a:t>
+            </a:r>
+          </a:p>
+        </p:txBody>
+      </p:sp>
+      <p:sp>
+        <p:nvSpPr>
+          <p:cNvPr id="20" name="TextBox 19"/>
           <p:cNvSpPr txBox="1"/>
           <p:nvPr/>
         </p:nvSpPr>
         <p:spPr>
           <a:xfrm>
-            <a:off x="7095744" y="1737360"/>
-            <a:ext cx="2148840" cy="384048"/>
+            <a:off x="7095744" y="1728216"/>
+            <a:ext cx="2148840" cy="347472"/>
           </a:xfrm>
           <a:prstGeom prst="rect">
             <a:avLst/>
@@ -13412,26 +12629,22 @@
           </a:bodyPr>
           <a:lstStyle/>
           <a:p>
-            <a:pPr algn="ctr">
-              <a:spcAft>
-                <a:spcPts val="0"/>
-              </a:spcAft>
-            </a:pPr>
-            <a:r>
-              <a:rPr sz="1100" b="0" i="0">
+            <a:pPr algn="ctr"/>
+            <a:r>
+              <a:rPr sz="1000" b="0" i="0">
                 <a:solidFill>
                   <a:srgbClr val="BDD7EE"/>
                 </a:solidFill>
-                <a:latin typeface="Calibri"/>
+                <a:latin typeface="Times New Roman"/>
               </a:rPr>
-              <a:t>Biến đặc trưng</a:t>
-            </a:r>
-          </a:p>
-        </p:txBody>
-      </p:sp>
-      <p:sp>
-        <p:nvSpPr>
-          <p:cNvPr id="22" name="Rectangle 21"/>
+              <a:t>Bien dac trung</a:t>
+            </a:r>
+          </a:p>
+        </p:txBody>
+      </p:sp>
+      <p:sp>
+        <p:nvSpPr>
+          <p:cNvPr id="21" name="Rectangle 20"/>
           <p:cNvSpPr/>
           <p:nvPr/>
         </p:nvSpPr>
@@ -13474,7 +12687,7 @@
       </p:sp>
       <p:sp>
         <p:nvSpPr>
-          <p:cNvPr id="23" name="TextBox 22"/>
+          <p:cNvPr id="22" name="TextBox 21"/>
           <p:cNvSpPr txBox="1"/>
           <p:nvPr/>
         </p:nvSpPr>
@@ -13494,33 +12707,29 @@
           </a:bodyPr>
           <a:lstStyle/>
           <a:p>
-            <a:pPr algn="ctr">
-              <a:spcAft>
-                <a:spcPts val="0"/>
-              </a:spcAft>
-            </a:pPr>
-            <a:r>
-              <a:rPr sz="2600" b="1" i="0">
+            <a:pPr algn="ctr"/>
+            <a:r>
+              <a:rPr sz="2400" b="1" i="0">
                 <a:solidFill>
                   <a:srgbClr val="FFBF00"/>
                 </a:solidFill>
-                <a:latin typeface="Calibri"/>
+                <a:latin typeface="Times New Roman"/>
               </a:rPr>
-              <a:t>Hằng ngày</a:t>
-            </a:r>
-          </a:p>
-        </p:txBody>
-      </p:sp>
-      <p:sp>
-        <p:nvSpPr>
-          <p:cNvPr id="24" name="TextBox 23"/>
+              <a:t>Hang ngay</a:t>
+            </a:r>
+          </a:p>
+        </p:txBody>
+      </p:sp>
+      <p:sp>
+        <p:nvSpPr>
+          <p:cNvPr id="23" name="TextBox 22"/>
           <p:cNvSpPr txBox="1"/>
           <p:nvPr/>
         </p:nvSpPr>
         <p:spPr>
           <a:xfrm>
-            <a:off x="9354312" y="1737360"/>
-            <a:ext cx="2148840" cy="384048"/>
+            <a:off x="9354312" y="1728216"/>
+            <a:ext cx="2148840" cy="347472"/>
           </a:xfrm>
           <a:prstGeom prst="rect">
             <a:avLst/>
@@ -13533,32 +12742,28 @@
           </a:bodyPr>
           <a:lstStyle/>
           <a:p>
-            <a:pPr algn="ctr">
-              <a:spcAft>
-                <a:spcPts val="0"/>
-              </a:spcAft>
-            </a:pPr>
-            <a:r>
-              <a:rPr sz="1100" b="0" i="0">
+            <a:pPr algn="ctr"/>
+            <a:r>
+              <a:rPr sz="1000" b="0" i="0">
                 <a:solidFill>
                   <a:srgbClr val="BDD7EE"/>
                 </a:solidFill>
-                <a:latin typeface="Calibri"/>
+                <a:latin typeface="Times New Roman"/>
               </a:rPr>
-              <a:t>Tần suất + phân giải giờ</a:t>
-            </a:r>
-          </a:p>
-        </p:txBody>
-      </p:sp>
-      <p:sp>
-        <p:nvSpPr>
-          <p:cNvPr id="25" name="Rectangle 24"/>
+              <a:t>Tan suat + gio</a:t>
+            </a:r>
+          </a:p>
+        </p:txBody>
+      </p:sp>
+      <p:sp>
+        <p:nvSpPr>
+          <p:cNvPr id="24" name="Rectangle 23"/>
           <p:cNvSpPr/>
           <p:nvPr/>
         </p:nvSpPr>
         <p:spPr>
           <a:xfrm>
-            <a:off x="320040" y="2304288"/>
+            <a:off x="320040" y="2286000"/>
             <a:ext cx="2743200" cy="320040"/>
           </a:xfrm>
           <a:prstGeom prst="rect">
@@ -13595,13 +12800,13 @@
       </p:sp>
       <p:sp>
         <p:nvSpPr>
-          <p:cNvPr id="26" name="TextBox 25"/>
+          <p:cNvPr id="25" name="TextBox 24"/>
           <p:cNvSpPr txBox="1"/>
           <p:nvPr/>
         </p:nvSpPr>
         <p:spPr>
           <a:xfrm>
-            <a:off x="393192" y="2329688"/>
+            <a:off x="393192" y="2311400"/>
             <a:ext cx="2651760" cy="320040"/>
           </a:xfrm>
           <a:prstGeom prst="rect">
@@ -13615,34 +12820,30 @@
           </a:bodyPr>
           <a:lstStyle/>
           <a:p>
-            <a:pPr algn="l">
-              <a:spcAft>
-                <a:spcPts val="0"/>
-              </a:spcAft>
-            </a:pPr>
+            <a:pPr algn="l"/>
             <a:r>
               <a:rPr sz="1200" b="1" i="0">
                 <a:solidFill>
                   <a:srgbClr val="FFFFFF"/>
                 </a:solidFill>
-                <a:latin typeface="Calibri"/>
+                <a:latin typeface="Times New Roman"/>
               </a:rPr>
-              <a:t>📋  Cột dữ liệu chính</a:t>
+              <a:t>Cot du lieu chinh</a:t>
             </a:r>
           </a:p>
         </p:txBody>
       </p:sp>
       <p:graphicFrame>
         <p:nvGraphicFramePr>
-          <p:cNvPr id="27" name="Table 26"/>
+          <p:cNvPr id="26" name="Table 25"/>
           <p:cNvGraphicFramePr>
             <a:graphicFrameLocks noGrp="1"/>
           </p:cNvGraphicFramePr>
           <p:nvPr/>
         </p:nvGraphicFramePr>
         <p:xfrm>
-          <a:off x="320040" y="2670048"/>
-          <a:ext cx="11521440" cy="3429000"/>
+          <a:off x="320040" y="2651760"/>
+          <a:ext cx="11521440" cy="3474720"/>
         </p:xfrm>
         <a:graphic>
           <a:graphicData uri="http://schemas.openxmlformats.org/drawingml/2006/table">
@@ -13655,7 +12856,7 @@
                 <a:gridCol w="1645920"/>
                 <a:gridCol w="7589520"/>
               </a:tblGrid>
-              <a:tr h="381000">
+              <a:tr h="386080">
                 <a:tc>
                   <a:txBody>
                     <a:bodyPr/>
@@ -13667,9 +12868,9 @@
                           <a:solidFill>
                             <a:srgbClr val="FFFFFF"/>
                           </a:solidFill>
-                          <a:latin typeface="Calibri"/>
-                        </a:rPr>
-                        <a:t>Cột</a:t>
+                          <a:latin typeface="Times New Roman"/>
+                        </a:rPr>
+                        <a:t>Cot</a:t>
                       </a:r>
                     </a:p>
                   </a:txBody>
@@ -13690,9 +12891,9 @@
                           <a:solidFill>
                             <a:srgbClr val="FFFFFF"/>
                           </a:solidFill>
-                          <a:latin typeface="Calibri"/>
-                        </a:rPr>
-                        <a:t>Kiểu</a:t>
+                          <a:latin typeface="Times New Roman"/>
+                        </a:rPr>
+                        <a:t>Kieu</a:t>
                       </a:r>
                     </a:p>
                   </a:txBody>
@@ -13713,9 +12914,9 @@
                           <a:solidFill>
                             <a:srgbClr val="FFFFFF"/>
                           </a:solidFill>
-                          <a:latin typeface="Calibri"/>
-                        </a:rPr>
-                        <a:t>Ý nghĩa</a:t>
+                          <a:latin typeface="Times New Roman"/>
+                        </a:rPr>
+                        <a:t>Y nghia</a:t>
                       </a:r>
                     </a:p>
                   </a:txBody>
@@ -13726,7 +12927,7 @@
                   </a:tcPr>
                 </a:tc>
               </a:tr>
-              <a:tr h="381000">
+              <a:tr h="386080">
                 <a:tc>
                   <a:txBody>
                     <a:bodyPr/>
@@ -13738,7 +12939,7 @@
                           <a:solidFill>
                             <a:srgbClr val="1A1A1A"/>
                           </a:solidFill>
-                          <a:latin typeface="Calibri"/>
+                          <a:latin typeface="Times New Roman"/>
                         </a:rPr>
                         <a:t>dt</a:t>
                       </a:r>
@@ -13761,9 +12962,9 @@
                           <a:solidFill>
                             <a:srgbClr val="1A1A1A"/>
                           </a:solidFill>
-                          <a:latin typeface="Calibri"/>
-                        </a:rPr>
-                        <a:t>string → datetime</a:t>
+                          <a:latin typeface="Times New Roman"/>
+                        </a:rPr>
+                        <a:t>datetime</a:t>
                       </a:r>
                     </a:p>
                   </a:txBody>
@@ -13784,9 +12985,9 @@
                           <a:solidFill>
                             <a:srgbClr val="1A1A1A"/>
                           </a:solidFill>
-                          <a:latin typeface="Calibri"/>
-                        </a:rPr>
-                        <a:t>Chỉ số thời gian</a:t>
+                          <a:latin typeface="Times New Roman"/>
+                        </a:rPr>
+                        <a:t>Chi so thoi gian</a:t>
                       </a:r>
                     </a:p>
                   </a:txBody>
@@ -13797,7 +12998,7 @@
                   </a:tcPr>
                 </a:tc>
               </a:tr>
-              <a:tr h="381000">
+              <a:tr h="386080">
                 <a:tc>
                   <a:txBody>
                     <a:bodyPr/>
@@ -13809,7 +13010,7 @@
                           <a:solidFill>
                             <a:srgbClr val="1A1A1A"/>
                           </a:solidFill>
-                          <a:latin typeface="Calibri"/>
+                          <a:latin typeface="Times New Roman"/>
                         </a:rPr>
                         <a:t>sale_amount</a:t>
                       </a:r>
@@ -13832,7 +13033,7 @@
                           <a:solidFill>
                             <a:srgbClr val="1A1A1A"/>
                           </a:solidFill>
-                          <a:latin typeface="Calibri"/>
+                          <a:latin typeface="Times New Roman"/>
                         </a:rPr>
                         <a:t>float64</a:t>
                       </a:r>
@@ -13855,9 +13056,9 @@
                           <a:solidFill>
                             <a:srgbClr val="1A1A1A"/>
                           </a:solidFill>
-                          <a:latin typeface="Calibri"/>
-                        </a:rPr>
-                        <a:t>Mục tiêu: doanh số ngày (censored)</a:t>
+                          <a:latin typeface="Times New Roman"/>
+                        </a:rPr>
+                        <a:t>Muc tieu: doanh so ngay (censored)</a:t>
                       </a:r>
                     </a:p>
                   </a:txBody>
@@ -13868,7 +13069,7 @@
                   </a:tcPr>
                 </a:tc>
               </a:tr>
-              <a:tr h="381000">
+              <a:tr h="386080">
                 <a:tc>
                   <a:txBody>
                     <a:bodyPr/>
@@ -13880,7 +13081,7 @@
                           <a:solidFill>
                             <a:srgbClr val="1A1A1A"/>
                           </a:solidFill>
-                          <a:latin typeface="Calibri"/>
+                          <a:latin typeface="Times New Roman"/>
                         </a:rPr>
                         <a:t>hours_sale</a:t>
                       </a:r>
@@ -13903,7 +13104,7 @@
                           <a:solidFill>
                             <a:srgbClr val="1A1A1A"/>
                           </a:solidFill>
-                          <a:latin typeface="Calibri"/>
+                          <a:latin typeface="Times New Roman"/>
                         </a:rPr>
                         <a:t>array[24]</a:t>
                       </a:r>
@@ -13926,9 +13127,9 @@
                           <a:solidFill>
                             <a:srgbClr val="1A1A1A"/>
                           </a:solidFill>
-                          <a:latin typeface="Calibri"/>
-                        </a:rPr>
-                        <a:t>Doanh số theo từng giờ</a:t>
+                          <a:latin typeface="Times New Roman"/>
+                        </a:rPr>
+                        <a:t>Doanh so theo tung gio</a:t>
                       </a:r>
                     </a:p>
                   </a:txBody>
@@ -13939,7 +13140,7 @@
                   </a:tcPr>
                 </a:tc>
               </a:tr>
-              <a:tr h="381000">
+              <a:tr h="386080">
                 <a:tc>
                   <a:txBody>
                     <a:bodyPr/>
@@ -13951,7 +13152,7 @@
                           <a:solidFill>
                             <a:srgbClr val="1A1A1A"/>
                           </a:solidFill>
-                          <a:latin typeface="Calibri"/>
+                          <a:latin typeface="Times New Roman"/>
                         </a:rPr>
                         <a:t>stock_hour6_22_cnt</a:t>
                       </a:r>
@@ -13974,7 +13175,7 @@
                           <a:solidFill>
                             <a:srgbClr val="1A1A1A"/>
                           </a:solidFill>
-                          <a:latin typeface="Calibri"/>
+                          <a:latin typeface="Times New Roman"/>
                         </a:rPr>
                         <a:t>int32</a:t>
                       </a:r>
@@ -13997,9 +13198,9 @@
                           <a:solidFill>
                             <a:srgbClr val="1A1A1A"/>
                           </a:solidFill>
-                          <a:latin typeface="Calibri"/>
-                        </a:rPr>
-                        <a:t>Số giờ còn hàng (proxy censoring)</a:t>
+                          <a:latin typeface="Times New Roman"/>
+                        </a:rPr>
+                        <a:t>So gio con hang (proxy censoring)</a:t>
                       </a:r>
                     </a:p>
                   </a:txBody>
@@ -14010,7 +13211,7 @@
                   </a:tcPr>
                 </a:tc>
               </a:tr>
-              <a:tr h="381000">
+              <a:tr h="386080">
                 <a:tc>
                   <a:txBody>
                     <a:bodyPr/>
@@ -14022,7 +13223,7 @@
                           <a:solidFill>
                             <a:srgbClr val="1A1A1A"/>
                           </a:solidFill>
-                          <a:latin typeface="Calibri"/>
+                          <a:latin typeface="Times New Roman"/>
                         </a:rPr>
                         <a:t>holiday_flag</a:t>
                       </a:r>
@@ -14045,7 +13246,7 @@
                           <a:solidFill>
                             <a:srgbClr val="1A1A1A"/>
                           </a:solidFill>
-                          <a:latin typeface="Calibri"/>
+                          <a:latin typeface="Times New Roman"/>
                         </a:rPr>
                         <a:t>binary</a:t>
                       </a:r>
@@ -14068,9 +13269,9 @@
                           <a:solidFill>
                             <a:srgbClr val="1A1A1A"/>
                           </a:solidFill>
-                          <a:latin typeface="Calibri"/>
-                        </a:rPr>
-                        <a:t>Ngày lễ công cộng</a:t>
+                          <a:latin typeface="Times New Roman"/>
+                        </a:rPr>
+                        <a:t>Ngay le cong cong</a:t>
                       </a:r>
                     </a:p>
                   </a:txBody>
@@ -14081,7 +13282,7 @@
                   </a:tcPr>
                 </a:tc>
               </a:tr>
-              <a:tr h="381000">
+              <a:tr h="386080">
                 <a:tc>
                   <a:txBody>
                     <a:bodyPr/>
@@ -14093,7 +13294,7 @@
                           <a:solidFill>
                             <a:srgbClr val="1A1A1A"/>
                           </a:solidFill>
-                          <a:latin typeface="Calibri"/>
+                          <a:latin typeface="Times New Roman"/>
                         </a:rPr>
                         <a:t>activity_flag</a:t>
                       </a:r>
@@ -14116,7 +13317,7 @@
                           <a:solidFill>
                             <a:srgbClr val="1A1A1A"/>
                           </a:solidFill>
-                          <a:latin typeface="Calibri"/>
+                          <a:latin typeface="Times New Roman"/>
                         </a:rPr>
                         <a:t>binary</a:t>
                       </a:r>
@@ -14139,9 +13340,9 @@
                           <a:solidFill>
                             <a:srgbClr val="1A1A1A"/>
                           </a:solidFill>
-                          <a:latin typeface="Calibri"/>
-                        </a:rPr>
-                        <a:t>Ngày khuyến mãi</a:t>
+                          <a:latin typeface="Times New Roman"/>
+                        </a:rPr>
+                        <a:t>Ngay khuyen mai</a:t>
                       </a:r>
                     </a:p>
                   </a:txBody>
@@ -14152,7 +13353,7 @@
                   </a:tcPr>
                 </a:tc>
               </a:tr>
-              <a:tr h="381000">
+              <a:tr h="386080">
                 <a:tc>
                   <a:txBody>
                     <a:bodyPr/>
@@ -14164,7 +13365,7 @@
                           <a:solidFill>
                             <a:srgbClr val="1A1A1A"/>
                           </a:solidFill>
-                          <a:latin typeface="Calibri"/>
+                          <a:latin typeface="Times New Roman"/>
                         </a:rPr>
                         <a:t>avg_temperature</a:t>
                       </a:r>
@@ -14187,7 +13388,7 @@
                           <a:solidFill>
                             <a:srgbClr val="1A1A1A"/>
                           </a:solidFill>
-                          <a:latin typeface="Calibri"/>
+                          <a:latin typeface="Times New Roman"/>
                         </a:rPr>
                         <a:t>float64</a:t>
                       </a:r>
@@ -14210,9 +13411,9 @@
                           <a:solidFill>
                             <a:srgbClr val="1A1A1A"/>
                           </a:solidFill>
-                          <a:latin typeface="Calibri"/>
-                        </a:rPr>
-                        <a:t>Nhiệt độ TB (°C) — covariate</a:t>
+                          <a:latin typeface="Times New Roman"/>
+                        </a:rPr>
+                        <a:t>Nhiet do TB (C) - covariate</a:t>
                       </a:r>
                     </a:p>
                   </a:txBody>
@@ -14223,7 +13424,7 @@
                   </a:tcPr>
                 </a:tc>
               </a:tr>
-              <a:tr h="381000">
+              <a:tr h="386080">
                 <a:tc>
                   <a:txBody>
                     <a:bodyPr/>
@@ -14235,7 +13436,7 @@
                           <a:solidFill>
                             <a:srgbClr val="1A1A1A"/>
                           </a:solidFill>
-                          <a:latin typeface="Calibri"/>
+                          <a:latin typeface="Times New Roman"/>
                         </a:rPr>
                         <a:t>precpt</a:t>
                       </a:r>
@@ -14258,7 +13459,7 @@
                           <a:solidFill>
                             <a:srgbClr val="1A1A1A"/>
                           </a:solidFill>
-                          <a:latin typeface="Calibri"/>
+                          <a:latin typeface="Times New Roman"/>
                         </a:rPr>
                         <a:t>float64</a:t>
                       </a:r>
@@ -14281,9 +13482,9 @@
                           <a:solidFill>
                             <a:srgbClr val="1A1A1A"/>
                           </a:solidFill>
-                          <a:latin typeface="Calibri"/>
-                        </a:rPr>
-                        <a:t>Lượng mưa (mm) — covariate</a:t>
+                          <a:latin typeface="Times New Roman"/>
+                        </a:rPr>
+                        <a:t>Luong mua (mm) - covariate</a:t>
                       </a:r>
                     </a:p>
                   </a:txBody>
@@ -14300,14 +13501,14 @@
       </p:graphicFrame>
       <p:sp>
         <p:nvSpPr>
-          <p:cNvPr id="28" name="TextBox 27"/>
+          <p:cNvPr id="27" name="TextBox 26"/>
           <p:cNvSpPr txBox="1"/>
           <p:nvPr/>
         </p:nvSpPr>
         <p:spPr>
           <a:xfrm>
-            <a:off x="320040" y="6190488"/>
-            <a:ext cx="11521440" cy="292608"/>
+            <a:off x="320040" y="6199632"/>
+            <a:ext cx="11521440" cy="256032"/>
           </a:xfrm>
           <a:prstGeom prst="rect">
             <a:avLst/>
@@ -14320,19 +13521,15 @@
           </a:bodyPr>
           <a:lstStyle/>
           <a:p>
-            <a:pPr algn="l">
-              <a:spcAft>
-                <a:spcPts val="0"/>
-              </a:spcAft>
-            </a:pPr>
+            <a:pPr algn="l"/>
             <a:r>
               <a:rPr sz="1000" b="0" i="1">
                 <a:solidFill>
                   <a:srgbClr val="555555"/>
                 </a:solidFill>
-                <a:latin typeface="Calibri"/>
+                <a:latin typeface="Times New Roman"/>
               </a:rPr>
-              <a:t>⚑  hours_sale và hours_stock_status là mảng 24 phần tử (1 entry/giờ) — không dùng trực tiếp trong SARIMA; loại ra khi gộp daily.</a:t>
+              <a:t>hours_sale va hours_stock_status la mang 24 phan tu — loai ra khi gop daily aggregation.</a:t>
             </a:r>
           </a:p>
         </p:txBody>
@@ -14506,19 +13703,15 @@
           </a:bodyPr>
           <a:lstStyle/>
           <a:p>
-            <a:pPr algn="l">
-              <a:spcAft>
-                <a:spcPts val="0"/>
-              </a:spcAft>
-            </a:pPr>
+            <a:pPr algn="l"/>
             <a:r>
               <a:rPr sz="2700" b="1" i="0">
                 <a:solidFill>
                   <a:srgbClr val="FFFFFF"/>
                 </a:solidFill>
-                <a:latin typeface="Calibri"/>
+                <a:latin typeface="Times New Roman"/>
               </a:rPr>
-              <a:t>Khám Phá Dữ Liệu — Time Plot &amp; Seasonal Pattern</a:t>
+              <a:t>Kham Pha Du Lieu — Time Plot &amp; Seasonal Pattern</a:t>
             </a:r>
           </a:p>
         </p:txBody>
@@ -14588,17 +13781,13 @@
           </a:bodyPr>
           <a:lstStyle/>
           <a:p>
-            <a:pPr algn="l">
-              <a:spcAft>
-                <a:spcPts val="0"/>
-              </a:spcAft>
-            </a:pPr>
+            <a:pPr algn="l"/>
             <a:r>
               <a:rPr sz="900" b="0" i="0">
                 <a:solidFill>
                   <a:srgbClr val="BDD7EE"/>
                 </a:solidFill>
-                <a:latin typeface="Calibri"/>
+                <a:latin typeface="Times New Roman"/>
               </a:rPr>
               <a:t>FreshRetailNet-50K  |  Week 5 Milestone  |  Time Series &amp; Forecasting</a:t>
             </a:r>
@@ -14627,29 +13816,33 @@
           </a:bodyPr>
           <a:lstStyle/>
           <a:p>
-            <a:pPr algn="r">
-              <a:spcAft>
-                <a:spcPts val="0"/>
-              </a:spcAft>
-            </a:pPr>
+            <a:pPr algn="r"/>
             <a:r>
               <a:rPr sz="900" b="1" i="0">
                 <a:solidFill>
                   <a:srgbClr val="FFFFFF"/>
                 </a:solidFill>
-                <a:latin typeface="Calibri"/>
+                <a:latin typeface="Times New Roman"/>
               </a:rPr>
               <a:t>5 / 14</a:t>
             </a:r>
           </a:p>
         </p:txBody>
       </p:sp>
-      <p:sp>
-        <p:nvSpPr>
-          <p:cNvPr id="9" name="Rectangle 8"/>
-          <p:cNvSpPr/>
-          <p:nvPr/>
-        </p:nvSpPr>
+      <p:pic>
+        <p:nvPicPr>
+          <p:cNvPr id="9" name="Picture 8" descr="image.png"/>
+          <p:cNvPicPr>
+            <a:picLocks noChangeAspect="1"/>
+          </p:cNvPicPr>
+          <p:nvPr/>
+        </p:nvPicPr>
+        <p:blipFill>
+          <a:blip r:embed="rId2"/>
+          <a:stretch>
+            <a:fillRect/>
+          </a:stretch>
+        </p:blipFill>
         <p:spPr>
           <a:xfrm>
             <a:off x="274320" y="1143000"/>
@@ -14658,87 +13851,18 @@
           <a:prstGeom prst="rect">
             <a:avLst/>
           </a:prstGeom>
-          <a:solidFill>
-            <a:srgbClr val="F2F4F8"/>
-          </a:solidFill>
-          <a:ln w="6350">
-            <a:solidFill>
-              <a:srgbClr val="D0D8E4"/>
-            </a:solidFill>
-          </a:ln>
-        </p:spPr>
-        <p:style>
-          <a:lnRef idx="1">
-            <a:schemeClr val="accent1"/>
-          </a:lnRef>
-          <a:fillRef idx="3">
-            <a:schemeClr val="accent1"/>
-          </a:fillRef>
-          <a:effectRef idx="2">
-            <a:schemeClr val="accent1"/>
-          </a:effectRef>
-          <a:fontRef idx="minor">
-            <a:schemeClr val="lt1"/>
-          </a:fontRef>
-        </p:style>
-        <p:txBody>
-          <a:bodyPr rtlCol="0" anchor="ctr"/>
-          <a:lstStyle/>
-          <a:p>
-            <a:pPr algn="ctr"/>
-          </a:p>
-        </p:txBody>
-      </p:sp>
-      <p:sp>
-        <p:nvSpPr>
-          <p:cNvPr id="10" name="TextBox 9"/>
-          <p:cNvSpPr txBox="1"/>
-          <p:nvPr/>
-        </p:nvSpPr>
-        <p:spPr>
-          <a:xfrm>
-            <a:off x="365760" y="1234440"/>
-            <a:ext cx="7406640" cy="5074920"/>
-          </a:xfrm>
-          <a:prstGeom prst="rect">
-            <a:avLst/>
-          </a:prstGeom>
-          <a:noFill/>
-        </p:spPr>
-        <p:txBody>
-          <a:bodyPr wrap="square">
-            <a:spAutoFit/>
-          </a:bodyPr>
-          <a:lstStyle/>
-          <a:p>
-            <a:pPr algn="ctr">
-              <a:spcAft>
-                <a:spcPts val="0"/>
-              </a:spcAft>
-            </a:pPr>
-            <a:r>
-              <a:rPr sz="1100" b="0" i="0">
-                <a:solidFill>
-                  <a:srgbClr val="555555"/>
-                </a:solidFill>
-                <a:latin typeface="Calibri"/>
-              </a:rPr>
-              <a:t>[Image not found:
-eda_plots.png]</a:t>
-            </a:r>
-          </a:p>
-        </p:txBody>
-      </p:sp>
-      <p:sp>
-        <p:nvSpPr>
-          <p:cNvPr id="11" name="Rectangle 10"/>
+        </p:spPr>
+      </p:pic>
+      <p:sp>
+        <p:nvSpPr>
+          <p:cNvPr id="10" name="Rectangle 9"/>
           <p:cNvSpPr/>
           <p:nvPr/>
         </p:nvSpPr>
         <p:spPr>
           <a:xfrm>
-            <a:off x="8046720" y="1143000"/>
-            <a:ext cx="3840480" cy="320040"/>
+            <a:off x="8001000" y="1143000"/>
+            <a:ext cx="3886200" cy="320040"/>
           </a:xfrm>
           <a:prstGeom prst="rect">
             <a:avLst/>
@@ -14774,14 +13898,14 @@
       </p:sp>
       <p:sp>
         <p:nvSpPr>
-          <p:cNvPr id="12" name="TextBox 11"/>
+          <p:cNvPr id="11" name="TextBox 10"/>
           <p:cNvSpPr txBox="1"/>
           <p:nvPr/>
         </p:nvSpPr>
         <p:spPr>
           <a:xfrm>
-            <a:off x="8119872" y="1168400"/>
-            <a:ext cx="3749040" cy="320040"/>
+            <a:off x="8074152" y="1168400"/>
+            <a:ext cx="3794760" cy="320040"/>
           </a:xfrm>
           <a:prstGeom prst="rect">
             <a:avLst/>
@@ -14794,26 +13918,22 @@
           </a:bodyPr>
           <a:lstStyle/>
           <a:p>
-            <a:pPr algn="l">
-              <a:spcAft>
-                <a:spcPts val="0"/>
-              </a:spcAft>
-            </a:pPr>
+            <a:pPr algn="l"/>
             <a:r>
               <a:rPr sz="1200" b="1" i="0">
                 <a:solidFill>
                   <a:srgbClr val="FFFFFF"/>
                 </a:solidFill>
-                <a:latin typeface="Calibri"/>
+                <a:latin typeface="Times New Roman"/>
               </a:rPr>
-              <a:t>📊  Nhận xét</a:t>
-            </a:r>
-          </a:p>
-        </p:txBody>
-      </p:sp>
-      <p:sp>
-        <p:nvSpPr>
-          <p:cNvPr id="13" name="TextBox 12"/>
+              <a:t>Nhan xet chinh</a:t>
+            </a:r>
+          </a:p>
+        </p:txBody>
+      </p:sp>
+      <p:sp>
+        <p:nvSpPr>
+          <p:cNvPr id="12" name="TextBox 11"/>
           <p:cNvSpPr txBox="1"/>
           <p:nvPr/>
         </p:nvSpPr>
@@ -14843,9 +13963,9 @@
                 <a:solidFill>
                   <a:srgbClr val="1A1A1A"/>
                 </a:solidFill>
-                <a:latin typeface="Calibri"/>
+                <a:latin typeface="Times New Roman"/>
               </a:rPr>
-              <a:t>▸  Trend: Tăng nhẹ tháng 3–4, plateau tháng 5–6</a:t>
+              <a:t>Trend: Tang nhe thang 3-4, plateau thang 5-6</a:t>
             </a:r>
           </a:p>
           <a:p>
@@ -14855,13 +13975,13 @@
               </a:spcAft>
             </a:pPr>
             <a:r>
-              <a:rPr sz="1300">
+              <a:rPr sz="1150">
                 <a:solidFill>
                   <a:srgbClr val="555555"/>
                 </a:solidFill>
-                <a:latin typeface="Calibri"/>
+                <a:latin typeface="Times New Roman"/>
               </a:rPr>
-              <a:t>  ◦ → Cần sai phân bậc 1 (d=1)</a:t>
+              <a:t>   -&gt; Can sai phan bac 1 (d=1)</a:t>
             </a:r>
           </a:p>
           <a:p>
@@ -14875,9 +13995,9 @@
                 <a:solidFill>
                   <a:srgbClr val="1A1A1A"/>
                 </a:solidFill>
-                <a:latin typeface="Calibri"/>
+                <a:latin typeface="Times New Roman"/>
               </a:rPr>
-              <a:t>▸  Seasonality: Chu kỳ tuần rõ ràng (s=7)</a:t>
+              <a:t>Seasonality: Chu ky tuan ro rang (s=7)</a:t>
             </a:r>
           </a:p>
           <a:p>
@@ -14887,13 +14007,13 @@
               </a:spcAft>
             </a:pPr>
             <a:r>
-              <a:rPr sz="1300">
+              <a:rPr sz="1150">
                 <a:solidFill>
                   <a:srgbClr val="555555"/>
                 </a:solidFill>
-                <a:latin typeface="Calibri"/>
+                <a:latin typeface="Times New Roman"/>
               </a:rPr>
-              <a:t>  ◦ Sat–Sun cao hơn ~35% so với Tue–Wed</a:t>
+              <a:t>   Sat-Sun cao hon ~35% so voi Tue-Wed</a:t>
             </a:r>
           </a:p>
           <a:p>
@@ -14907,9 +14027,9 @@
                 <a:solidFill>
                   <a:srgbClr val="1A1A1A"/>
                 </a:solidFill>
-                <a:latin typeface="Calibri"/>
+                <a:latin typeface="Times New Roman"/>
               </a:rPr>
-              <a:t>▸  Holiday: Spike ngày lễ (★ đỏ) — cần dummy var</a:t>
+              <a:t>Holiday: Spike ngay le (do) - can dummy var</a:t>
             </a:r>
           </a:p>
           <a:p>
@@ -14923,9 +14043,9 @@
                 <a:solidFill>
                   <a:srgbClr val="1A1A1A"/>
                 </a:solidFill>
-                <a:latin typeface="Calibri"/>
+                <a:latin typeface="Times New Roman"/>
               </a:rPr>
-              <a:t>▸  Promotion: Spike đột ngột (▲ cam) — cần exog</a:t>
+              <a:t>Promotion: Spike dot ngot (cam) - can exog</a:t>
             </a:r>
           </a:p>
           <a:p>
@@ -14939,9 +14059,9 @@
                 <a:solidFill>
                   <a:srgbClr val="1A1A1A"/>
                 </a:solidFill>
-                <a:latin typeface="Calibri"/>
+                <a:latin typeface="Times New Roman"/>
               </a:rPr>
-              <a:t>▸  Nhiệt độ: r ≈ 0.54 với doanh số — covariate hữu ích</a:t>
+              <a:t>Nhiet do: r ~ 0.54 voi doanh so</a:t>
             </a:r>
           </a:p>
           <a:p>
@@ -14955,9 +14075,9 @@
                 <a:solidFill>
                   <a:srgbClr val="1A1A1A"/>
                 </a:solidFill>
-                <a:latin typeface="Calibri"/>
+                <a:latin typeface="Times New Roman"/>
               </a:rPr>
-              <a:t>▸  Log-transform: Ổn định phương sai, giảm skew</a:t>
+              <a:t>Log-transform: On dinh phuong sai</a:t>
             </a:r>
           </a:p>
         </p:txBody>
@@ -14989,49 +14109,6 @@
         <p:spPr>
           <a:xfrm>
             <a:off x="0" y="0"/>
-            <a:ext cx="12188952" cy="6858000"/>
-          </a:xfrm>
-          <a:prstGeom prst="rect">
-            <a:avLst/>
-          </a:prstGeom>
-          <a:solidFill>
-            <a:srgbClr val="FFFFFF"/>
-          </a:solidFill>
-          <a:ln>
-            <a:noFill/>
-          </a:ln>
-        </p:spPr>
-        <p:style>
-          <a:lnRef idx="1">
-            <a:schemeClr val="accent1"/>
-          </a:lnRef>
-          <a:fillRef idx="3">
-            <a:schemeClr val="accent1"/>
-          </a:fillRef>
-          <a:effectRef idx="2">
-            <a:schemeClr val="accent1"/>
-          </a:effectRef>
-          <a:fontRef idx="minor">
-            <a:schemeClr val="lt1"/>
-          </a:fontRef>
-        </p:style>
-        <p:txBody>
-          <a:bodyPr rtlCol="0" anchor="ctr"/>
-          <a:lstStyle/>
-          <a:p>
-            <a:pPr algn="ctr"/>
-          </a:p>
-        </p:txBody>
-      </p:sp>
-      <p:sp>
-        <p:nvSpPr>
-          <p:cNvPr id="3" name="Rectangle 2"/>
-          <p:cNvSpPr/>
-          <p:nvPr/>
-        </p:nvSpPr>
-        <p:spPr>
-          <a:xfrm>
-            <a:off x="0" y="0"/>
             <a:ext cx="12188952" cy="1005840"/>
           </a:xfrm>
           <a:prstGeom prst="rect">
@@ -15068,7 +14145,7 @@
       </p:sp>
       <p:sp>
         <p:nvSpPr>
-          <p:cNvPr id="4" name="Rectangle 3"/>
+          <p:cNvPr id="3" name="Rectangle 2"/>
           <p:cNvSpPr/>
           <p:nvPr/>
         </p:nvSpPr>
@@ -15111,7 +14188,7 @@
       </p:sp>
       <p:sp>
         <p:nvSpPr>
-          <p:cNvPr id="5" name="TextBox 4"/>
+          <p:cNvPr id="4" name="TextBox 3"/>
           <p:cNvSpPr txBox="1"/>
           <p:nvPr/>
         </p:nvSpPr>
@@ -15131,17 +14208,13 @@
           </a:bodyPr>
           <a:lstStyle/>
           <a:p>
-            <a:pPr algn="l">
-              <a:spcAft>
-                <a:spcPts val="0"/>
-              </a:spcAft>
-            </a:pPr>
+            <a:pPr algn="l"/>
             <a:r>
               <a:rPr sz="2700" b="1" i="0">
                 <a:solidFill>
                   <a:srgbClr val="FFFFFF"/>
                 </a:solidFill>
-                <a:latin typeface="Calibri"/>
+                <a:latin typeface="Times New Roman"/>
               </a:rPr>
               <a:t>STL Decomposition &amp; Seasonal Pattern</a:t>
             </a:r>
@@ -15150,7 +14223,7 @@
       </p:sp>
       <p:sp>
         <p:nvSpPr>
-          <p:cNvPr id="6" name="Rectangle 5"/>
+          <p:cNvPr id="5" name="Rectangle 4"/>
           <p:cNvSpPr/>
           <p:nvPr/>
         </p:nvSpPr>
@@ -15193,7 +14266,7 @@
       </p:sp>
       <p:sp>
         <p:nvSpPr>
-          <p:cNvPr id="7" name="TextBox 6"/>
+          <p:cNvPr id="6" name="TextBox 5"/>
           <p:cNvSpPr txBox="1"/>
           <p:nvPr/>
         </p:nvSpPr>
@@ -15213,17 +14286,13 @@
           </a:bodyPr>
           <a:lstStyle/>
           <a:p>
-            <a:pPr algn="l">
-              <a:spcAft>
-                <a:spcPts val="0"/>
-              </a:spcAft>
-            </a:pPr>
+            <a:pPr algn="l"/>
             <a:r>
               <a:rPr sz="900" b="0" i="0">
                 <a:solidFill>
                   <a:srgbClr val="BDD7EE"/>
                 </a:solidFill>
-                <a:latin typeface="Calibri"/>
+                <a:latin typeface="Times New Roman"/>
               </a:rPr>
               <a:t>FreshRetailNet-50K  |  Week 5 Milestone  |  Time Series &amp; Forecasting</a:t>
             </a:r>
@@ -15232,7 +14301,7 @@
       </p:sp>
       <p:sp>
         <p:nvSpPr>
-          <p:cNvPr id="8" name="TextBox 7"/>
+          <p:cNvPr id="7" name="TextBox 6"/>
           <p:cNvSpPr txBox="1"/>
           <p:nvPr/>
         </p:nvSpPr>
@@ -15252,29 +14321,33 @@
           </a:bodyPr>
           <a:lstStyle/>
           <a:p>
-            <a:pPr algn="r">
-              <a:spcAft>
-                <a:spcPts val="0"/>
-              </a:spcAft>
-            </a:pPr>
+            <a:pPr algn="r"/>
             <a:r>
               <a:rPr sz="900" b="1" i="0">
                 <a:solidFill>
                   <a:srgbClr val="FFFFFF"/>
                 </a:solidFill>
-                <a:latin typeface="Calibri"/>
+                <a:latin typeface="Times New Roman"/>
               </a:rPr>
               <a:t>6 / 14</a:t>
             </a:r>
           </a:p>
         </p:txBody>
       </p:sp>
-      <p:sp>
-        <p:nvSpPr>
-          <p:cNvPr id="9" name="Rectangle 8"/>
-          <p:cNvSpPr/>
-          <p:nvPr/>
-        </p:nvSpPr>
+      <p:pic>
+        <p:nvPicPr>
+          <p:cNvPr id="8" name="Picture 7" descr="image.png"/>
+          <p:cNvPicPr>
+            <a:picLocks noChangeAspect="1"/>
+          </p:cNvPicPr>
+          <p:nvPr/>
+        </p:nvPicPr>
+        <p:blipFill>
+          <a:blip r:embed="rId2"/>
+          <a:stretch>
+            <a:fillRect/>
+          </a:stretch>
+        </p:blipFill>
         <p:spPr>
           <a:xfrm>
             <a:off x="274320" y="1143000"/>
@@ -15283,172 +14356,42 @@
           <a:prstGeom prst="rect">
             <a:avLst/>
           </a:prstGeom>
-          <a:solidFill>
-            <a:srgbClr val="F2F4F8"/>
-          </a:solidFill>
-          <a:ln w="6350">
-            <a:solidFill>
-              <a:srgbClr val="D0D8E4"/>
-            </a:solidFill>
-          </a:ln>
-        </p:spPr>
-        <p:style>
-          <a:lnRef idx="1">
-            <a:schemeClr val="accent1"/>
-          </a:lnRef>
-          <a:fillRef idx="3">
-            <a:schemeClr val="accent1"/>
-          </a:fillRef>
-          <a:effectRef idx="2">
-            <a:schemeClr val="accent1"/>
-          </a:effectRef>
-          <a:fontRef idx="minor">
-            <a:schemeClr val="lt1"/>
-          </a:fontRef>
-        </p:style>
-        <p:txBody>
-          <a:bodyPr rtlCol="0" anchor="ctr"/>
-          <a:lstStyle/>
-          <a:p>
-            <a:pPr algn="ctr"/>
-          </a:p>
-        </p:txBody>
-      </p:sp>
-      <p:sp>
-        <p:nvSpPr>
-          <p:cNvPr id="10" name="TextBox 9"/>
-          <p:cNvSpPr txBox="1"/>
-          <p:nvPr/>
-        </p:nvSpPr>
-        <p:spPr>
-          <a:xfrm>
-            <a:off x="365760" y="1234440"/>
-            <a:ext cx="6675120" cy="3840480"/>
-          </a:xfrm>
-          <a:prstGeom prst="rect">
-            <a:avLst/>
-          </a:prstGeom>
-          <a:noFill/>
-        </p:spPr>
-        <p:txBody>
-          <a:bodyPr wrap="square">
-            <a:spAutoFit/>
-          </a:bodyPr>
-          <a:lstStyle/>
-          <a:p>
-            <a:pPr algn="ctr">
-              <a:spcAft>
-                <a:spcPts val="0"/>
-              </a:spcAft>
-            </a:pPr>
-            <a:r>
-              <a:rPr sz="1100" b="0" i="0">
-                <a:solidFill>
-                  <a:srgbClr val="555555"/>
-                </a:solidFill>
-                <a:latin typeface="Calibri"/>
-              </a:rPr>
-              <a:t>[Image not found:
-stl_decomposition.png]</a:t>
-            </a:r>
-          </a:p>
-        </p:txBody>
-      </p:sp>
-      <p:sp>
-        <p:nvSpPr>
-          <p:cNvPr id="11" name="Rectangle 10"/>
+        </p:spPr>
+      </p:pic>
+      <p:pic>
+        <p:nvPicPr>
+          <p:cNvPr id="9" name="Picture 8" descr="image.png"/>
+          <p:cNvPicPr>
+            <a:picLocks noChangeAspect="1"/>
+          </p:cNvPicPr>
+          <p:nvPr/>
+        </p:nvPicPr>
+        <p:blipFill>
+          <a:blip r:embed="rId3"/>
+          <a:stretch>
+            <a:fillRect/>
+          </a:stretch>
+        </p:blipFill>
+        <p:spPr>
+          <a:xfrm>
+            <a:off x="7269480" y="1143000"/>
+            <a:ext cx="4663440" cy="2514600"/>
+          </a:xfrm>
+          <a:prstGeom prst="rect">
+            <a:avLst/>
+          </a:prstGeom>
+        </p:spPr>
+      </p:pic>
+      <p:sp>
+        <p:nvSpPr>
+          <p:cNvPr id="10" name="Rectangle 9"/>
           <p:cNvSpPr/>
           <p:nvPr/>
         </p:nvSpPr>
         <p:spPr>
           <a:xfrm>
-            <a:off x="7269480" y="1143000"/>
-            <a:ext cx="4663440" cy="2560320"/>
-          </a:xfrm>
-          <a:prstGeom prst="rect">
-            <a:avLst/>
-          </a:prstGeom>
-          <a:solidFill>
-            <a:srgbClr val="F2F4F8"/>
-          </a:solidFill>
-          <a:ln w="6350">
-            <a:solidFill>
-              <a:srgbClr val="D0D8E4"/>
-            </a:solidFill>
-          </a:ln>
-        </p:spPr>
-        <p:style>
-          <a:lnRef idx="1">
-            <a:schemeClr val="accent1"/>
-          </a:lnRef>
-          <a:fillRef idx="3">
-            <a:schemeClr val="accent1"/>
-          </a:fillRef>
-          <a:effectRef idx="2">
-            <a:schemeClr val="accent1"/>
-          </a:effectRef>
-          <a:fontRef idx="minor">
-            <a:schemeClr val="lt1"/>
-          </a:fontRef>
-        </p:style>
-        <p:txBody>
-          <a:bodyPr rtlCol="0" anchor="ctr"/>
-          <a:lstStyle/>
-          <a:p>
-            <a:pPr algn="ctr"/>
-          </a:p>
-        </p:txBody>
-      </p:sp>
-      <p:sp>
-        <p:nvSpPr>
-          <p:cNvPr id="12" name="TextBox 11"/>
-          <p:cNvSpPr txBox="1"/>
-          <p:nvPr/>
-        </p:nvSpPr>
-        <p:spPr>
-          <a:xfrm>
-            <a:off x="7360920" y="1234440"/>
-            <a:ext cx="4480560" cy="2560320"/>
-          </a:xfrm>
-          <a:prstGeom prst="rect">
-            <a:avLst/>
-          </a:prstGeom>
-          <a:noFill/>
-        </p:spPr>
-        <p:txBody>
-          <a:bodyPr wrap="square">
-            <a:spAutoFit/>
-          </a:bodyPr>
-          <a:lstStyle/>
-          <a:p>
-            <a:pPr algn="ctr">
-              <a:spcAft>
-                <a:spcPts val="0"/>
-              </a:spcAft>
-            </a:pPr>
-            <a:r>
-              <a:rPr sz="1100" b="0" i="0">
-                <a:solidFill>
-                  <a:srgbClr val="555555"/>
-                </a:solidFill>
-                <a:latin typeface="Calibri"/>
-              </a:rPr>
-              <a:t>[Image not found:
-seasonal_dow.png]</a:t>
-            </a:r>
-          </a:p>
-        </p:txBody>
-      </p:sp>
-      <p:sp>
-        <p:nvSpPr>
-          <p:cNvPr id="13" name="Rectangle 12"/>
-          <p:cNvSpPr/>
-          <p:nvPr/>
-        </p:nvSpPr>
-        <p:spPr>
-          <a:xfrm>
-            <a:off x="7269480" y="3794760"/>
-            <a:ext cx="4663440" cy="2377440"/>
+            <a:off x="7269480" y="3749039"/>
+            <a:ext cx="4663440" cy="2423160"/>
           </a:xfrm>
           <a:prstGeom prst="rect">
             <a:avLst/>
@@ -15484,13 +14427,13 @@
       </p:sp>
       <p:sp>
         <p:nvSpPr>
-          <p:cNvPr id="14" name="Rectangle 13"/>
+          <p:cNvPr id="11" name="Rectangle 10"/>
           <p:cNvSpPr/>
           <p:nvPr/>
         </p:nvSpPr>
         <p:spPr>
           <a:xfrm>
-            <a:off x="7269480" y="3794760"/>
+            <a:off x="7269480" y="3749039"/>
             <a:ext cx="4663440" cy="320040"/>
           </a:xfrm>
           <a:prstGeom prst="rect">
@@ -15527,13 +14470,13 @@
       </p:sp>
       <p:sp>
         <p:nvSpPr>
-          <p:cNvPr id="15" name="TextBox 14"/>
+          <p:cNvPr id="12" name="TextBox 11"/>
           <p:cNvSpPr txBox="1"/>
           <p:nvPr/>
         </p:nvSpPr>
         <p:spPr>
           <a:xfrm>
-            <a:off x="7342632" y="3820160"/>
+            <a:off x="7342632" y="3774439"/>
             <a:ext cx="4572000" cy="320040"/>
           </a:xfrm>
           <a:prstGeom prst="rect">
@@ -15547,33 +14490,29 @@
           </a:bodyPr>
           <a:lstStyle/>
           <a:p>
-            <a:pPr algn="l">
-              <a:spcAft>
-                <a:spcPts val="0"/>
-              </a:spcAft>
-            </a:pPr>
+            <a:pPr algn="l"/>
             <a:r>
               <a:rPr sz="1200" b="1" i="0">
                 <a:solidFill>
                   <a:srgbClr val="FFFFFF"/>
                 </a:solidFill>
-                <a:latin typeface="Calibri"/>
+                <a:latin typeface="Times New Roman"/>
               </a:rPr>
-              <a:t>📌  Kết quả chính</a:t>
-            </a:r>
-          </a:p>
-        </p:txBody>
-      </p:sp>
-      <p:sp>
-        <p:nvSpPr>
-          <p:cNvPr id="16" name="TextBox 15"/>
+              <a:t>Ket qua chinh</a:t>
+            </a:r>
+          </a:p>
+        </p:txBody>
+      </p:sp>
+      <p:sp>
+        <p:nvSpPr>
+          <p:cNvPr id="13" name="TextBox 12"/>
           <p:cNvSpPr txBox="1"/>
           <p:nvPr/>
         </p:nvSpPr>
         <p:spPr>
           <a:xfrm>
-            <a:off x="7315200" y="4160520"/>
-            <a:ext cx="4480560" cy="1920240"/>
+            <a:off x="7315200" y="4114800"/>
+            <a:ext cx="4480560" cy="2011680"/>
           </a:xfrm>
           <a:prstGeom prst="rect">
             <a:avLst/>
@@ -15588,95 +14527,95 @@
           <a:p>
             <a:pPr>
               <a:spcAft>
-                <a:spcPts val="600"/>
+                <a:spcPts val="700"/>
               </a:spcAft>
             </a:pPr>
             <a:r>
-              <a:rPr sz="1250">
+              <a:rPr sz="1300">
                 <a:solidFill>
                   <a:srgbClr val="1A1A1A"/>
                 </a:solidFill>
-                <a:latin typeface="Calibri"/>
+                <a:latin typeface="Times New Roman"/>
               </a:rPr>
-              <a:t>▸  Trend: tăng chậm → sai phân bậc 1 cần thiết</a:t>
+              <a:t>Trend: tang cham -&gt; sai phan bac 1 can thiet</a:t>
             </a:r>
           </a:p>
           <a:p>
             <a:pPr>
               <a:spcAft>
-                <a:spcPts val="600"/>
+                <a:spcPts val="700"/>
               </a:spcAft>
             </a:pPr>
             <a:r>
-              <a:rPr sz="1250">
+              <a:rPr sz="1300">
                 <a:solidFill>
                   <a:srgbClr val="1A1A1A"/>
                 </a:solidFill>
-                <a:latin typeface="Calibri"/>
+                <a:latin typeface="Times New Roman"/>
               </a:rPr>
-              <a:t>▸  Seasonal: biên độ ~0.3 log-unit ≡ 35% thang gốc</a:t>
+              <a:t>Seasonal: bien do ~0.3 log-unit = 35% thang goc</a:t>
             </a:r>
           </a:p>
           <a:p>
             <a:pPr>
               <a:spcAft>
-                <a:spcPts val="600"/>
+                <a:spcPts val="700"/>
               </a:spcAft>
             </a:pPr>
             <a:r>
-              <a:rPr sz="1250">
+              <a:rPr sz="1300">
                 <a:solidFill>
                   <a:srgbClr val="1A1A1A"/>
                 </a:solidFill>
-                <a:latin typeface="Calibri"/>
+                <a:latin typeface="Times New Roman"/>
               </a:rPr>
-              <a:t>▸  Seasonal ổn định → multiplicative → log-transform đúng</a:t>
+              <a:t>Seasonal on dinh -&gt; multiplicative -&gt; log OK</a:t>
             </a:r>
           </a:p>
           <a:p>
             <a:pPr>
               <a:spcAft>
-                <a:spcPts val="600"/>
+                <a:spcPts val="700"/>
               </a:spcAft>
             </a:pPr>
             <a:r>
-              <a:rPr sz="1250">
+              <a:rPr sz="1300">
                 <a:solidFill>
                   <a:srgbClr val="1A1A1A"/>
                 </a:solidFill>
-                <a:latin typeface="Calibri"/>
+                <a:latin typeface="Times New Roman"/>
               </a:rPr>
-              <a:t>▸  Residual: ngẫu nhiên, ngoại trừ spike khuyến mãi</a:t>
+              <a:t>Residual: ngau nhien, ngoai tru spike khuyen mai</a:t>
             </a:r>
           </a:p>
           <a:p>
             <a:pPr>
               <a:spcAft>
-                <a:spcPts val="600"/>
+                <a:spcPts val="700"/>
               </a:spcAft>
             </a:pPr>
             <a:r>
-              <a:rPr sz="1250">
+              <a:rPr sz="1300">
                 <a:solidFill>
                   <a:srgbClr val="1A1A1A"/>
                 </a:solidFill>
-                <a:latin typeface="Calibri"/>
+                <a:latin typeface="Times New Roman"/>
               </a:rPr>
-              <a:t>▸  Kết luận: chọn SARIMA với s = 7</a:t>
-            </a:r>
-          </a:p>
-        </p:txBody>
-      </p:sp>
-      <p:sp>
-        <p:nvSpPr>
-          <p:cNvPr id="17" name="TextBox 16"/>
+              <a:t>Ket luan: chon SARIMA voi s = 7</a:t>
+            </a:r>
+          </a:p>
+        </p:txBody>
+      </p:sp>
+      <p:sp>
+        <p:nvSpPr>
+          <p:cNvPr id="14" name="TextBox 13"/>
           <p:cNvSpPr txBox="1"/>
           <p:nvPr/>
         </p:nvSpPr>
         <p:spPr>
           <a:xfrm>
-            <a:off x="274320" y="5047488"/>
-            <a:ext cx="6858000" cy="274320"/>
+            <a:off x="274320" y="5029200"/>
+            <a:ext cx="6858000" cy="256032"/>
           </a:xfrm>
           <a:prstGeom prst="rect">
             <a:avLst/>
@@ -15689,19 +14628,15 @@
           </a:bodyPr>
           <a:lstStyle/>
           <a:p>
-            <a:pPr algn="l">
-              <a:spcAft>
-                <a:spcPts val="0"/>
-              </a:spcAft>
-            </a:pPr>
-            <a:r>
-              <a:rPr sz="1000" b="0" i="1">
+            <a:pPr algn="l"/>
+            <a:r>
+              <a:rPr sz="900" b="0" i="1">
                 <a:solidFill>
                   <a:srgbClr val="555555"/>
                 </a:solidFill>
-                <a:latin typeface="Calibri"/>
+                <a:latin typeface="Times New Roman"/>
               </a:rPr>
-              <a:t>STL Decomposition của log(1+Sales)  [period=7, robust=True]</a:t>
+              <a:t>STL Decomposition cua log(1+Sales)  [period=7, robust=True]</a:t>
             </a:r>
           </a:p>
         </p:txBody>
@@ -15733,49 +14668,6 @@
         <p:spPr>
           <a:xfrm>
             <a:off x="0" y="0"/>
-            <a:ext cx="12188952" cy="6858000"/>
-          </a:xfrm>
-          <a:prstGeom prst="rect">
-            <a:avLst/>
-          </a:prstGeom>
-          <a:solidFill>
-            <a:srgbClr val="FFFFFF"/>
-          </a:solidFill>
-          <a:ln>
-            <a:noFill/>
-          </a:ln>
-        </p:spPr>
-        <p:style>
-          <a:lnRef idx="1">
-            <a:schemeClr val="accent1"/>
-          </a:lnRef>
-          <a:fillRef idx="3">
-            <a:schemeClr val="accent1"/>
-          </a:fillRef>
-          <a:effectRef idx="2">
-            <a:schemeClr val="accent1"/>
-          </a:effectRef>
-          <a:fontRef idx="minor">
-            <a:schemeClr val="lt1"/>
-          </a:fontRef>
-        </p:style>
-        <p:txBody>
-          <a:bodyPr rtlCol="0" anchor="ctr"/>
-          <a:lstStyle/>
-          <a:p>
-            <a:pPr algn="ctr"/>
-          </a:p>
-        </p:txBody>
-      </p:sp>
-      <p:sp>
-        <p:nvSpPr>
-          <p:cNvPr id="3" name="Rectangle 2"/>
-          <p:cNvSpPr/>
-          <p:nvPr/>
-        </p:nvSpPr>
-        <p:spPr>
-          <a:xfrm>
-            <a:off x="0" y="0"/>
             <a:ext cx="12188952" cy="1005840"/>
           </a:xfrm>
           <a:prstGeom prst="rect">
@@ -15812,7 +14704,7 @@
       </p:sp>
       <p:sp>
         <p:nvSpPr>
-          <p:cNvPr id="4" name="Rectangle 3"/>
+          <p:cNvPr id="3" name="Rectangle 2"/>
           <p:cNvSpPr/>
           <p:nvPr/>
         </p:nvSpPr>
@@ -15855,7 +14747,7 @@
       </p:sp>
       <p:sp>
         <p:nvSpPr>
-          <p:cNvPr id="5" name="TextBox 4"/>
+          <p:cNvPr id="4" name="TextBox 3"/>
           <p:cNvSpPr txBox="1"/>
           <p:nvPr/>
         </p:nvSpPr>
@@ -15875,26 +14767,22 @@
           </a:bodyPr>
           <a:lstStyle/>
           <a:p>
-            <a:pPr algn="l">
-              <a:spcAft>
-                <a:spcPts val="0"/>
-              </a:spcAft>
-            </a:pPr>
+            <a:pPr algn="l"/>
             <a:r>
               <a:rPr sz="2700" b="1" i="0">
                 <a:solidFill>
                   <a:srgbClr val="FFFFFF"/>
                 </a:solidFill>
-                <a:latin typeface="Calibri"/>
+                <a:latin typeface="Times New Roman"/>
               </a:rPr>
-              <a:t>Thống Kê Mô Tả &amp; Biến Đổi Chuỗi</a:t>
-            </a:r>
-          </a:p>
-        </p:txBody>
-      </p:sp>
-      <p:sp>
-        <p:nvSpPr>
-          <p:cNvPr id="6" name="Rectangle 5"/>
+              <a:t>Thong Ke Mo Ta &amp; Bien Doi Chuan</a:t>
+            </a:r>
+          </a:p>
+        </p:txBody>
+      </p:sp>
+      <p:sp>
+        <p:nvSpPr>
+          <p:cNvPr id="5" name="Rectangle 4"/>
           <p:cNvSpPr/>
           <p:nvPr/>
         </p:nvSpPr>
@@ -15937,7 +14825,7 @@
       </p:sp>
       <p:sp>
         <p:nvSpPr>
-          <p:cNvPr id="7" name="TextBox 6"/>
+          <p:cNvPr id="6" name="TextBox 5"/>
           <p:cNvSpPr txBox="1"/>
           <p:nvPr/>
         </p:nvSpPr>
@@ -15957,17 +14845,13 @@
           </a:bodyPr>
           <a:lstStyle/>
           <a:p>
-            <a:pPr algn="l">
-              <a:spcAft>
-                <a:spcPts val="0"/>
-              </a:spcAft>
-            </a:pPr>
+            <a:pPr algn="l"/>
             <a:r>
               <a:rPr sz="900" b="0" i="0">
                 <a:solidFill>
                   <a:srgbClr val="BDD7EE"/>
                 </a:solidFill>
-                <a:latin typeface="Calibri"/>
+                <a:latin typeface="Times New Roman"/>
               </a:rPr>
               <a:t>FreshRetailNet-50K  |  Week 5 Milestone  |  Time Series &amp; Forecasting</a:t>
             </a:r>
@@ -15976,7 +14860,7 @@
       </p:sp>
       <p:sp>
         <p:nvSpPr>
-          <p:cNvPr id="8" name="TextBox 7"/>
+          <p:cNvPr id="7" name="TextBox 6"/>
           <p:cNvSpPr txBox="1"/>
           <p:nvPr/>
         </p:nvSpPr>
@@ -15996,17 +14880,13 @@
           </a:bodyPr>
           <a:lstStyle/>
           <a:p>
-            <a:pPr algn="r">
-              <a:spcAft>
-                <a:spcPts val="0"/>
-              </a:spcAft>
-            </a:pPr>
+            <a:pPr algn="r"/>
             <a:r>
               <a:rPr sz="900" b="1" i="0">
                 <a:solidFill>
                   <a:srgbClr val="FFFFFF"/>
                 </a:solidFill>
-                <a:latin typeface="Calibri"/>
+                <a:latin typeface="Times New Roman"/>
               </a:rPr>
               <a:t>7 / 14</a:t>
             </a:r>
@@ -16015,14 +14895,14 @@
       </p:sp>
       <p:sp>
         <p:nvSpPr>
-          <p:cNvPr id="9" name="Rectangle 8"/>
+          <p:cNvPr id="8" name="Rectangle 7"/>
           <p:cNvSpPr/>
           <p:nvPr/>
         </p:nvSpPr>
         <p:spPr>
           <a:xfrm>
             <a:off x="365760" y="1143000"/>
-            <a:ext cx="4572000" cy="320040"/>
+            <a:ext cx="5029200" cy="320040"/>
           </a:xfrm>
           <a:prstGeom prst="rect">
             <a:avLst/>
@@ -16058,14 +14938,14 @@
       </p:sp>
       <p:sp>
         <p:nvSpPr>
-          <p:cNvPr id="10" name="TextBox 9"/>
+          <p:cNvPr id="9" name="TextBox 8"/>
           <p:cNvSpPr txBox="1"/>
           <p:nvPr/>
         </p:nvSpPr>
         <p:spPr>
           <a:xfrm>
             <a:off x="438912" y="1168400"/>
-            <a:ext cx="4480560" cy="320040"/>
+            <a:ext cx="4937760" cy="320040"/>
           </a:xfrm>
           <a:prstGeom prst="rect">
             <a:avLst/>
@@ -16078,26 +14958,22 @@
           </a:bodyPr>
           <a:lstStyle/>
           <a:p>
-            <a:pPr algn="l">
-              <a:spcAft>
-                <a:spcPts val="0"/>
-              </a:spcAft>
-            </a:pPr>
+            <a:pPr algn="l"/>
             <a:r>
               <a:rPr sz="1200" b="1" i="0">
                 <a:solidFill>
                   <a:srgbClr val="FFFFFF"/>
                 </a:solidFill>
-                <a:latin typeface="Calibri"/>
+                <a:latin typeface="Times New Roman"/>
               </a:rPr>
-              <a:t>📐  Bảng thống kê theo giai đoạn biến đổi</a:t>
+              <a:t>Bang thong ke theo giai doan bien doi</a:t>
             </a:r>
           </a:p>
         </p:txBody>
       </p:sp>
       <p:graphicFrame>
         <p:nvGraphicFramePr>
-          <p:cNvPr id="11" name="Table 10"/>
+          <p:cNvPr id="10" name="Table 9"/>
           <p:cNvGraphicFramePr>
             <a:graphicFrameLocks noGrp="1"/>
           </p:cNvGraphicFramePr>
@@ -16105,7 +14981,7 @@
         </p:nvGraphicFramePr>
         <p:xfrm>
           <a:off x="365760" y="1508760"/>
-          <a:ext cx="10515600" cy="1828800"/>
+          <a:ext cx="11430000" cy="1828800"/>
         </p:xfrm>
         <a:graphic>
           <a:graphicData uri="http://schemas.openxmlformats.org/drawingml/2006/table">
@@ -16118,7 +14994,7 @@
                 <a:gridCol w="1645920"/>
                 <a:gridCol w="1645920"/>
                 <a:gridCol w="2011680"/>
-                <a:gridCol w="2011680"/>
+                <a:gridCol w="2926080"/>
               </a:tblGrid>
               <a:tr h="365760">
                 <a:tc>
@@ -16132,9 +15008,9 @@
                           <a:solidFill>
                             <a:srgbClr val="FFFFFF"/>
                           </a:solidFill>
-                          <a:latin typeface="Calibri"/>
-                        </a:rPr>
-                        <a:t>Chuỗi</a:t>
+                          <a:latin typeface="Times New Roman"/>
+                        </a:rPr>
+                        <a:t>Chuan</a:t>
                       </a:r>
                     </a:p>
                   </a:txBody>
@@ -16155,7 +15031,7 @@
                           <a:solidFill>
                             <a:srgbClr val="FFFFFF"/>
                           </a:solidFill>
-                          <a:latin typeface="Calibri"/>
+                          <a:latin typeface="Times New Roman"/>
                         </a:rPr>
                         <a:t>Mean</a:t>
                       </a:r>
@@ -16178,7 +15054,7 @@
                           <a:solidFill>
                             <a:srgbClr val="FFFFFF"/>
                           </a:solidFill>
-                          <a:latin typeface="Calibri"/>
+                          <a:latin typeface="Times New Roman"/>
                         </a:rPr>
                         <a:t>Std</a:t>
                       </a:r>
@@ -16201,7 +15077,7 @@
                           <a:solidFill>
                             <a:srgbClr val="FFFFFF"/>
                           </a:solidFill>
-                          <a:latin typeface="Calibri"/>
+                          <a:latin typeface="Times New Roman"/>
                         </a:rPr>
                         <a:t>Skewness</a:t>
                       </a:r>
@@ -16224,7 +15100,7 @@
                           <a:solidFill>
                             <a:srgbClr val="FFFFFF"/>
                           </a:solidFill>
-                          <a:latin typeface="Calibri"/>
+                          <a:latin typeface="Times New Roman"/>
                         </a:rPr>
                         <a:t>Kurtosis</a:t>
                       </a:r>
@@ -16249,7 +15125,7 @@
                           <a:solidFill>
                             <a:srgbClr val="1A1A1A"/>
                           </a:solidFill>
-                          <a:latin typeface="Calibri"/>
+                          <a:latin typeface="Times New Roman"/>
                         </a:rPr>
                         <a:t>Raw Sales</a:t>
                       </a:r>
@@ -16272,7 +15148,7 @@
                           <a:solidFill>
                             <a:srgbClr val="1A1A1A"/>
                           </a:solidFill>
-                          <a:latin typeface="Calibri"/>
+                          <a:latin typeface="Times New Roman"/>
                         </a:rPr>
                         <a:t>~63,400</a:t>
                       </a:r>
@@ -16295,7 +15171,7 @@
                           <a:solidFill>
                             <a:srgbClr val="1A1A1A"/>
                           </a:solidFill>
-                          <a:latin typeface="Calibri"/>
+                          <a:latin typeface="Times New Roman"/>
                         </a:rPr>
                         <a:t>~8,200</a:t>
                       </a:r>
@@ -16318,7 +15194,7 @@
                           <a:solidFill>
                             <a:srgbClr val="1A1A1A"/>
                           </a:solidFill>
-                          <a:latin typeface="Calibri"/>
+                          <a:latin typeface="Times New Roman"/>
                         </a:rPr>
                         <a:t>0.42</a:t>
                       </a:r>
@@ -16341,7 +15217,7 @@
                           <a:solidFill>
                             <a:srgbClr val="1A1A1A"/>
                           </a:solidFill>
-                          <a:latin typeface="Calibri"/>
+                          <a:latin typeface="Times New Roman"/>
                         </a:rPr>
                         <a:t>2.81</a:t>
                       </a:r>
@@ -16366,7 +15242,7 @@
                           <a:solidFill>
                             <a:srgbClr val="1A1A1A"/>
                           </a:solidFill>
-                          <a:latin typeface="Calibri"/>
+                          <a:latin typeface="Times New Roman"/>
                         </a:rPr>
                         <a:t>log(1+Sales)</a:t>
                       </a:r>
@@ -16389,7 +15265,7 @@
                           <a:solidFill>
                             <a:srgbClr val="1A1A1A"/>
                           </a:solidFill>
-                          <a:latin typeface="Calibri"/>
+                          <a:latin typeface="Times New Roman"/>
                         </a:rPr>
                         <a:t>11.06</a:t>
                       </a:r>
@@ -16412,7 +15288,7 @@
                           <a:solidFill>
                             <a:srgbClr val="1A1A1A"/>
                           </a:solidFill>
-                          <a:latin typeface="Calibri"/>
+                          <a:latin typeface="Times New Roman"/>
                         </a:rPr>
                         <a:t>0.13</a:t>
                       </a:r>
@@ -16435,7 +15311,7 @@
                           <a:solidFill>
                             <a:srgbClr val="1A1A1A"/>
                           </a:solidFill>
-                          <a:latin typeface="Calibri"/>
+                          <a:latin typeface="Times New Roman"/>
                         </a:rPr>
                         <a:t>0.11</a:t>
                       </a:r>
@@ -16458,7 +15334,7 @@
                           <a:solidFill>
                             <a:srgbClr val="1A1A1A"/>
                           </a:solidFill>
-                          <a:latin typeface="Calibri"/>
+                          <a:latin typeface="Times New Roman"/>
                         </a:rPr>
                         <a:t>2.74</a:t>
                       </a:r>
@@ -16483,7 +15359,7 @@
                           <a:solidFill>
                             <a:srgbClr val="1A1A1A"/>
                           </a:solidFill>
-                          <a:latin typeface="Calibri"/>
+                          <a:latin typeface="Times New Roman"/>
                         </a:rPr>
                         <a:t>∇log  [d=1]</a:t>
                       </a:r>
@@ -16506,7 +15382,7 @@
                           <a:solidFill>
                             <a:srgbClr val="1A1A1A"/>
                           </a:solidFill>
-                          <a:latin typeface="Calibri"/>
+                          <a:latin typeface="Times New Roman"/>
                         </a:rPr>
                         <a:t>≈ 0</a:t>
                       </a:r>
@@ -16529,7 +15405,7 @@
                           <a:solidFill>
                             <a:srgbClr val="1A1A1A"/>
                           </a:solidFill>
-                          <a:latin typeface="Calibri"/>
+                          <a:latin typeface="Times New Roman"/>
                         </a:rPr>
                         <a:t>0.046</a:t>
                       </a:r>
@@ -16552,9 +15428,9 @@
                           <a:solidFill>
                             <a:srgbClr val="1A1A1A"/>
                           </a:solidFill>
-                          <a:latin typeface="Calibri"/>
-                        </a:rPr>
-                        <a:t>−0.08</a:t>
+                          <a:latin typeface="Times New Roman"/>
+                        </a:rPr>
+                        <a:t>-0.08</a:t>
                       </a:r>
                     </a:p>
                   </a:txBody>
@@ -16575,7 +15451,7 @@
                           <a:solidFill>
                             <a:srgbClr val="1A1A1A"/>
                           </a:solidFill>
-                          <a:latin typeface="Calibri"/>
+                          <a:latin typeface="Times New Roman"/>
                         </a:rPr>
                         <a:t>2.90</a:t>
                       </a:r>
@@ -16600,9 +15476,9 @@
                           <a:solidFill>
                             <a:srgbClr val="1A1A1A"/>
                           </a:solidFill>
-                          <a:latin typeface="Calibri"/>
-                        </a:rPr>
-                        <a:t>∇∇₇log  [d=1,D=1]</a:t>
+                          <a:latin typeface="Times New Roman"/>
+                        </a:rPr>
+                        <a:t>∇∇7log [d=1,D=1]</a:t>
                       </a:r>
                     </a:p>
                   </a:txBody>
@@ -16623,7 +15499,7 @@
                           <a:solidFill>
                             <a:srgbClr val="1A1A1A"/>
                           </a:solidFill>
-                          <a:latin typeface="Calibri"/>
+                          <a:latin typeface="Times New Roman"/>
                         </a:rPr>
                         <a:t>≈ 0</a:t>
                       </a:r>
@@ -16646,7 +15522,7 @@
                           <a:solidFill>
                             <a:srgbClr val="1A1A1A"/>
                           </a:solidFill>
-                          <a:latin typeface="Calibri"/>
+                          <a:latin typeface="Times New Roman"/>
                         </a:rPr>
                         <a:t>0.041</a:t>
                       </a:r>
@@ -16669,9 +15545,9 @@
                           <a:solidFill>
                             <a:srgbClr val="1A1A1A"/>
                           </a:solidFill>
-                          <a:latin typeface="Calibri"/>
-                        </a:rPr>
-                        <a:t>−0.05</a:t>
+                          <a:latin typeface="Times New Roman"/>
+                        </a:rPr>
+                        <a:t>-0.05</a:t>
                       </a:r>
                     </a:p>
                   </a:txBody>
@@ -16692,7 +15568,7 @@
                           <a:solidFill>
                             <a:srgbClr val="1A1A1A"/>
                           </a:solidFill>
-                          <a:latin typeface="Calibri"/>
+                          <a:latin typeface="Times New Roman"/>
                         </a:rPr>
                         <a:t>2.85</a:t>
                       </a:r>
@@ -16711,14 +15587,14 @@
       </p:graphicFrame>
       <p:sp>
         <p:nvSpPr>
-          <p:cNvPr id="12" name="Rectangle 11"/>
+          <p:cNvPr id="11" name="Rectangle 10"/>
           <p:cNvSpPr/>
           <p:nvPr/>
         </p:nvSpPr>
         <p:spPr>
           <a:xfrm>
             <a:off x="365760" y="3520440"/>
-            <a:ext cx="2743200" cy="320040"/>
+            <a:ext cx="3200400" cy="320040"/>
           </a:xfrm>
           <a:prstGeom prst="rect">
             <a:avLst/>
@@ -16754,14 +15630,14 @@
       </p:sp>
       <p:sp>
         <p:nvSpPr>
-          <p:cNvPr id="13" name="TextBox 12"/>
+          <p:cNvPr id="12" name="TextBox 11"/>
           <p:cNvSpPr txBox="1"/>
           <p:nvPr/>
         </p:nvSpPr>
         <p:spPr>
           <a:xfrm>
             <a:off x="438912" y="3545840"/>
-            <a:ext cx="2651760" cy="320040"/>
+            <a:ext cx="3108960" cy="320040"/>
           </a:xfrm>
           <a:prstGeom prst="rect">
             <a:avLst/>
@@ -16774,26 +15650,22 @@
           </a:bodyPr>
           <a:lstStyle/>
           <a:p>
-            <a:pPr algn="l">
-              <a:spcAft>
-                <a:spcPts val="0"/>
-              </a:spcAft>
-            </a:pPr>
+            <a:pPr algn="l"/>
             <a:r>
               <a:rPr sz="1200" b="1" i="0">
                 <a:solidFill>
                   <a:srgbClr val="FFFFFF"/>
                 </a:solidFill>
-                <a:latin typeface="Calibri"/>
+                <a:latin typeface="Times New Roman"/>
               </a:rPr>
-              <a:t>✅  Biện giải biến đổi</a:t>
+              <a:t>Bien giai bien doi</a:t>
             </a:r>
           </a:p>
         </p:txBody>
       </p:sp>
       <p:graphicFrame>
         <p:nvGraphicFramePr>
-          <p:cNvPr id="14" name="Table 13"/>
+          <p:cNvPr id="13" name="Table 12"/>
           <p:cNvGraphicFramePr>
             <a:graphicFrameLocks noGrp="1"/>
           </p:cNvGraphicFramePr>
@@ -16825,9 +15697,9 @@
                           <a:solidFill>
                             <a:srgbClr val="FFFFFF"/>
                           </a:solidFill>
-                          <a:latin typeface="Calibri"/>
-                        </a:rPr>
-                        <a:t>Biến đổi</a:t>
+                          <a:latin typeface="Times New Roman"/>
+                        </a:rPr>
+                        <a:t>Bien doi</a:t>
                       </a:r>
                     </a:p>
                   </a:txBody>
@@ -16848,9 +15720,9 @@
                           <a:solidFill>
                             <a:srgbClr val="FFFFFF"/>
                           </a:solidFill>
-                          <a:latin typeface="Calibri"/>
-                        </a:rPr>
-                        <a:t>Lý do</a:t>
+                          <a:latin typeface="Times New Roman"/>
+                        </a:rPr>
+                        <a:t>Ly do</a:t>
                       </a:r>
                     </a:p>
                   </a:txBody>
@@ -16873,7 +15745,7 @@
                           <a:solidFill>
                             <a:srgbClr val="1A1A1A"/>
                           </a:solidFill>
-                          <a:latin typeface="Calibri"/>
+                          <a:latin typeface="Times New Roman"/>
                         </a:rPr>
                         <a:t>log(1+y)</a:t>
                       </a:r>
@@ -16896,9 +15768,9 @@
                           <a:solidFill>
                             <a:srgbClr val="1A1A1A"/>
                           </a:solidFill>
-                          <a:latin typeface="Calibri"/>
-                        </a:rPr>
-                        <a:t>Giảm skewness 0.42 → 0.11; ổn định phương sai; chuyển seasonality nhân → cộng — chuẩn trong retail</a:t>
+                          <a:latin typeface="Times New Roman"/>
+                        </a:rPr>
+                        <a:t>Giam skewness 0.42-&gt;0.11; on dinh phuong sai; chuyen seasonality nhan-&gt;cong</a:t>
                       </a:r>
                     </a:p>
                   </a:txBody>
@@ -16921,9 +15793,9 @@
                           <a:solidFill>
                             <a:srgbClr val="1A1A1A"/>
                           </a:solidFill>
-                          <a:latin typeface="Calibri"/>
-                        </a:rPr>
-                        <a:t>Sai phân d=1</a:t>
+                          <a:latin typeface="Times New Roman"/>
+                        </a:rPr>
+                        <a:t>Sai phan d=1</a:t>
                       </a:r>
                     </a:p>
                   </a:txBody>
@@ -16944,9 +15816,9 @@
                           <a:solidFill>
                             <a:srgbClr val="1A1A1A"/>
                           </a:solidFill>
-                          <a:latin typeface="Calibri"/>
-                        </a:rPr>
-                        <a:t>Loại bỏ trend chậm; xác nhận bởi ADF (p&lt;0.001) và KPSS (p&gt;0.10) sau sai phân</a:t>
+                          <a:latin typeface="Times New Roman"/>
+                        </a:rPr>
+                        <a:t>Loai bo trend; xac nhan boi ADF (p&lt;0.001) va KPSS (p&gt;0.10) sau sai phan</a:t>
                       </a:r>
                     </a:p>
                   </a:txBody>
@@ -16969,9 +15841,9 @@
                           <a:solidFill>
                             <a:srgbClr val="1A1A1A"/>
                           </a:solidFill>
-                          <a:latin typeface="Calibri"/>
-                        </a:rPr>
-                        <a:t>Sai phân D=1, s=7</a:t>
+                          <a:latin typeface="Times New Roman"/>
+                        </a:rPr>
+                        <a:t>Sai phan D=1 s=7</a:t>
                       </a:r>
                     </a:p>
                   </a:txBody>
@@ -16992,9 +15864,9 @@
                           <a:solidFill>
                             <a:srgbClr val="1A1A1A"/>
                           </a:solidFill>
-                          <a:latin typeface="Calibri"/>
-                        </a:rPr>
-                        <a:t>Loại bỏ thành phần chu kỳ tuần; ACF decay chậm tại bội số 7 trên chuỗi chưa seasonal-diff</a:t>
+                          <a:latin typeface="Times New Roman"/>
+                        </a:rPr>
+                        <a:t>Loai bo thanh phan chu ky tuan; ACF decay cham tai boi so 7 tren chuan chua seasonal-diff</a:t>
                       </a:r>
                     </a:p>
                   </a:txBody>
@@ -17178,19 +16050,15 @@
           </a:bodyPr>
           <a:lstStyle/>
           <a:p>
-            <a:pPr algn="l">
-              <a:spcAft>
-                <a:spcPts val="0"/>
-              </a:spcAft>
-            </a:pPr>
+            <a:pPr algn="l"/>
             <a:r>
               <a:rPr sz="2700" b="1" i="0">
                 <a:solidFill>
                   <a:srgbClr val="FFFFFF"/>
                 </a:solidFill>
-                <a:latin typeface="Calibri"/>
+                <a:latin typeface="Times New Roman"/>
               </a:rPr>
-              <a:t>Kiểm Định Tính Dừng</a:t>
+              <a:t>Kiem Dinh Tinh Dung</a:t>
             </a:r>
           </a:p>
         </p:txBody>
@@ -17204,7 +16072,7 @@
         <p:spPr>
           <a:xfrm>
             <a:off x="365760" y="640080"/>
-            <a:ext cx="10972800" cy="347472"/>
+            <a:ext cx="10972800" cy="329184"/>
           </a:xfrm>
           <a:prstGeom prst="rect">
             <a:avLst/>
@@ -17217,19 +16085,15 @@
           </a:bodyPr>
           <a:lstStyle/>
           <a:p>
-            <a:pPr algn="l">
-              <a:spcAft>
-                <a:spcPts val="0"/>
-              </a:spcAft>
-            </a:pPr>
+            <a:pPr algn="l"/>
             <a:r>
               <a:rPr sz="1300" b="0" i="0">
                 <a:solidFill>
                   <a:srgbClr val="BDD7EE"/>
                 </a:solidFill>
-                <a:latin typeface="Calibri"/>
+                <a:latin typeface="Times New Roman"/>
               </a:rPr>
-              <a:t>ADF (H₀: unit root)  &amp;  KPSS (H₀: stationary)</a:t>
+              <a:t>ADF (H0: unit root)  &amp;  KPSS (H0: stationary)</a:t>
             </a:r>
           </a:p>
         </p:txBody>
@@ -17299,17 +16163,13 @@
           </a:bodyPr>
           <a:lstStyle/>
           <a:p>
-            <a:pPr algn="l">
-              <a:spcAft>
-                <a:spcPts val="0"/>
-              </a:spcAft>
-            </a:pPr>
+            <a:pPr algn="l"/>
             <a:r>
               <a:rPr sz="900" b="0" i="0">
                 <a:solidFill>
                   <a:srgbClr val="BDD7EE"/>
                 </a:solidFill>
-                <a:latin typeface="Calibri"/>
+                <a:latin typeface="Times New Roman"/>
               </a:rPr>
               <a:t>FreshRetailNet-50K  |  Week 5 Milestone  |  Time Series &amp; Forecasting</a:t>
             </a:r>
@@ -17338,17 +16198,13 @@
           </a:bodyPr>
           <a:lstStyle/>
           <a:p>
-            <a:pPr algn="r">
-              <a:spcAft>
-                <a:spcPts val="0"/>
-              </a:spcAft>
-            </a:pPr>
+            <a:pPr algn="r"/>
             <a:r>
               <a:rPr sz="900" b="1" i="0">
                 <a:solidFill>
                   <a:srgbClr val="FFFFFF"/>
                 </a:solidFill>
-                <a:latin typeface="Calibri"/>
+                <a:latin typeface="Times New Roman"/>
               </a:rPr>
               <a:t>8 / 14</a:t>
             </a:r>
@@ -17420,19 +16276,15 @@
           </a:bodyPr>
           <a:lstStyle/>
           <a:p>
-            <a:pPr algn="l">
-              <a:spcAft>
-                <a:spcPts val="0"/>
-              </a:spcAft>
-            </a:pPr>
+            <a:pPr algn="l"/>
             <a:r>
               <a:rPr sz="1200" b="1" i="0">
                 <a:solidFill>
                   <a:srgbClr val="FFFFFF"/>
                 </a:solidFill>
-                <a:latin typeface="Calibri"/>
+                <a:latin typeface="Times New Roman"/>
               </a:rPr>
-              <a:t>Augmented Dickey-Fuller Test</a:t>
+              <a:t>ADF Test</a:t>
             </a:r>
           </a:p>
         </p:txBody>
@@ -17447,7 +16299,7 @@
         </p:nvGraphicFramePr>
         <p:xfrm>
           <a:off x="365760" y="1508760"/>
-          <a:ext cx="11430000" cy="1463040"/>
+          <a:ext cx="11430000" cy="1417320"/>
         </p:xfrm>
         <a:graphic>
           <a:graphicData uri="http://schemas.openxmlformats.org/drawingml/2006/table">
@@ -17461,7 +16313,7 @@
                 <a:gridCol w="1645920"/>
                 <a:gridCol w="3840480"/>
               </a:tblGrid>
-              <a:tr h="365760">
+              <a:tr h="354330">
                 <a:tc>
                   <a:txBody>
                     <a:bodyPr/>
@@ -17473,9 +16325,9 @@
                           <a:solidFill>
                             <a:srgbClr val="FFFFFF"/>
                           </a:solidFill>
-                          <a:latin typeface="Calibri"/>
-                        </a:rPr>
-                        <a:t>Chuỗi</a:t>
+                          <a:latin typeface="Times New Roman"/>
+                        </a:rPr>
+                        <a:t>Chuan</a:t>
                       </a:r>
                     </a:p>
                   </a:txBody>
@@ -17496,9 +16348,9 @@
                           <a:solidFill>
                             <a:srgbClr val="FFFFFF"/>
                           </a:solidFill>
-                          <a:latin typeface="Calibri"/>
-                        </a:rPr>
-                        <a:t>ADF Statistic</a:t>
+                          <a:latin typeface="Times New Roman"/>
+                        </a:rPr>
+                        <a:t>ADF Stat</a:t>
                       </a:r>
                     </a:p>
                   </a:txBody>
@@ -17519,7 +16371,7 @@
                           <a:solidFill>
                             <a:srgbClr val="FFFFFF"/>
                           </a:solidFill>
-                          <a:latin typeface="Calibri"/>
+                          <a:latin typeface="Times New Roman"/>
                         </a:rPr>
                         <a:t>p-value</a:t>
                       </a:r>
@@ -17542,9 +16394,9 @@
                           <a:solidFill>
                             <a:srgbClr val="FFFFFF"/>
                           </a:solidFill>
-                          <a:latin typeface="Calibri"/>
-                        </a:rPr>
-                        <a:t>Kết luận</a:t>
+                          <a:latin typeface="Times New Roman"/>
+                        </a:rPr>
+                        <a:t>Ket luan</a:t>
                       </a:r>
                     </a:p>
                   </a:txBody>
@@ -17555,7 +16407,7 @@
                   </a:tcPr>
                 </a:tc>
               </a:tr>
-              <a:tr h="365760">
+              <a:tr h="354330">
                 <a:tc>
                   <a:txBody>
                     <a:bodyPr/>
@@ -17567,9 +16419,9 @@
                           <a:solidFill>
                             <a:srgbClr val="1A1A1A"/>
                           </a:solidFill>
-                          <a:latin typeface="Calibri"/>
-                        </a:rPr>
-                        <a:t>log(1+Sales) — Level</a:t>
+                          <a:latin typeface="Times New Roman"/>
+                        </a:rPr>
+                        <a:t>log(1+Sales) - Level</a:t>
                       </a:r>
                     </a:p>
                   </a:txBody>
@@ -17590,9 +16442,9 @@
                           <a:solidFill>
                             <a:srgbClr val="1A1A1A"/>
                           </a:solidFill>
-                          <a:latin typeface="Calibri"/>
-                        </a:rPr>
-                        <a:t>−2.31</a:t>
+                          <a:latin typeface="Times New Roman"/>
+                        </a:rPr>
+                        <a:t>-2.31</a:t>
                       </a:r>
                     </a:p>
                   </a:txBody>
@@ -17613,7 +16465,7 @@
                           <a:solidFill>
                             <a:srgbClr val="1A1A1A"/>
                           </a:solidFill>
-                          <a:latin typeface="Calibri"/>
+                          <a:latin typeface="Times New Roman"/>
                         </a:rPr>
                         <a:t>0.168</a:t>
                       </a:r>
@@ -17636,9 +16488,9 @@
                           <a:solidFill>
                             <a:srgbClr val="C0392B"/>
                           </a:solidFill>
-                          <a:latin typeface="Calibri"/>
-                        </a:rPr>
-                        <a:t>Non-stationary ✗</a:t>
+                          <a:latin typeface="Times New Roman"/>
+                        </a:rPr>
+                        <a:t>Non-stationary</a:t>
                       </a:r>
                     </a:p>
                   </a:txBody>
@@ -17649,7 +16501,7 @@
                   </a:tcPr>
                 </a:tc>
               </a:tr>
-              <a:tr h="365760">
+              <a:tr h="354330">
                 <a:tc>
                   <a:txBody>
                     <a:bodyPr/>
@@ -17661,9 +16513,9 @@
                           <a:solidFill>
                             <a:srgbClr val="1A1A1A"/>
                           </a:solidFill>
-                          <a:latin typeface="Calibri"/>
-                        </a:rPr>
-                        <a:t>∇log — d=1</a:t>
+                          <a:latin typeface="Times New Roman"/>
+                        </a:rPr>
+                        <a:t>∇log - d=1</a:t>
                       </a:r>
                     </a:p>
                   </a:txBody>
@@ -17684,9 +16536,9 @@
                           <a:solidFill>
                             <a:srgbClr val="1A1A1A"/>
                           </a:solidFill>
-                          <a:latin typeface="Calibri"/>
-                        </a:rPr>
-                        <a:t>−8.74</a:t>
+                          <a:latin typeface="Times New Roman"/>
+                        </a:rPr>
+                        <a:t>-8.74</a:t>
                       </a:r>
                     </a:p>
                   </a:txBody>
@@ -17707,7 +16559,7 @@
                           <a:solidFill>
                             <a:srgbClr val="1A1A1A"/>
                           </a:solidFill>
-                          <a:latin typeface="Calibri"/>
+                          <a:latin typeface="Times New Roman"/>
                         </a:rPr>
                         <a:t>&lt;0.001</a:t>
                       </a:r>
@@ -17730,9 +16582,9 @@
                           <a:solidFill>
                             <a:srgbClr val="1A7A4A"/>
                           </a:solidFill>
-                          <a:latin typeface="Calibri"/>
-                        </a:rPr>
-                        <a:t>Stationary ✓</a:t>
+                          <a:latin typeface="Times New Roman"/>
+                        </a:rPr>
+                        <a:t>Stationary</a:t>
                       </a:r>
                     </a:p>
                   </a:txBody>
@@ -17743,7 +16595,7 @@
                   </a:tcPr>
                 </a:tc>
               </a:tr>
-              <a:tr h="365760">
+              <a:tr h="354330">
                 <a:tc>
                   <a:txBody>
                     <a:bodyPr/>
@@ -17755,9 +16607,9 @@
                           <a:solidFill>
                             <a:srgbClr val="1A1A1A"/>
                           </a:solidFill>
-                          <a:latin typeface="Calibri"/>
-                        </a:rPr>
-                        <a:t>∇∇₇log — d=1,D=1</a:t>
+                          <a:latin typeface="Times New Roman"/>
+                        </a:rPr>
+                        <a:t>∇∇7log - d=1,D=1</a:t>
                       </a:r>
                     </a:p>
                   </a:txBody>
@@ -17778,9 +16630,9 @@
                           <a:solidFill>
                             <a:srgbClr val="1A1A1A"/>
                           </a:solidFill>
-                          <a:latin typeface="Calibri"/>
-                        </a:rPr>
-                        <a:t>−6.12</a:t>
+                          <a:latin typeface="Times New Roman"/>
+                        </a:rPr>
+                        <a:t>-6.12</a:t>
                       </a:r>
                     </a:p>
                   </a:txBody>
@@ -17801,7 +16653,7 @@
                           <a:solidFill>
                             <a:srgbClr val="1A1A1A"/>
                           </a:solidFill>
-                          <a:latin typeface="Calibri"/>
+                          <a:latin typeface="Times New Roman"/>
                         </a:rPr>
                         <a:t>&lt;0.001</a:t>
                       </a:r>
@@ -17824,9 +16676,9 @@
                           <a:solidFill>
                             <a:srgbClr val="1A7A4A"/>
                           </a:solidFill>
-                          <a:latin typeface="Calibri"/>
-                        </a:rPr>
-                        <a:t>Stationary ✓</a:t>
+                          <a:latin typeface="Times New Roman"/>
+                        </a:rPr>
+                        <a:t>Stationary</a:t>
                       </a:r>
                     </a:p>
                   </a:txBody>
@@ -17849,7 +16701,7 @@
         </p:nvSpPr>
         <p:spPr>
           <a:xfrm>
-            <a:off x="365760" y="3154680"/>
+            <a:off x="365760" y="3017520"/>
             <a:ext cx="4114800" cy="320040"/>
           </a:xfrm>
           <a:prstGeom prst="rect">
@@ -17892,7 +16744,7 @@
         </p:nvSpPr>
         <p:spPr>
           <a:xfrm>
-            <a:off x="438912" y="3180080"/>
+            <a:off x="438912" y="3042920"/>
             <a:ext cx="4023360" cy="320040"/>
           </a:xfrm>
           <a:prstGeom prst="rect">
@@ -17906,17 +16758,13 @@
           </a:bodyPr>
           <a:lstStyle/>
           <a:p>
-            <a:pPr algn="l">
-              <a:spcAft>
-                <a:spcPts val="0"/>
-              </a:spcAft>
-            </a:pPr>
+            <a:pPr algn="l"/>
             <a:r>
               <a:rPr sz="1200" b="1" i="0">
                 <a:solidFill>
                   <a:srgbClr val="FFFFFF"/>
                 </a:solidFill>
-                <a:latin typeface="Calibri"/>
+                <a:latin typeface="Times New Roman"/>
               </a:rPr>
               <a:t>KPSS Test</a:t>
             </a:r>
@@ -17932,8 +16780,8 @@
           <p:nvPr/>
         </p:nvGraphicFramePr>
         <p:xfrm>
-          <a:off x="365760" y="3520440"/>
-          <a:ext cx="11430000" cy="1463040"/>
+          <a:off x="365760" y="3383280"/>
+          <a:ext cx="11430000" cy="1417320"/>
         </p:xfrm>
         <a:graphic>
           <a:graphicData uri="http://schemas.openxmlformats.org/drawingml/2006/table">
@@ -17947,7 +16795,7 @@
                 <a:gridCol w="1645920"/>
                 <a:gridCol w="3840480"/>
               </a:tblGrid>
-              <a:tr h="365760">
+              <a:tr h="354330">
                 <a:tc>
                   <a:txBody>
                     <a:bodyPr/>
@@ -17959,9 +16807,9 @@
                           <a:solidFill>
                             <a:srgbClr val="FFFFFF"/>
                           </a:solidFill>
-                          <a:latin typeface="Calibri"/>
-                        </a:rPr>
-                        <a:t>Chuỗi</a:t>
+                          <a:latin typeface="Times New Roman"/>
+                        </a:rPr>
+                        <a:t>Chuan</a:t>
                       </a:r>
                     </a:p>
                   </a:txBody>
@@ -17982,9 +16830,9 @@
                           <a:solidFill>
                             <a:srgbClr val="FFFFFF"/>
                           </a:solidFill>
-                          <a:latin typeface="Calibri"/>
-                        </a:rPr>
-                        <a:t>KPSS Statistic</a:t>
+                          <a:latin typeface="Times New Roman"/>
+                        </a:rPr>
+                        <a:t>KPSS Stat</a:t>
                       </a:r>
                     </a:p>
                   </a:txBody>
@@ -18005,7 +16853,7 @@
                           <a:solidFill>
                             <a:srgbClr val="FFFFFF"/>
                           </a:solidFill>
-                          <a:latin typeface="Calibri"/>
+                          <a:latin typeface="Times New Roman"/>
                         </a:rPr>
                         <a:t>p-value</a:t>
                       </a:r>
@@ -18028,9 +16876,9 @@
                           <a:solidFill>
                             <a:srgbClr val="FFFFFF"/>
                           </a:solidFill>
-                          <a:latin typeface="Calibri"/>
-                        </a:rPr>
-                        <a:t>Kết luận</a:t>
+                          <a:latin typeface="Times New Roman"/>
+                        </a:rPr>
+                        <a:t>Ket luan</a:t>
                       </a:r>
                     </a:p>
                   </a:txBody>
@@ -18041,7 +16889,7 @@
                   </a:tcPr>
                 </a:tc>
               </a:tr>
-              <a:tr h="365760">
+              <a:tr h="354330">
                 <a:tc>
                   <a:txBody>
                     <a:bodyPr/>
@@ -18053,9 +16901,9 @@
                           <a:solidFill>
                             <a:srgbClr val="1A1A1A"/>
                           </a:solidFill>
-                          <a:latin typeface="Calibri"/>
-                        </a:rPr>
-                        <a:t>log(1+Sales) — Level</a:t>
+                          <a:latin typeface="Times New Roman"/>
+                        </a:rPr>
+                        <a:t>log(1+Sales) - Level</a:t>
                       </a:r>
                     </a:p>
                   </a:txBody>
@@ -18076,7 +16924,7 @@
                           <a:solidFill>
                             <a:srgbClr val="1A1A1A"/>
                           </a:solidFill>
-                          <a:latin typeface="Calibri"/>
+                          <a:latin typeface="Times New Roman"/>
                         </a:rPr>
                         <a:t>0.480</a:t>
                       </a:r>
@@ -18099,7 +16947,7 @@
                           <a:solidFill>
                             <a:srgbClr val="1A1A1A"/>
                           </a:solidFill>
-                          <a:latin typeface="Calibri"/>
+                          <a:latin typeface="Times New Roman"/>
                         </a:rPr>
                         <a:t>0.039</a:t>
                       </a:r>
@@ -18122,9 +16970,9 @@
                           <a:solidFill>
                             <a:srgbClr val="C0392B"/>
                           </a:solidFill>
-                          <a:latin typeface="Calibri"/>
-                        </a:rPr>
-                        <a:t>Non-stationary ✗</a:t>
+                          <a:latin typeface="Times New Roman"/>
+                        </a:rPr>
+                        <a:t>Non-stationary</a:t>
                       </a:r>
                     </a:p>
                   </a:txBody>
@@ -18135,7 +16983,7 @@
                   </a:tcPr>
                 </a:tc>
               </a:tr>
-              <a:tr h="365760">
+              <a:tr h="354330">
                 <a:tc>
                   <a:txBody>
                     <a:bodyPr/>
@@ -18147,9 +16995,9 @@
                           <a:solidFill>
                             <a:srgbClr val="1A1A1A"/>
                           </a:solidFill>
-                          <a:latin typeface="Calibri"/>
-                        </a:rPr>
-                        <a:t>∇log — d=1</a:t>
+                          <a:latin typeface="Times New Roman"/>
+                        </a:rPr>
+                        <a:t>∇log - d=1</a:t>
                       </a:r>
                     </a:p>
                   </a:txBody>
@@ -18170,7 +17018,7 @@
                           <a:solidFill>
                             <a:srgbClr val="1A1A1A"/>
                           </a:solidFill>
-                          <a:latin typeface="Calibri"/>
+                          <a:latin typeface="Times New Roman"/>
                         </a:rPr>
                         <a:t>0.083</a:t>
                       </a:r>
@@ -18193,7 +17041,7 @@
                           <a:solidFill>
                             <a:srgbClr val="1A1A1A"/>
                           </a:solidFill>
-                          <a:latin typeface="Calibri"/>
+                          <a:latin typeface="Times New Roman"/>
                         </a:rPr>
                         <a:t>&gt;0.10</a:t>
                       </a:r>
@@ -18216,9 +17064,9 @@
                           <a:solidFill>
                             <a:srgbClr val="1A7A4A"/>
                           </a:solidFill>
-                          <a:latin typeface="Calibri"/>
-                        </a:rPr>
-                        <a:t>Stationary ✓</a:t>
+                          <a:latin typeface="Times New Roman"/>
+                        </a:rPr>
+                        <a:t>Stationary</a:t>
                       </a:r>
                     </a:p>
                   </a:txBody>
@@ -18229,7 +17077,7 @@
                   </a:tcPr>
                 </a:tc>
               </a:tr>
-              <a:tr h="365760">
+              <a:tr h="354330">
                 <a:tc>
                   <a:txBody>
                     <a:bodyPr/>
@@ -18241,9 +17089,9 @@
                           <a:solidFill>
                             <a:srgbClr val="1A1A1A"/>
                           </a:solidFill>
-                          <a:latin typeface="Calibri"/>
-                        </a:rPr>
-                        <a:t>∇∇₇log — d=1,D=1</a:t>
+                          <a:latin typeface="Times New Roman"/>
+                        </a:rPr>
+                        <a:t>∇∇7log - d=1,D=1</a:t>
                       </a:r>
                     </a:p>
                   </a:txBody>
@@ -18264,7 +17112,7 @@
                           <a:solidFill>
                             <a:srgbClr val="1A1A1A"/>
                           </a:solidFill>
-                          <a:latin typeface="Calibri"/>
+                          <a:latin typeface="Times New Roman"/>
                         </a:rPr>
                         <a:t>0.061</a:t>
                       </a:r>
@@ -18287,7 +17135,7 @@
                           <a:solidFill>
                             <a:srgbClr val="1A1A1A"/>
                           </a:solidFill>
-                          <a:latin typeface="Calibri"/>
+                          <a:latin typeface="Times New Roman"/>
                         </a:rPr>
                         <a:t>&gt;0.10</a:t>
                       </a:r>
@@ -18310,9 +17158,9 @@
                           <a:solidFill>
                             <a:srgbClr val="1A7A4A"/>
                           </a:solidFill>
-                          <a:latin typeface="Calibri"/>
-                        </a:rPr>
-                        <a:t>Stationary ✓</a:t>
+                          <a:latin typeface="Times New Roman"/>
+                        </a:rPr>
+                        <a:t>Stationary</a:t>
                       </a:r>
                     </a:p>
                   </a:txBody>
@@ -18327,94 +17175,33 @@
           </a:graphicData>
         </a:graphic>
       </p:graphicFrame>
-      <p:sp>
-        <p:nvSpPr>
-          <p:cNvPr id="16" name="Rectangle 15"/>
-          <p:cNvSpPr/>
-          <p:nvPr/>
-        </p:nvSpPr>
-        <p:spPr>
-          <a:xfrm>
-            <a:off x="365760" y="5074920"/>
-            <a:ext cx="11430000" cy="1143000"/>
-          </a:xfrm>
-          <a:prstGeom prst="rect">
-            <a:avLst/>
-          </a:prstGeom>
-          <a:solidFill>
-            <a:srgbClr val="F2F4F8"/>
-          </a:solidFill>
-          <a:ln w="6350">
-            <a:solidFill>
-              <a:srgbClr val="D0D8E4"/>
-            </a:solidFill>
-          </a:ln>
-        </p:spPr>
-        <p:style>
-          <a:lnRef idx="1">
-            <a:schemeClr val="accent1"/>
-          </a:lnRef>
-          <a:fillRef idx="3">
-            <a:schemeClr val="accent1"/>
-          </a:fillRef>
-          <a:effectRef idx="2">
-            <a:schemeClr val="accent1"/>
-          </a:effectRef>
-          <a:fontRef idx="minor">
-            <a:schemeClr val="lt1"/>
-          </a:fontRef>
-        </p:style>
-        <p:txBody>
-          <a:bodyPr rtlCol="0" anchor="ctr"/>
-          <a:lstStyle/>
-          <a:p>
-            <a:pPr algn="ctr"/>
-          </a:p>
-        </p:txBody>
-      </p:sp>
-      <p:sp>
-        <p:nvSpPr>
-          <p:cNvPr id="17" name="TextBox 16"/>
-          <p:cNvSpPr txBox="1"/>
-          <p:nvPr/>
-        </p:nvSpPr>
-        <p:spPr>
-          <a:xfrm>
-            <a:off x="457200" y="5166360"/>
-            <a:ext cx="11247120" cy="1143000"/>
-          </a:xfrm>
-          <a:prstGeom prst="rect">
-            <a:avLst/>
-          </a:prstGeom>
-          <a:noFill/>
-        </p:spPr>
-        <p:txBody>
-          <a:bodyPr wrap="square">
-            <a:spAutoFit/>
-          </a:bodyPr>
-          <a:lstStyle/>
-          <a:p>
-            <a:pPr algn="ctr">
-              <a:spcAft>
-                <a:spcPts val="0"/>
-              </a:spcAft>
-            </a:pPr>
-            <a:r>
-              <a:rPr sz="1100" b="0" i="0">
-                <a:solidFill>
-                  <a:srgbClr val="555555"/>
-                </a:solidFill>
-                <a:latin typeface="Calibri"/>
-              </a:rPr>
-              <a:t>[Image not found:
-differencing_stages.png]</a:t>
-            </a:r>
-          </a:p>
-        </p:txBody>
-      </p:sp>
-      <p:sp>
-        <p:nvSpPr>
-          <p:cNvPr id="18" name="Rectangle 17"/>
+      <p:pic>
+        <p:nvPicPr>
+          <p:cNvPr id="16" name="Picture 15" descr="image.png"/>
+          <p:cNvPicPr>
+            <a:picLocks noChangeAspect="1"/>
+          </p:cNvPicPr>
+          <p:nvPr/>
+        </p:nvPicPr>
+        <p:blipFill>
+          <a:blip r:embed="rId2"/>
+          <a:stretch>
+            <a:fillRect/>
+          </a:stretch>
+        </p:blipFill>
+        <p:spPr>
+          <a:xfrm>
+            <a:off x="365760" y="4892040"/>
+            <a:ext cx="11430000" cy="1298448"/>
+          </a:xfrm>
+          <a:prstGeom prst="rect">
+            <a:avLst/>
+          </a:prstGeom>
+        </p:spPr>
+      </p:pic>
+      <p:sp>
+        <p:nvSpPr>
+          <p:cNvPr id="17" name="Rectangle 16"/>
           <p:cNvSpPr/>
           <p:nvPr/>
         </p:nvSpPr>
@@ -18457,7 +17244,7 @@
       </p:sp>
       <p:sp>
         <p:nvSpPr>
-          <p:cNvPr id="19" name="TextBox 18"/>
+          <p:cNvPr id="18" name="TextBox 17"/>
           <p:cNvSpPr txBox="1"/>
           <p:nvPr/>
         </p:nvSpPr>
@@ -18477,19 +17264,15 @@
           </a:bodyPr>
           <a:lstStyle/>
           <a:p>
-            <a:pPr algn="l">
-              <a:spcAft>
-                <a:spcPts val="0"/>
-              </a:spcAft>
-            </a:pPr>
+            <a:pPr algn="l"/>
             <a:r>
               <a:rPr sz="1200" b="1" i="0">
                 <a:solidFill>
                   <a:srgbClr val="FFFFFF"/>
                 </a:solidFill>
-                <a:latin typeface="Calibri"/>
+                <a:latin typeface="Times New Roman"/>
               </a:rPr>
-              <a:t>→  Kết luận: Cả hai kiểm định đồng thuận — chọn  d = 1,  D = 1,  s = 7  cho SARIMA</a:t>
+              <a:t>-&gt; Ket luan: d=1, D=1, s=7  |  Ca ADF va KPSS dong thuan</a:t>
             </a:r>
           </a:p>
         </p:txBody>
@@ -18521,49 +17304,6 @@
         <p:spPr>
           <a:xfrm>
             <a:off x="0" y="0"/>
-            <a:ext cx="12188952" cy="6858000"/>
-          </a:xfrm>
-          <a:prstGeom prst="rect">
-            <a:avLst/>
-          </a:prstGeom>
-          <a:solidFill>
-            <a:srgbClr val="FFFFFF"/>
-          </a:solidFill>
-          <a:ln>
-            <a:noFill/>
-          </a:ln>
-        </p:spPr>
-        <p:style>
-          <a:lnRef idx="1">
-            <a:schemeClr val="accent1"/>
-          </a:lnRef>
-          <a:fillRef idx="3">
-            <a:schemeClr val="accent1"/>
-          </a:fillRef>
-          <a:effectRef idx="2">
-            <a:schemeClr val="accent1"/>
-          </a:effectRef>
-          <a:fontRef idx="minor">
-            <a:schemeClr val="lt1"/>
-          </a:fontRef>
-        </p:style>
-        <p:txBody>
-          <a:bodyPr rtlCol="0" anchor="ctr"/>
-          <a:lstStyle/>
-          <a:p>
-            <a:pPr algn="ctr"/>
-          </a:p>
-        </p:txBody>
-      </p:sp>
-      <p:sp>
-        <p:nvSpPr>
-          <p:cNvPr id="3" name="Rectangle 2"/>
-          <p:cNvSpPr/>
-          <p:nvPr/>
-        </p:nvSpPr>
-        <p:spPr>
-          <a:xfrm>
-            <a:off x="0" y="0"/>
             <a:ext cx="12188952" cy="1005840"/>
           </a:xfrm>
           <a:prstGeom prst="rect">
@@ -18600,7 +17340,7 @@
       </p:sp>
       <p:sp>
         <p:nvSpPr>
-          <p:cNvPr id="4" name="Rectangle 3"/>
+          <p:cNvPr id="3" name="Rectangle 2"/>
           <p:cNvSpPr/>
           <p:nvPr/>
         </p:nvSpPr>
@@ -18643,7 +17383,7 @@
       </p:sp>
       <p:sp>
         <p:nvSpPr>
-          <p:cNvPr id="5" name="TextBox 4"/>
+          <p:cNvPr id="4" name="TextBox 3"/>
           <p:cNvSpPr txBox="1"/>
           <p:nvPr/>
         </p:nvSpPr>
@@ -18663,26 +17403,22 @@
           </a:bodyPr>
           <a:lstStyle/>
           <a:p>
-            <a:pPr algn="l">
-              <a:spcAft>
-                <a:spcPts val="0"/>
-              </a:spcAft>
-            </a:pPr>
+            <a:pPr algn="l"/>
             <a:r>
               <a:rPr sz="2700" b="1" i="0">
                 <a:solidFill>
                   <a:srgbClr val="FFFFFF"/>
                 </a:solidFill>
-                <a:latin typeface="Calibri"/>
+                <a:latin typeface="Times New Roman"/>
               </a:rPr>
-              <a:t>ACF &amp; PACF — Xác Định Order Mô Hình</a:t>
-            </a:r>
-          </a:p>
-        </p:txBody>
-      </p:sp>
-      <p:sp>
-        <p:nvSpPr>
-          <p:cNvPr id="6" name="Rectangle 5"/>
+              <a:t>ACF &amp; PACF — Xac Dinh Order Mo Hinh</a:t>
+            </a:r>
+          </a:p>
+        </p:txBody>
+      </p:sp>
+      <p:sp>
+        <p:nvSpPr>
+          <p:cNvPr id="5" name="Rectangle 4"/>
           <p:cNvSpPr/>
           <p:nvPr/>
         </p:nvSpPr>
@@ -18725,7 +17461,7 @@
       </p:sp>
       <p:sp>
         <p:nvSpPr>
-          <p:cNvPr id="7" name="TextBox 6"/>
+          <p:cNvPr id="6" name="TextBox 5"/>
           <p:cNvSpPr txBox="1"/>
           <p:nvPr/>
         </p:nvSpPr>
@@ -18745,17 +17481,13 @@
           </a:bodyPr>
           <a:lstStyle/>
           <a:p>
-            <a:pPr algn="l">
-              <a:spcAft>
-                <a:spcPts val="0"/>
-              </a:spcAft>
-            </a:pPr>
+            <a:pPr algn="l"/>
             <a:r>
               <a:rPr sz="900" b="0" i="0">
                 <a:solidFill>
                   <a:srgbClr val="BDD7EE"/>
                 </a:solidFill>
-                <a:latin typeface="Calibri"/>
+                <a:latin typeface="Times New Roman"/>
               </a:rPr>
               <a:t>FreshRetailNet-50K  |  Week 5 Milestone  |  Time Series &amp; Forecasting</a:t>
             </a:r>
@@ -18764,7 +17496,7 @@
       </p:sp>
       <p:sp>
         <p:nvSpPr>
-          <p:cNvPr id="8" name="TextBox 7"/>
+          <p:cNvPr id="7" name="TextBox 6"/>
           <p:cNvSpPr txBox="1"/>
           <p:nvPr/>
         </p:nvSpPr>
@@ -18784,17 +17516,13 @@
           </a:bodyPr>
           <a:lstStyle/>
           <a:p>
-            <a:pPr algn="r">
-              <a:spcAft>
-                <a:spcPts val="0"/>
-              </a:spcAft>
-            </a:pPr>
+            <a:pPr algn="r"/>
             <a:r>
               <a:rPr sz="900" b="1" i="0">
                 <a:solidFill>
                   <a:srgbClr val="FFFFFF"/>
                 </a:solidFill>
-                <a:latin typeface="Calibri"/>
+                <a:latin typeface="Times New Roman"/>
               </a:rPr>
               <a:t>9 / 14</a:t>
             </a:r>
@@ -18803,14 +17531,14 @@
       </p:sp>
       <p:sp>
         <p:nvSpPr>
-          <p:cNvPr id="9" name="Rectangle 8"/>
+          <p:cNvPr id="8" name="Rectangle 7"/>
           <p:cNvSpPr/>
           <p:nvPr/>
         </p:nvSpPr>
         <p:spPr>
           <a:xfrm>
             <a:off x="365760" y="1143000"/>
-            <a:ext cx="4114800" cy="320040"/>
+            <a:ext cx="4572000" cy="320040"/>
           </a:xfrm>
           <a:prstGeom prst="rect">
             <a:avLst/>
@@ -18846,14 +17574,14 @@
       </p:sp>
       <p:sp>
         <p:nvSpPr>
-          <p:cNvPr id="10" name="TextBox 9"/>
+          <p:cNvPr id="9" name="TextBox 8"/>
           <p:cNvSpPr txBox="1"/>
           <p:nvPr/>
         </p:nvSpPr>
         <p:spPr>
           <a:xfrm>
             <a:off x="438912" y="1168400"/>
-            <a:ext cx="4023360" cy="320040"/>
+            <a:ext cx="4480560" cy="320040"/>
           </a:xfrm>
           <a:prstGeom prst="rect">
             <a:avLst/>
@@ -18866,26 +17594,22 @@
           </a:bodyPr>
           <a:lstStyle/>
           <a:p>
-            <a:pPr algn="l">
-              <a:spcAft>
-                <a:spcPts val="0"/>
-              </a:spcAft>
-            </a:pPr>
+            <a:pPr algn="l"/>
             <a:r>
               <a:rPr sz="1200" b="1" i="0">
                 <a:solidFill>
                   <a:srgbClr val="FFFFFF"/>
                 </a:solidFill>
-                <a:latin typeface="Calibri"/>
+                <a:latin typeface="Times New Roman"/>
               </a:rPr>
-              <a:t>📈  Diễn giải ACF/PACF theo giai đoạn</a:t>
+              <a:t>Dien giai ACF/PACF theo giai doan</a:t>
             </a:r>
           </a:p>
         </p:txBody>
       </p:sp>
       <p:graphicFrame>
         <p:nvGraphicFramePr>
-          <p:cNvPr id="11" name="Table 10"/>
+          <p:cNvPr id="10" name="Table 9"/>
           <p:cNvGraphicFramePr>
             <a:graphicFrameLocks noGrp="1"/>
           </p:cNvGraphicFramePr>
@@ -18902,10 +17626,10 @@
                 <a:tableStyleId>{5C22544A-7EE6-4342-B048-85BDC9FD1C3A}</a:tableStyleId>
               </a:tblPr>
               <a:tblGrid>
+                <a:gridCol w="2743200"/>
                 <a:gridCol w="2926080"/>
-                <a:gridCol w="2834640"/>
                 <a:gridCol w="2560320"/>
-                <a:gridCol w="3108960"/>
+                <a:gridCol w="3200400"/>
               </a:tblGrid>
               <a:tr h="422910">
                 <a:tc>
@@ -18919,9 +17643,9 @@
                           <a:solidFill>
                             <a:srgbClr val="FFFFFF"/>
                           </a:solidFill>
-                          <a:latin typeface="Calibri"/>
-                        </a:rPr>
-                        <a:t>Chuỗi</a:t>
+                          <a:latin typeface="Times New Roman"/>
+                        </a:rPr>
+                        <a:t>Chuan</a:t>
                       </a:r>
                     </a:p>
                   </a:txBody>
@@ -18942,7 +17666,7 @@
                           <a:solidFill>
                             <a:srgbClr val="FFFFFF"/>
                           </a:solidFill>
-                          <a:latin typeface="Calibri"/>
+                          <a:latin typeface="Times New Roman"/>
                         </a:rPr>
                         <a:t>ACF pattern</a:t>
                       </a:r>
@@ -18965,7 +17689,7 @@
                           <a:solidFill>
                             <a:srgbClr val="FFFFFF"/>
                           </a:solidFill>
-                          <a:latin typeface="Calibri"/>
+                          <a:latin typeface="Times New Roman"/>
                         </a:rPr>
                         <a:t>PACF pattern</a:t>
                       </a:r>
@@ -18988,9 +17712,9 @@
                           <a:solidFill>
                             <a:srgbClr val="FFFFFF"/>
                           </a:solidFill>
-                          <a:latin typeface="Calibri"/>
-                        </a:rPr>
-                        <a:t>Kết luận</a:t>
+                          <a:latin typeface="Times New Roman"/>
+                        </a:rPr>
+                        <a:t>Ket luan</a:t>
                       </a:r>
                     </a:p>
                   </a:txBody>
@@ -19013,9 +17737,9 @@
                           <a:solidFill>
                             <a:srgbClr val="1A1A1A"/>
                           </a:solidFill>
-                          <a:latin typeface="Calibri"/>
-                        </a:rPr>
-                        <a:t>log(1+Sales) — Level</a:t>
+                          <a:latin typeface="Times New Roman"/>
+                        </a:rPr>
+                        <a:t>Level log-sales</a:t>
                       </a:r>
                     </a:p>
                   </a:txBody>
@@ -19036,9 +17760,9 @@
                           <a:solidFill>
                             <a:srgbClr val="1A1A1A"/>
                           </a:solidFill>
-                          <a:latin typeface="Calibri"/>
-                        </a:rPr>
-                        <a:t>Decay chậm dương</a:t>
+                          <a:latin typeface="Times New Roman"/>
+                        </a:rPr>
+                        <a:t>Decay cham duong</a:t>
                       </a:r>
                     </a:p>
                   </a:txBody>
@@ -19059,9 +17783,9 @@
                           <a:solidFill>
                             <a:srgbClr val="1A1A1A"/>
                           </a:solidFill>
-                          <a:latin typeface="Calibri"/>
-                        </a:rPr>
-                        <a:t>Cắt sau lag 1</a:t>
+                          <a:latin typeface="Times New Roman"/>
+                        </a:rPr>
+                        <a:t>Cat sau lag 1</a:t>
                       </a:r>
                     </a:p>
                   </a:txBody>
@@ -19082,9 +17806,9 @@
                           <a:solidFill>
                             <a:srgbClr val="1A1A1A"/>
                           </a:solidFill>
-                          <a:latin typeface="Calibri"/>
-                        </a:rPr>
-                        <a:t>Non-stationary → d=1</a:t>
+                          <a:latin typeface="Times New Roman"/>
+                        </a:rPr>
+                        <a:t>Non-stationary -&gt; d=1</a:t>
                       </a:r>
                     </a:p>
                   </a:txBody>
@@ -19107,9 +17831,9 @@
                           <a:solidFill>
                             <a:srgbClr val="1A1A1A"/>
                           </a:solidFill>
-                          <a:latin typeface="Calibri"/>
-                        </a:rPr>
-                        <a:t>∇log — d=1</a:t>
+                          <a:latin typeface="Times New Roman"/>
+                        </a:rPr>
+                        <a:t>∇log - d=1</a:t>
                       </a:r>
                     </a:p>
                   </a:txBody>
@@ -19130,9 +17854,9 @@
                           <a:solidFill>
                             <a:srgbClr val="1A1A1A"/>
                           </a:solidFill>
-                          <a:latin typeface="Calibri"/>
-                        </a:rPr>
-                        <a:t>Spike lag 1 &amp; 7; seasonal decay</a:t>
+                          <a:latin typeface="Times New Roman"/>
+                        </a:rPr>
+                        <a:t>Spike lag 1 &amp; 7; seasonal</a:t>
                       </a:r>
                     </a:p>
                   </a:txBody>
@@ -19153,7 +17877,7 @@
                           <a:solidFill>
                             <a:srgbClr val="1A1A1A"/>
                           </a:solidFill>
-                          <a:latin typeface="Calibri"/>
+                          <a:latin typeface="Times New Roman"/>
                         </a:rPr>
                         <a:t>Spike lag 1 &amp; 7</a:t>
                       </a:r>
@@ -19176,9 +17900,9 @@
                           <a:solidFill>
                             <a:srgbClr val="1A1A1A"/>
                           </a:solidFill>
-                          <a:latin typeface="Calibri"/>
-                        </a:rPr>
-                        <a:t>Cần cả AR và MA mùa</a:t>
+                          <a:latin typeface="Times New Roman"/>
+                        </a:rPr>
+                        <a:t>Can AR &amp; MA mua</a:t>
                       </a:r>
                     </a:p>
                   </a:txBody>
@@ -19201,9 +17925,9 @@
                           <a:solidFill>
                             <a:srgbClr val="1A1A1A"/>
                           </a:solidFill>
-                          <a:latin typeface="Calibri"/>
-                        </a:rPr>
-                        <a:t>∇∇₇log — d=1,D=1</a:t>
+                          <a:latin typeface="Times New Roman"/>
+                        </a:rPr>
+                        <a:t>∇∇7log - d=1,D=1</a:t>
                       </a:r>
                     </a:p>
                   </a:txBody>
@@ -19224,9 +17948,9 @@
                           <a:solidFill>
                             <a:srgbClr val="1A1A1A"/>
                           </a:solidFill>
-                          <a:latin typeface="Calibri"/>
-                        </a:rPr>
-                        <a:t>1 spike lag 1; 1 spike lag 7</a:t>
+                          <a:latin typeface="Times New Roman"/>
+                        </a:rPr>
+                        <a:t>1 spike lag 1; 1 spike 7</a:t>
                       </a:r>
                     </a:p>
                   </a:txBody>
@@ -19247,7 +17971,7 @@
                           <a:solidFill>
                             <a:srgbClr val="1A1A1A"/>
                           </a:solidFill>
-                          <a:latin typeface="Calibri"/>
+                          <a:latin typeface="Times New Roman"/>
                         </a:rPr>
                         <a:t>1 spike lag 1</a:t>
                       </a:r>
@@ -19270,9 +17994,9 @@
                           <a:solidFill>
                             <a:srgbClr val="1A1A1A"/>
                           </a:solidFill>
-                          <a:latin typeface="Calibri"/>
-                        </a:rPr>
-                        <a:t>→ SARIMA(1,1,1)(0,1,1,7)</a:t>
+                          <a:latin typeface="Times New Roman"/>
+                        </a:rPr>
+                        <a:t>-&gt; SARIMA(1,1,1)(0,1,1,7)</a:t>
                       </a:r>
                     </a:p>
                   </a:txBody>
@@ -19289,14 +18013,14 @@
       </p:graphicFrame>
       <p:sp>
         <p:nvSpPr>
-          <p:cNvPr id="12" name="Rectangle 11"/>
+          <p:cNvPr id="11" name="Rectangle 10"/>
           <p:cNvSpPr/>
           <p:nvPr/>
         </p:nvSpPr>
         <p:spPr>
           <a:xfrm>
-            <a:off x="365760" y="3337560"/>
-            <a:ext cx="11430000" cy="1417320"/>
+            <a:off x="365760" y="3291840"/>
+            <a:ext cx="11430000" cy="1371600"/>
           </a:xfrm>
           <a:prstGeom prst="rect">
             <a:avLst/>
@@ -19332,14 +18056,14 @@
       </p:sp>
       <p:sp>
         <p:nvSpPr>
-          <p:cNvPr id="13" name="Rectangle 12"/>
+          <p:cNvPr id="12" name="Rectangle 11"/>
           <p:cNvSpPr/>
           <p:nvPr/>
         </p:nvSpPr>
         <p:spPr>
           <a:xfrm>
-            <a:off x="365760" y="3337560"/>
-            <a:ext cx="64008" cy="1417320"/>
+            <a:off x="365760" y="3291840"/>
+            <a:ext cx="64008" cy="1371600"/>
           </a:xfrm>
           <a:prstGeom prst="rect">
             <a:avLst/>
@@ -19375,14 +18099,14 @@
       </p:sp>
       <p:sp>
         <p:nvSpPr>
-          <p:cNvPr id="14" name="TextBox 13"/>
+          <p:cNvPr id="13" name="TextBox 12"/>
           <p:cNvSpPr txBox="1"/>
           <p:nvPr/>
         </p:nvSpPr>
         <p:spPr>
           <a:xfrm>
-            <a:off x="548640" y="3401568"/>
-            <a:ext cx="10972800" cy="347472"/>
+            <a:off x="548640" y="3355848"/>
+            <a:ext cx="10972800" cy="329184"/>
           </a:xfrm>
           <a:prstGeom prst="rect">
             <a:avLst/>
@@ -19395,33 +18119,29 @@
           </a:bodyPr>
           <a:lstStyle/>
           <a:p>
-            <a:pPr algn="l">
-              <a:spcAft>
-                <a:spcPts val="0"/>
-              </a:spcAft>
-            </a:pPr>
+            <a:pPr algn="l"/>
             <a:r>
               <a:rPr sz="1300" b="1" i="0">
                 <a:solidFill>
                   <a:srgbClr val="1F4E79"/>
                 </a:solidFill>
-                <a:latin typeface="Calibri"/>
+                <a:latin typeface="Times New Roman"/>
               </a:rPr>
-              <a:t>📌  Cách đọc ACF/PACF → SARIMA order</a:t>
-            </a:r>
-          </a:p>
-        </p:txBody>
-      </p:sp>
-      <p:sp>
-        <p:nvSpPr>
-          <p:cNvPr id="15" name="TextBox 14"/>
+              <a:t>Cach doc ACF/PACF -&gt; SARIMA order:</a:t>
+            </a:r>
+          </a:p>
+        </p:txBody>
+      </p:sp>
+      <p:sp>
+        <p:nvSpPr>
+          <p:cNvPr id="14" name="TextBox 13"/>
           <p:cNvSpPr txBox="1"/>
           <p:nvPr/>
         </p:nvSpPr>
         <p:spPr>
           <a:xfrm>
-            <a:off x="548640" y="3749039"/>
-            <a:ext cx="11155680" cy="1005840"/>
+            <a:off x="548640" y="3703320"/>
+            <a:ext cx="11155680" cy="914400"/>
           </a:xfrm>
           <a:prstGeom prst="rect">
             <a:avLst/>
@@ -19444,9 +18164,9 @@
                 <a:solidFill>
                   <a:srgbClr val="1A1A1A"/>
                 </a:solidFill>
-                <a:latin typeface="Calibri"/>
+                <a:latin typeface="Times New Roman"/>
               </a:rPr>
-              <a:t>▸  ACF spike tại lag 7 → thành phần seasonal MA(1): Q = 1</a:t>
+              <a:t>ACF spike tai lag 7 -&gt; seasonal MA(1): Q=1</a:t>
             </a:r>
           </a:p>
           <a:p>
@@ -19460,9 +18180,9 @@
                 <a:solidFill>
                   <a:srgbClr val="1A1A1A"/>
                 </a:solidFill>
-                <a:latin typeface="Calibri"/>
+                <a:latin typeface="Times New Roman"/>
               </a:rPr>
-              <a:t>▸  PACF không spike tại lag 7 → không cần seasonal AR: P = 0</a:t>
+              <a:t>PACF khong spike tai lag 7 -&gt; khong can seasonal AR: P=0</a:t>
             </a:r>
           </a:p>
           <a:p>
@@ -19476,9 +18196,9 @@
                 <a:solidFill>
                   <a:srgbClr val="1A1A1A"/>
                 </a:solidFill>
-                <a:latin typeface="Calibri"/>
+                <a:latin typeface="Times New Roman"/>
               </a:rPr>
-              <a:t>▸  ACF và PACF cùng spike tại lag 1 → cần cả AR(1) và MA(1): p = 1, q = 1</a:t>
+              <a:t>ACF va PACF cung spike tai lag 1 -&gt; AR(1) va MA(1): p=1, q=1</a:t>
             </a:r>
           </a:p>
           <a:p>
@@ -19492,137 +18212,37 @@
                 <a:solidFill>
                   <a:srgbClr val="1A1A1A"/>
                 </a:solidFill>
-                <a:latin typeface="Calibri"/>
+                <a:latin typeface="Times New Roman"/>
               </a:rPr>
-              <a:t>▸  Xác nhận: SARIMA(1,1,1)(0,1,1)[7]  ←  candidate chính</a:t>
-            </a:r>
-          </a:p>
-        </p:txBody>
-      </p:sp>
-      <p:sp>
-        <p:nvSpPr>
-          <p:cNvPr id="16" name="TextBox 15"/>
-          <p:cNvSpPr txBox="1"/>
-          <p:nvPr/>
-        </p:nvSpPr>
-        <p:spPr>
-          <a:xfrm>
-            <a:off x="365760" y="4846320"/>
-            <a:ext cx="11430000" cy="274320"/>
-          </a:xfrm>
-          <a:prstGeom prst="rect">
-            <a:avLst/>
-          </a:prstGeom>
-          <a:noFill/>
-        </p:spPr>
-        <p:txBody>
-          <a:bodyPr wrap="square">
-            <a:spAutoFit/>
-          </a:bodyPr>
-          <a:lstStyle/>
-          <a:p>
-            <a:pPr algn="l">
-              <a:spcAft>
-                <a:spcPts val="0"/>
-              </a:spcAft>
-            </a:pPr>
-            <a:r>
-              <a:rPr sz="1100" b="0" i="1">
-                <a:solidFill>
-                  <a:srgbClr val="555555"/>
-                </a:solidFill>
-                <a:latin typeface="Calibri"/>
-              </a:rPr>
-              <a:t>⚑  Đường đứt đỏ trong plot = bội số của s=7 — dùng để nhận diện seasonal lags</a:t>
-            </a:r>
-          </a:p>
-        </p:txBody>
-      </p:sp>
-      <p:sp>
-        <p:nvSpPr>
-          <p:cNvPr id="17" name="Rectangle 16"/>
-          <p:cNvSpPr/>
-          <p:nvPr/>
-        </p:nvSpPr>
-        <p:spPr>
-          <a:xfrm>
-            <a:off x="365760" y="5166360"/>
-            <a:ext cx="11430000" cy="1051560"/>
-          </a:xfrm>
-          <a:prstGeom prst="rect">
-            <a:avLst/>
-          </a:prstGeom>
-          <a:solidFill>
-            <a:srgbClr val="F2F4F8"/>
-          </a:solidFill>
-          <a:ln w="6350">
-            <a:solidFill>
-              <a:srgbClr val="D0D8E4"/>
-            </a:solidFill>
-          </a:ln>
-        </p:spPr>
-        <p:style>
-          <a:lnRef idx="1">
-            <a:schemeClr val="accent1"/>
-          </a:lnRef>
-          <a:fillRef idx="3">
-            <a:schemeClr val="accent1"/>
-          </a:fillRef>
-          <a:effectRef idx="2">
-            <a:schemeClr val="accent1"/>
-          </a:effectRef>
-          <a:fontRef idx="minor">
-            <a:schemeClr val="lt1"/>
-          </a:fontRef>
-        </p:style>
-        <p:txBody>
-          <a:bodyPr rtlCol="0" anchor="ctr"/>
-          <a:lstStyle/>
-          <a:p>
-            <a:pPr algn="ctr"/>
-          </a:p>
-        </p:txBody>
-      </p:sp>
-      <p:sp>
-        <p:nvSpPr>
-          <p:cNvPr id="18" name="TextBox 17"/>
-          <p:cNvSpPr txBox="1"/>
-          <p:nvPr/>
-        </p:nvSpPr>
-        <p:spPr>
-          <a:xfrm>
-            <a:off x="457200" y="5257800"/>
-            <a:ext cx="11247120" cy="1051560"/>
-          </a:xfrm>
-          <a:prstGeom prst="rect">
-            <a:avLst/>
-          </a:prstGeom>
-          <a:noFill/>
-        </p:spPr>
-        <p:txBody>
-          <a:bodyPr wrap="square">
-            <a:spAutoFit/>
-          </a:bodyPr>
-          <a:lstStyle/>
-          <a:p>
-            <a:pPr algn="ctr">
-              <a:spcAft>
-                <a:spcPts val="0"/>
-              </a:spcAft>
-            </a:pPr>
-            <a:r>
-              <a:rPr sz="1100" b="0" i="0">
-                <a:solidFill>
-                  <a:srgbClr val="555555"/>
-                </a:solidFill>
-                <a:latin typeface="Calibri"/>
-              </a:rPr>
-              <a:t>[Image not found:
-seasonal_dow.png]</a:t>
-            </a:r>
-          </a:p>
-        </p:txBody>
-      </p:sp>
+              <a:t>Xac nhan: SARIMA(1,1,1)(0,1,1)[7]  &lt;-  candidate chinh</a:t>
+            </a:r>
+          </a:p>
+        </p:txBody>
+      </p:sp>
+      <p:pic>
+        <p:nvPicPr>
+          <p:cNvPr id="15" name="Picture 14" descr="image.png"/>
+          <p:cNvPicPr>
+            <a:picLocks noChangeAspect="1"/>
+          </p:cNvPicPr>
+          <p:nvPr/>
+        </p:nvPicPr>
+        <p:blipFill>
+          <a:blip r:embed="rId2"/>
+          <a:stretch>
+            <a:fillRect/>
+          </a:stretch>
+        </p:blipFill>
+        <p:spPr>
+          <a:xfrm>
+            <a:off x="365760" y="4754880"/>
+            <a:ext cx="11430000" cy="1463040"/>
+          </a:xfrm>
+          <a:prstGeom prst="rect">
+            <a:avLst/>
+          </a:prstGeom>
+        </p:spPr>
+      </p:pic>
     </p:spTree>
   </p:cSld>
   <p:clrMapOvr>
